--- a/docs/ecostats_lectures/lecture_10/10_01_lecture_powerpoint.pptx
+++ b/docs/ecostats_lectures/lecture_10/10_01_lecture_powerpoint.pptx
@@ -4073,10 +4073,10 @@
 </p:sld>
 </file>
 
-<file path=ppt/slides/slide13.xml><?xml version="1.0" encoding="UTF-8"?><p:sld xmlns:a="http://schemas.openxmlformats.org/drawingml/2006/main" xmlns:r="http://schemas.openxmlformats.org/officeDocument/2006/relationships" xmlns:p="http://schemas.openxmlformats.org/presentationml/2006/main"><p:cSld><p:spTree><p:nvGrpSpPr><p:cNvPr id="1" name="" /><p:cNvGrpSpPr /><p:nvPr /></p:nvGrpSpPr><p:grpSpPr><a:xfrm><a:off x="0" y="0" /><a:ext cx="0" cy="0" /><a:chOff x="0" y="0" /><a:chExt cx="0" cy="0" /></a:xfrm></p:grpSpPr><p:sp><p:nvSpPr><p:cNvPr id="2" name="Title 1" /><p:cNvSpPr><a:spLocks noGrp="1" /></p:cNvSpPr><p:nvPr><p:ph type="title" /></p:nvPr></p:nvSpPr><p:spPr><a:xfrm><a:off x="0" y="0" /><a:ext cx="9144000" cy="871538" /></a:xfrm></p:spPr><p:txBody><a:bodyPr /><a:lstStyle /><a:p><a:pPr lvl="0" indent="0" marL="0"><a:buNone /></a:pPr><a:r><a:rPr b="1" /><a:t>Lecture 10:</a:t></a:r><a:r><a:rPr /><a:t> Analyses of variance</a:t></a:r></a:p></p:txBody></p:sp><p:sp><p:nvSpPr><p:cNvPr id="4" name="Text Placeholder 3" /><p:cNvSpPr><a:spLocks noGrp="1" /></p:cNvSpPr><p:nvPr><p:ph idx="2" sz="half" type="body" /></p:nvPr></p:nvSpPr><p:spPr /><p:txBody><a:bodyPr /><a:lstStyle /><a:p><a:pPr lvl="0" indent="0" marL="0"><a:buNone /></a:pPr><a:r><a:rPr /><a:t>Variance - SStotal partitioned into SSregression and SSresidual</a:t></a:r></a:p><a:p><a:pPr lvl="0" /><a:r><a:rPr /><a:t>SSregression is variance in Y explained by model</a:t></a:r></a:p><a:p><a:pPr lvl="0" /><a:r><a:rPr /><a:t>SSresidual is variance not explained by model</a:t></a:r></a:p></p:txBody></p:sp><p:graphicFrame><p:nvGraphicFramePr><p:cNvPr id="6" name="Content Placeholder 5" /><p:cNvGraphicFramePr><a:graphicFrameLocks noGrp="1" /></p:cNvGraphicFramePr><p:nvPr><p:ph idx="1" /></p:nvPr></p:nvGraphicFramePr><p:xfrm><a:off x="3657600" y="952500" /><a:ext cx="5232400" cy="3797300" /></p:xfrm><a:graphic><a:graphicData uri="http://schemas.openxmlformats.org/drawingml/2006/table"><a:tbl><a:tblPr firstRow="1" bandRow="1"><a:tableStyleId>{5C22544A-7EE6-4342-B048-85BDC9FD1C3A}</a:tableStyleId></a:tblPr><a:tblGrid><a:gridCol w="1041400" /><a:gridCol w="1041400" /><a:gridCol w="1041400" /><a:gridCol w="1041400" /><a:gridCol w="1041400" /></a:tblGrid><a:tr h="0"><a:tc><a:txBody><a:bodyPr /><a:lstStyle /><a:p><a:pPr lvl="0" indent="0" marL="0" algn="l"><a:buNone /></a:pPr><a:r><a:rPr /><a:t>Source of variation</a:t></a:r></a:p></a:txBody><a:tcPr /></a:tc><a:tc><a:txBody><a:bodyPr /><a:lstStyle /><a:p><a:pPr lvl="0" indent="0" marL="0" algn="l"><a:buNone /></a:pPr><a:r><a:rPr /><a:t>SS</a:t></a:r></a:p></a:txBody><a:tcPr /></a:tc><a:tc><a:txBody><a:bodyPr /><a:lstStyle /><a:p><a:pPr lvl="0" indent="0" marL="0" algn="l"><a:buNone /></a:pPr><a:r><a:rPr /><a:t>df</a:t></a:r></a:p></a:txBody><a:tcPr /></a:tc><a:tc><a:txBody><a:bodyPr /><a:lstStyle /><a:p><a:pPr lvl="0" indent="0" marL="0" algn="l"><a:buNone /></a:pPr><a:r><a:rPr /><a:t>MS</a:t></a:r></a:p></a:txBody><a:tcPr /></a:tc><a:tc><a:txBody><a:bodyPr /><a:lstStyle /><a:p><a:pPr lvl="0" indent="0" marL="0" algn="l"><a:buNone /></a:pPr><a:r><a:rPr /><a:t>Interpretation</a:t></a:r></a:p></a:txBody><a:tcPr /></a:tc></a:tr><a:tr h="0"><a:tc><a:txBody><a:bodyPr /><a:lstStyle /><a:p><a:pPr lvl="0" indent="0" marL="0" algn="l"><a:buNone /></a:pPr><a:r><a:rPr /><a:t>Regression</a:t></a:r></a:p></a:txBody></a:tc><a:tc><a:txBody><a:bodyPr /><a:lstStyle /><a:p><a:pPr lvl="0" indent="0" marL="0" algn="l"><a:buNone /></a:pPr><a14:m><m:oMath xmlns:m="http://schemas.openxmlformats.org/officeDocument/2006/math"><m:nary><m:naryPr><m:chr m:val="∑" /><m:limLoc m:val="undOvr" /><m:subHide m:val="off" /><m:supHide m:val="off" /></m:naryPr><m:sub><m:r><m:t>i</m:t></m:r><m:r><m:rPr><m:sty m:val="p" /></m:rPr><m:t>=</m:t></m:r><m:r><m:t>1</m:t></m:r></m:sub><m:sup><m:r><m:t>n</m:t></m:r></m:sup><m:e><m:sSup><m:e><m:d><m:dPr><m:begChr m:val="(" /><m:endChr m:val=")" /><m:sepChr m:val="" /><m:grow /></m:dPr><m:e><m:sSub><m:e><m:r><m:t>y</m:t></m:r></m:e><m:sub><m:r><m:t>i</m:t></m:r></m:sub></m:sSub><m:r><m:rPr><m:sty m:val="p" /></m:rPr><m:t>−</m:t></m:r><m:acc><m:accPr><m:chr m:val="‾" /></m:accPr><m:e><m:r><m:t>y</m:t></m:r></m:e></m:acc></m:e></m:d></m:e><m:sup><m:r><m:t>2</m:t></m:r></m:sup></m:sSup></m:e></m:nary></m:oMath></a14:m></a:p></a:txBody></a:tc><a:tc><a:txBody><a:bodyPr /><a:lstStyle /><a:p><a:pPr lvl="0" indent="0" marL="0" algn="l"><a:buNone /></a:pPr><a14:m><m:oMath xmlns:m="http://schemas.openxmlformats.org/officeDocument/2006/math"><m:r><m:t>p</m:t></m:r></m:oMath></a14:m></a:p></a:txBody></a:tc><a:tc><a:txBody><a:bodyPr /><a:lstStyle /><a:p><a:pPr lvl="0" indent="0" marL="0" algn="l"><a:buNone /></a:pPr><a14:m><m:oMath xmlns:m="http://schemas.openxmlformats.org/officeDocument/2006/math"><m:f><m:fPr><m:type m:val="bar" /></m:fPr><m:num><m:nary><m:naryPr><m:chr m:val="∑" /><m:limLoc m:val="undOvr" /><m:subHide m:val="off" /><m:supHide m:val="off" /></m:naryPr><m:sub><m:r><m:t>i</m:t></m:r><m:r><m:rPr><m:sty m:val="p" /></m:rPr><m:t>=</m:t></m:r><m:r><m:t>1</m:t></m:r></m:sub><m:sup><m:r><m:t>n</m:t></m:r></m:sup><m:e><m:sSup><m:e><m:d><m:dPr><m:begChr m:val="(" /><m:endChr m:val=")" /><m:sepChr m:val="" /><m:grow /></m:dPr><m:e><m:sSub><m:e><m:r><m:t>y</m:t></m:r></m:e><m:sub><m:r><m:t>i</m:t></m:r></m:sub></m:sSub><m:r><m:rPr><m:sty m:val="p" /></m:rPr><m:t>−</m:t></m:r><m:acc><m:accPr><m:chr m:val="‾" /></m:accPr><m:e><m:r><m:t>y</m:t></m:r></m:e></m:acc></m:e></m:d></m:e><m:sup><m:r><m:t>2</m:t></m:r></m:sup></m:sSup></m:e></m:nary></m:num><m:den><m:r><m:t>p</m:t></m:r></m:den></m:f></m:oMath></a14:m></a:p></a:txBody></a:tc><a:tc><a:txBody><a:bodyPr /><a:lstStyle /><a:p><a:pPr lvl="0" indent="0" marL="0" algn="l"><a:buNone /></a:pPr><a:r><a:rPr /><a:t>Difference between predicted observation and mean</a:t></a:r></a:p></a:txBody></a:tc></a:tr><a:tr h="0"><a:tc><a:txBody><a:bodyPr /><a:lstStyle /><a:p><a:pPr lvl="0" indent="0" marL="0" algn="l"><a:buNone /></a:pPr><a:r><a:rPr /><a:t>Residual</a:t></a:r></a:p></a:txBody></a:tc><a:tc><a:txBody><a:bodyPr /><a:lstStyle /><a:p><a:pPr lvl="0" indent="0" marL="0" algn="l"><a:buNone /></a:pPr><a14:m><m:oMath xmlns:m="http://schemas.openxmlformats.org/officeDocument/2006/math"><m:nary><m:naryPr><m:chr m:val="∑" /><m:limLoc m:val="undOvr" /><m:subHide m:val="off" /><m:supHide m:val="off" /></m:naryPr><m:sub><m:r><m:t>i</m:t></m:r><m:r><m:rPr><m:sty m:val="p" /></m:rPr><m:t>=</m:t></m:r><m:r><m:t>1</m:t></m:r></m:sub><m:sup><m:r><m:t>n</m:t></m:r></m:sup><m:e><m:sSup><m:e><m:d><m:dPr><m:begChr m:val="(" /><m:endChr m:val=")" /><m:sepChr m:val="" /><m:grow /></m:dPr><m:e><m:sSub><m:e><m:r><m:t>y</m:t></m:r></m:e><m:sub><m:r><m:t>i</m:t></m:r></m:sub></m:sSub><m:r><m:rPr><m:sty m:val="p" /></m:rPr><m:t>−</m:t></m:r><m:sSub><m:e><m:acc><m:accPr><m:chr m:val="̂" /></m:accPr><m:e><m:r><m:t>y</m:t></m:r></m:e></m:acc></m:e><m:sub><m:r><m:t>i</m:t></m:r></m:sub></m:sSub></m:e></m:d></m:e><m:sup><m:r><m:t>2</m:t></m:r></m:sup></m:sSup></m:e></m:nary></m:oMath></a14:m></a:p></a:txBody></a:tc><a:tc><a:txBody><a:bodyPr /><a:lstStyle /><a:p><a:pPr lvl="0" indent="0" marL="0" algn="l"><a:buNone /></a:pPr><a14:m><m:oMath xmlns:m="http://schemas.openxmlformats.org/officeDocument/2006/math"><m:r><m:t>n</m:t></m:r><m:r><m:rPr><m:sty m:val="p" /></m:rPr><m:t>−</m:t></m:r><m:r><m:t>p</m:t></m:r><m:r><m:rPr><m:sty m:val="p" /></m:rPr><m:t>−</m:t></m:r><m:r><m:t>1</m:t></m:r></m:oMath></a14:m></a:p></a:txBody></a:tc><a:tc><a:txBody><a:bodyPr /><a:lstStyle /><a:p><a:pPr lvl="0" indent="0" marL="0" algn="l"><a:buNone /></a:pPr><a14:m><m:oMath xmlns:m="http://schemas.openxmlformats.org/officeDocument/2006/math"><m:f><m:fPr><m:type m:val="bar" /></m:fPr><m:num><m:nary><m:naryPr><m:chr m:val="∑" /><m:limLoc m:val="undOvr" /><m:subHide m:val="off" /><m:supHide m:val="off" /></m:naryPr><m:sub><m:r><m:t>i</m:t></m:r><m:r><m:rPr><m:sty m:val="p" /></m:rPr><m:t>=</m:t></m:r><m:r><m:t>1</m:t></m:r></m:sub><m:sup><m:r><m:t>n</m:t></m:r></m:sup><m:e><m:sSup><m:e><m:d><m:dPr><m:begChr m:val="(" /><m:endChr m:val=")" /><m:sepChr m:val="" /><m:grow /></m:dPr><m:e><m:sSub><m:e><m:r><m:t>y</m:t></m:r></m:e><m:sub><m:r><m:t>i</m:t></m:r></m:sub></m:sSub><m:r><m:rPr><m:sty m:val="p" /></m:rPr><m:t>−</m:t></m:r><m:sSub><m:e><m:acc><m:accPr><m:chr m:val="̂" /></m:accPr><m:e><m:r><m:t>y</m:t></m:r></m:e></m:acc></m:e><m:sub><m:r><m:t>i</m:t></m:r></m:sub></m:sSub></m:e></m:d></m:e><m:sup><m:r><m:t>2</m:t></m:r></m:sup></m:sSup></m:e></m:nary></m:num><m:den><m:r><m:t>n</m:t></m:r><m:r><m:rPr><m:sty m:val="p" /></m:rPr><m:t>−</m:t></m:r><m:r><m:t>p</m:t></m:r><m:r><m:rPr><m:sty m:val="p" /></m:rPr><m:t>−</m:t></m:r><m:r><m:t>1</m:t></m:r></m:den></m:f></m:oMath></a14:m></a:p></a:txBody></a:tc><a:tc><a:txBody><a:bodyPr /><a:lstStyle /><a:p><a:pPr lvl="0" indent="0" marL="0" algn="l"><a:buNone /></a:pPr><a:r><a:rPr /><a:t>Difference between each observation and predicted</a:t></a:r></a:p></a:txBody></a:tc></a:tr><a:tr h="0"><a:tc><a:txBody><a:bodyPr /><a:lstStyle /><a:p><a:pPr lvl="0" indent="0" marL="0" algn="l"><a:buNone /></a:pPr><a:r><a:rPr /><a:t>Total</a:t></a:r></a:p></a:txBody></a:tc><a:tc><a:txBody><a:bodyPr /><a:lstStyle /><a:p><a:pPr lvl="0" indent="0" marL="0" algn="l"><a:buNone /></a:pPr><a14:m><m:oMath xmlns:m="http://schemas.openxmlformats.org/officeDocument/2006/math"><m:nary><m:naryPr><m:chr m:val="∑" /><m:limLoc m:val="undOvr" /><m:subHide m:val="off" /><m:supHide m:val="off" /></m:naryPr><m:sub><m:r><m:t>i</m:t></m:r><m:r><m:rPr><m:sty m:val="p" /></m:rPr><m:t>=</m:t></m:r><m:r><m:t>1</m:t></m:r></m:sub><m:sup><m:r><m:t>n</m:t></m:r></m:sup><m:e><m:sSup><m:e><m:d><m:dPr><m:begChr m:val="(" /><m:endChr m:val=")" /><m:sepChr m:val="" /><m:grow /></m:dPr><m:e><m:sSub><m:e><m:r><m:t>y</m:t></m:r></m:e><m:sub><m:r><m:t>i</m:t></m:r></m:sub></m:sSub><m:r><m:rPr><m:sty m:val="p" /></m:rPr><m:t>−</m:t></m:r><m:acc><m:accPr><m:chr m:val="‾" /></m:accPr><m:e><m:r><m:t>y</m:t></m:r></m:e></m:acc></m:e></m:d></m:e><m:sup><m:r><m:t>2</m:t></m:r></m:sup></m:sSup></m:e></m:nary></m:oMath></a14:m></a:p></a:txBody></a:tc><a:tc><a:txBody><a:bodyPr /><a:lstStyle /><a:p><a:pPr lvl="0" indent="0" marL="0" algn="l"><a:buNone /></a:pPr><a14:m><m:oMath xmlns:m="http://schemas.openxmlformats.org/officeDocument/2006/math"><m:r><m:t>n</m:t></m:r><m:r><m:rPr><m:sty m:val="p" /></m:rPr><m:t>−</m:t></m:r><m:r><m:t>1</m:t></m:r></m:oMath></a14:m></a:p></a:txBody></a:tc><a:tc><a:txBody><a:bodyPr /><a:lstStyle /><a:p><a:endParaRPr /></a:p></a:txBody></a:tc><a:tc><a:txBody><a:bodyPr /><a:lstStyle /><a:p><a:pPr lvl="0" indent="0" marL="0" algn="l"><a:buNone /></a:pPr><a:r><a:rPr /><a:t>Difference between each observation and mean</a:t></a:r></a:p></a:txBody></a:tc></a:tr></a:tbl></a:graphicData></a:graphic></p:graphicFrame></p:spTree></p:cSld></p:sld>
+<file path=ppt/slides/slide13.xml><?xml version="1.0" encoding="UTF-8"?><p:sld xmlns:a="http://schemas.openxmlformats.org/drawingml/2006/main" xmlns:r="http://schemas.openxmlformats.org/officeDocument/2006/relationships" xmlns:p="http://schemas.openxmlformats.org/presentationml/2006/main"><p:cSld><p:spTree><p:nvGrpSpPr><p:cNvPr id="1" name="" /><p:cNvGrpSpPr /><p:nvPr /></p:nvGrpSpPr><p:grpSpPr><a:xfrm><a:off x="0" y="0" /><a:ext cx="0" cy="0" /><a:chOff x="0" y="0" /><a:chExt cx="0" cy="0" /></a:xfrm></p:grpSpPr><p:sp><p:nvSpPr><p:cNvPr id="2" name="Title 1" /><p:cNvSpPr><a:spLocks noGrp="1" /></p:cNvSpPr><p:nvPr><p:ph type="title" /></p:nvPr></p:nvSpPr><p:spPr><a:xfrm><a:off x="0" y="0" /><a:ext cx="9144000" cy="871538" /></a:xfrm></p:spPr><p:txBody><a:bodyPr /><a:lstStyle /><a:p><a:pPr lvl="0" indent="0" marL="0"><a:buNone /></a:pPr><a:r><a:rPr b="1" /><a:t>Lecture 10:</a:t></a:r><a:r><a:rPr /><a:t> Analyses of variance</a:t></a:r></a:p></p:txBody></p:sp><p:sp><p:nvSpPr><p:cNvPr id="4" name="Text Placeholder 3" /><p:cNvSpPr><a:spLocks noGrp="1" /></p:cNvSpPr><p:nvPr><p:ph idx="2" sz="half" type="body" /></p:nvPr></p:nvSpPr><p:spPr /><p:txBody><a:bodyPr /><a:lstStyle /><a:p><a:pPr lvl="0" indent="0" marL="0"><a:buNone /></a:pPr><a:r><a:rPr /><a:t>Variance - SStotal partitioned into SSregression and SSresidual</a:t></a:r></a:p><a:p><a:pPr lvl="0" /><a:r><a:rPr /><a:t>SSregression is variance in Y explained by model</a:t></a:r></a:p><a:p><a:pPr lvl="0" /><a:r><a:rPr /><a:t>SSresidual is variance not explained by model</a:t></a:r></a:p></p:txBody></p:sp><p:graphicFrame><p:nvGraphicFramePr><p:cNvPr id="6" name="Content Placeholder 5" /><p:cNvGraphicFramePr><a:graphicFrameLocks noGrp="1" /></p:cNvGraphicFramePr><p:nvPr><p:ph idx="1" /></p:nvPr></p:nvGraphicFramePr><p:xfrm><a:off x="3657600" y="952500" /><a:ext cx="5232400" cy="3797300" /></p:xfrm><a:graphic><a:graphicData uri="http://schemas.openxmlformats.org/drawingml/2006/table"><a:tbl><a:tblPr firstRow="1" bandRow="1"><a:tableStyleId>{5C22544A-7EE6-4342-B048-85BDC9FD1C3A}</a:tableStyleId></a:tblPr><a:tblGrid><a:gridCol w="1041400" /><a:gridCol w="1041400" /><a:gridCol w="1041400" /><a:gridCol w="1041400" /><a:gridCol w="1041400" /></a:tblGrid><a:tr h="0"><a:tc><a:txBody><a:bodyPr /><a:lstStyle /><a:p><a:pPr lvl="0" indent="0" marL="0" algn="l"><a:buNone /></a:pPr><a:r><a:rPr /><a:t>Source of variation</a:t></a:r></a:p></a:txBody><a:tcPr /></a:tc><a:tc><a:txBody><a:bodyPr /><a:lstStyle /><a:p><a:pPr lvl="0" indent="0" marL="0" algn="l"><a:buNone /></a:pPr><a:r><a:rPr /><a:t>SS</a:t></a:r></a:p></a:txBody><a:tcPr /></a:tc><a:tc><a:txBody><a:bodyPr /><a:lstStyle /><a:p><a:pPr lvl="0" indent="0" marL="0" algn="l"><a:buNone /></a:pPr><a:r><a:rPr /><a:t>df</a:t></a:r></a:p></a:txBody><a:tcPr /></a:tc><a:tc><a:txBody><a:bodyPr /><a:lstStyle /><a:p><a:pPr lvl="0" indent="0" marL="0" algn="l"><a:buNone /></a:pPr><a:r><a:rPr /><a:t>MS</a:t></a:r></a:p></a:txBody><a:tcPr /></a:tc><a:tc><a:txBody><a:bodyPr /><a:lstStyle /><a:p><a:pPr lvl="0" indent="0" marL="0" algn="l"><a:buNone /></a:pPr><a:r><a:rPr /><a:t>Interpretation</a:t></a:r></a:p></a:txBody><a:tcPr /></a:tc></a:tr><a:tr h="0"><a:tc><a:txBody><a:bodyPr /><a:lstStyle /><a:p><a:pPr lvl="0" indent="0" marL="0" algn="l"><a:buNone /></a:pPr><a:r><a:rPr /><a:t>Regression</a:t></a:r></a:p></a:txBody></a:tc><a:tc><a:txBody><a:bodyPr /><a:lstStyle /><a:p><a:pPr lvl="0" indent="0" marL="0" algn="l"><a:buNone /></a:pPr><a14:m><m:oMath xmlns:m="http://schemas.openxmlformats.org/officeDocument/2006/math"><m:nary><m:naryPr><m:chr m:val="∑" /><m:limLoc m:val="undOvr" /><m:subHide m:val="off" /><m:supHide m:val="off" /></m:naryPr><m:sub><m:r><m:t>i</m:t></m:r><m:r><m:rPr><m:sty m:val="p" /></m:rPr><m:t>=</m:t></m:r><m:r><m:t>1</m:t></m:r></m:sub><m:sup><m:r><m:t>n</m:t></m:r></m:sup><m:e><m:sSup><m:e><m:d><m:dPr><m:begChr m:val="(" /><m:sepChr m:val="" /><m:endChr m:val=")" /><m:grow /></m:dPr><m:e><m:sSub><m:e><m:r><m:t>y</m:t></m:r></m:e><m:sub><m:r><m:t>i</m:t></m:r></m:sub></m:sSub><m:r><m:rPr><m:sty m:val="p" /></m:rPr><m:t>−</m:t></m:r><m:acc><m:accPr><m:chr m:val="‾" /></m:accPr><m:e><m:r><m:t>y</m:t></m:r></m:e></m:acc></m:e></m:d></m:e><m:sup><m:r><m:t>2</m:t></m:r></m:sup></m:sSup></m:e></m:nary></m:oMath></a14:m></a:p></a:txBody></a:tc><a:tc><a:txBody><a:bodyPr /><a:lstStyle /><a:p><a:pPr lvl="0" indent="0" marL="0" algn="l"><a:buNone /></a:pPr><a14:m><m:oMath xmlns:m="http://schemas.openxmlformats.org/officeDocument/2006/math"><m:r><m:t>p</m:t></m:r></m:oMath></a14:m></a:p></a:txBody></a:tc><a:tc><a:txBody><a:bodyPr /><a:lstStyle /><a:p><a:pPr lvl="0" indent="0" marL="0" algn="l"><a:buNone /></a:pPr><a14:m><m:oMath xmlns:m="http://schemas.openxmlformats.org/officeDocument/2006/math"><m:f><m:fPr><m:type m:val="bar" /></m:fPr><m:num><m:nary><m:naryPr><m:chr m:val="∑" /><m:limLoc m:val="undOvr" /><m:subHide m:val="off" /><m:supHide m:val="off" /></m:naryPr><m:sub><m:r><m:t>i</m:t></m:r><m:r><m:rPr><m:sty m:val="p" /></m:rPr><m:t>=</m:t></m:r><m:r><m:t>1</m:t></m:r></m:sub><m:sup><m:r><m:t>n</m:t></m:r></m:sup><m:e><m:sSup><m:e><m:d><m:dPr><m:begChr m:val="(" /><m:sepChr m:val="" /><m:endChr m:val=")" /><m:grow /></m:dPr><m:e><m:sSub><m:e><m:r><m:t>y</m:t></m:r></m:e><m:sub><m:r><m:t>i</m:t></m:r></m:sub></m:sSub><m:r><m:rPr><m:sty m:val="p" /></m:rPr><m:t>−</m:t></m:r><m:acc><m:accPr><m:chr m:val="‾" /></m:accPr><m:e><m:r><m:t>y</m:t></m:r></m:e></m:acc></m:e></m:d></m:e><m:sup><m:r><m:t>2</m:t></m:r></m:sup></m:sSup></m:e></m:nary></m:num><m:den><m:r><m:t>p</m:t></m:r></m:den></m:f></m:oMath></a14:m></a:p></a:txBody></a:tc><a:tc><a:txBody><a:bodyPr /><a:lstStyle /><a:p><a:pPr lvl="0" indent="0" marL="0" algn="l"><a:buNone /></a:pPr><a:r><a:rPr /><a:t>Difference between predicted observation and mean</a:t></a:r></a:p></a:txBody></a:tc></a:tr><a:tr h="0"><a:tc><a:txBody><a:bodyPr /><a:lstStyle /><a:p><a:pPr lvl="0" indent="0" marL="0" algn="l"><a:buNone /></a:pPr><a:r><a:rPr /><a:t>Residual</a:t></a:r></a:p></a:txBody></a:tc><a:tc><a:txBody><a:bodyPr /><a:lstStyle /><a:p><a:pPr lvl="0" indent="0" marL="0" algn="l"><a:buNone /></a:pPr><a14:m><m:oMath xmlns:m="http://schemas.openxmlformats.org/officeDocument/2006/math"><m:nary><m:naryPr><m:chr m:val="∑" /><m:limLoc m:val="undOvr" /><m:subHide m:val="off" /><m:supHide m:val="off" /></m:naryPr><m:sub><m:r><m:t>i</m:t></m:r><m:r><m:rPr><m:sty m:val="p" /></m:rPr><m:t>=</m:t></m:r><m:r><m:t>1</m:t></m:r></m:sub><m:sup><m:r><m:t>n</m:t></m:r></m:sup><m:e><m:sSup><m:e><m:d><m:dPr><m:begChr m:val="(" /><m:sepChr m:val="" /><m:endChr m:val=")" /><m:grow /></m:dPr><m:e><m:sSub><m:e><m:r><m:t>y</m:t></m:r></m:e><m:sub><m:r><m:t>i</m:t></m:r></m:sub></m:sSub><m:r><m:rPr><m:sty m:val="p" /></m:rPr><m:t>−</m:t></m:r><m:sSub><m:e><m:acc><m:accPr><m:chr m:val="̂" /></m:accPr><m:e><m:r><m:t>y</m:t></m:r></m:e></m:acc></m:e><m:sub><m:r><m:t>i</m:t></m:r></m:sub></m:sSub></m:e></m:d></m:e><m:sup><m:r><m:t>2</m:t></m:r></m:sup></m:sSup></m:e></m:nary></m:oMath></a14:m></a:p></a:txBody></a:tc><a:tc><a:txBody><a:bodyPr /><a:lstStyle /><a:p><a:pPr lvl="0" indent="0" marL="0" algn="l"><a:buNone /></a:pPr><a14:m><m:oMath xmlns:m="http://schemas.openxmlformats.org/officeDocument/2006/math"><m:r><m:t>n</m:t></m:r><m:r><m:rPr><m:sty m:val="p" /></m:rPr><m:t>−</m:t></m:r><m:r><m:t>p</m:t></m:r><m:r><m:rPr><m:sty m:val="p" /></m:rPr><m:t>−</m:t></m:r><m:r><m:t>1</m:t></m:r></m:oMath></a14:m></a:p></a:txBody></a:tc><a:tc><a:txBody><a:bodyPr /><a:lstStyle /><a:p><a:pPr lvl="0" indent="0" marL="0" algn="l"><a:buNone /></a:pPr><a14:m><m:oMath xmlns:m="http://schemas.openxmlformats.org/officeDocument/2006/math"><m:f><m:fPr><m:type m:val="bar" /></m:fPr><m:num><m:nary><m:naryPr><m:chr m:val="∑" /><m:limLoc m:val="undOvr" /><m:subHide m:val="off" /><m:supHide m:val="off" /></m:naryPr><m:sub><m:r><m:t>i</m:t></m:r><m:r><m:rPr><m:sty m:val="p" /></m:rPr><m:t>=</m:t></m:r><m:r><m:t>1</m:t></m:r></m:sub><m:sup><m:r><m:t>n</m:t></m:r></m:sup><m:e><m:sSup><m:e><m:d><m:dPr><m:begChr m:val="(" /><m:sepChr m:val="" /><m:endChr m:val=")" /><m:grow /></m:dPr><m:e><m:sSub><m:e><m:r><m:t>y</m:t></m:r></m:e><m:sub><m:r><m:t>i</m:t></m:r></m:sub></m:sSub><m:r><m:rPr><m:sty m:val="p" /></m:rPr><m:t>−</m:t></m:r><m:sSub><m:e><m:acc><m:accPr><m:chr m:val="̂" /></m:accPr><m:e><m:r><m:t>y</m:t></m:r></m:e></m:acc></m:e><m:sub><m:r><m:t>i</m:t></m:r></m:sub></m:sSub></m:e></m:d></m:e><m:sup><m:r><m:t>2</m:t></m:r></m:sup></m:sSup></m:e></m:nary></m:num><m:den><m:r><m:t>n</m:t></m:r><m:r><m:rPr><m:sty m:val="p" /></m:rPr><m:t>−</m:t></m:r><m:r><m:t>p</m:t></m:r><m:r><m:rPr><m:sty m:val="p" /></m:rPr><m:t>−</m:t></m:r><m:r><m:t>1</m:t></m:r></m:den></m:f></m:oMath></a14:m></a:p></a:txBody></a:tc><a:tc><a:txBody><a:bodyPr /><a:lstStyle /><a:p><a:pPr lvl="0" indent="0" marL="0" algn="l"><a:buNone /></a:pPr><a:r><a:rPr /><a:t>Difference between each observation and predicted</a:t></a:r></a:p></a:txBody></a:tc></a:tr><a:tr h="0"><a:tc><a:txBody><a:bodyPr /><a:lstStyle /><a:p><a:pPr lvl="0" indent="0" marL="0" algn="l"><a:buNone /></a:pPr><a:r><a:rPr /><a:t>Total</a:t></a:r></a:p></a:txBody></a:tc><a:tc><a:txBody><a:bodyPr /><a:lstStyle /><a:p><a:pPr lvl="0" indent="0" marL="0" algn="l"><a:buNone /></a:pPr><a14:m><m:oMath xmlns:m="http://schemas.openxmlformats.org/officeDocument/2006/math"><m:nary><m:naryPr><m:chr m:val="∑" /><m:limLoc m:val="undOvr" /><m:subHide m:val="off" /><m:supHide m:val="off" /></m:naryPr><m:sub><m:r><m:t>i</m:t></m:r><m:r><m:rPr><m:sty m:val="p" /></m:rPr><m:t>=</m:t></m:r><m:r><m:t>1</m:t></m:r></m:sub><m:sup><m:r><m:t>n</m:t></m:r></m:sup><m:e><m:sSup><m:e><m:d><m:dPr><m:begChr m:val="(" /><m:sepChr m:val="" /><m:endChr m:val=")" /><m:grow /></m:dPr><m:e><m:sSub><m:e><m:r><m:t>y</m:t></m:r></m:e><m:sub><m:r><m:t>i</m:t></m:r></m:sub></m:sSub><m:r><m:rPr><m:sty m:val="p" /></m:rPr><m:t>−</m:t></m:r><m:acc><m:accPr><m:chr m:val="‾" /></m:accPr><m:e><m:r><m:t>y</m:t></m:r></m:e></m:acc></m:e></m:d></m:e><m:sup><m:r><m:t>2</m:t></m:r></m:sup></m:sSup></m:e></m:nary></m:oMath></a14:m></a:p></a:txBody></a:tc><a:tc><a:txBody><a:bodyPr /><a:lstStyle /><a:p><a:pPr lvl="0" indent="0" marL="0" algn="l"><a:buNone /></a:pPr><a14:m><m:oMath xmlns:m="http://schemas.openxmlformats.org/officeDocument/2006/math"><m:r><m:t>n</m:t></m:r><m:r><m:rPr><m:sty m:val="p" /></m:rPr><m:t>−</m:t></m:r><m:r><m:t>1</m:t></m:r></m:oMath></a14:m></a:p></a:txBody></a:tc><a:tc><a:txBody><a:bodyPr /><a:lstStyle /><a:p><a:endParaRPr /></a:p></a:txBody></a:tc><a:tc><a:txBody><a:bodyPr /><a:lstStyle /><a:p><a:pPr lvl="0" indent="0" marL="0" algn="l"><a:buNone /></a:pPr><a:r><a:rPr /><a:t>Difference between each observation and mean</a:t></a:r></a:p></a:txBody></a:tc></a:tr></a:tbl></a:graphicData></a:graphic></p:graphicFrame></p:spTree></p:cSld></p:sld>
 </file>
 
-<file path=ppt/slides/slide14.xml><?xml version="1.0" encoding="UTF-8"?><p:sld xmlns:a="http://schemas.openxmlformats.org/drawingml/2006/main" xmlns:r="http://schemas.openxmlformats.org/officeDocument/2006/relationships" xmlns:p="http://schemas.openxmlformats.org/presentationml/2006/main"><p:cSld><p:spTree><p:nvGrpSpPr><p:cNvPr id="1" name="" /><p:cNvGrpSpPr /><p:nvPr /></p:nvGrpSpPr><p:grpSpPr><a:xfrm><a:off x="0" y="0" /><a:ext cx="0" cy="0" /><a:chOff x="0" y="0" /><a:chExt cx="0" cy="0" /></a:xfrm></p:grpSpPr><p:sp><p:nvSpPr><p:cNvPr id="2" name="Title 1" /><p:cNvSpPr><a:spLocks noGrp="1" /></p:cNvSpPr><p:nvPr><p:ph type="title" /></p:nvPr></p:nvSpPr><p:spPr><a:xfrm><a:off x="0" y="0" /><a:ext cx="9144000" cy="871538" /></a:xfrm></p:spPr><p:txBody><a:bodyPr /><a:lstStyle /><a:p><a:pPr lvl="0" indent="0" marL="0"><a:buNone /></a:pPr><a:r><a:rPr b="1" /><a:t>Lecture 10:</a:t></a:r><a:r><a:rPr /><a:t> Analyses</a:t></a:r></a:p></p:txBody></p:sp><p:sp><p:nvSpPr><p:cNvPr id="4" name="Text Placeholder 3" /><p:cNvSpPr><a:spLocks noGrp="1" /></p:cNvSpPr><p:nvPr><p:ph idx="2" sz="half" type="body" /></p:nvPr></p:nvSpPr><p:spPr /><p:txBody><a:bodyPr /><a:lstStyle /><a:p><a:pPr lvl="0" indent="0" marL="0"><a:buNone /></a:pPr><a:r><a:rPr /><a:t>SS converted to non-additive MS (SS/df)</a:t></a:r></a:p><a:p><a:pPr lvl="0" /><a:r><a:rPr /><a:t>MSresidual: estimate population variance</a:t></a:r></a:p><a:p><a:pPr lvl="0" /><a:r><a:rPr /><a:t>MSregression: estimate population variance + variation due to strength of X-Y relationships</a:t></a:r></a:p><a:p><a:pPr lvl="0" /><a:r><a:rPr /><a:t>MS do not depend on sample size</a:t></a:r></a:p></p:txBody></p:sp><p:graphicFrame><p:nvGraphicFramePr><p:cNvPr id="6" name="Content Placeholder 5" /><p:cNvGraphicFramePr><a:graphicFrameLocks noGrp="1" /></p:cNvGraphicFramePr><p:nvPr><p:ph idx="1" /></p:nvPr></p:nvGraphicFramePr><p:xfrm><a:off x="3657600" y="952500" /><a:ext cx="5232400" cy="3797300" /></p:xfrm><a:graphic><a:graphicData uri="http://schemas.openxmlformats.org/drawingml/2006/table"><a:tbl><a:tblPr firstRow="1" bandRow="1"><a:tableStyleId>{5C22544A-7EE6-4342-B048-85BDC9FD1C3A}</a:tableStyleId></a:tblPr><a:tblGrid><a:gridCol w="1308100" /><a:gridCol w="1308100" /><a:gridCol w="1308100" /><a:gridCol w="1308100" /></a:tblGrid><a:tr h="0"><a:tc><a:txBody><a:bodyPr /><a:lstStyle /><a:p><a:pPr lvl="0" indent="0" marL="0" algn="l"><a:buNone /></a:pPr><a:r><a:rPr /><a:t>Source of variation</a:t></a:r></a:p></a:txBody><a:tcPr /></a:tc><a:tc><a:txBody><a:bodyPr /><a:lstStyle /><a:p><a:pPr lvl="0" indent="0" marL="0" algn="l"><a:buNone /></a:pPr><a:r><a:rPr /><a:t>SS</a:t></a:r></a:p></a:txBody><a:tcPr /></a:tc><a:tc><a:txBody><a:bodyPr /><a:lstStyle /><a:p><a:pPr lvl="0" indent="0" marL="0" algn="l"><a:buNone /></a:pPr><a:r><a:rPr /><a:t>df</a:t></a:r></a:p></a:txBody><a:tcPr /></a:tc><a:tc><a:txBody><a:bodyPr /><a:lstStyle /><a:p><a:pPr lvl="0" indent="0" marL="0" algn="l"><a:buNone /></a:pPr><a:r><a:rPr /><a:t>MS</a:t></a:r></a:p></a:txBody><a:tcPr /></a:tc></a:tr><a:tr h="0"><a:tc><a:txBody><a:bodyPr /><a:lstStyle /><a:p><a:pPr lvl="0" indent="0" marL="0" algn="l"><a:buNone /></a:pPr><a:r><a:rPr /><a:t>Regression</a:t></a:r></a:p></a:txBody></a:tc><a:tc><a:txBody><a:bodyPr /><a:lstStyle /><a:p><a:pPr lvl="0" indent="0" marL="0" algn="l"><a:buNone /></a:pPr><a14:m><m:oMath xmlns:m="http://schemas.openxmlformats.org/officeDocument/2006/math"><m:nary><m:naryPr><m:chr m:val="∑" /><m:limLoc m:val="undOvr" /><m:subHide m:val="off" /><m:supHide m:val="off" /></m:naryPr><m:sub><m:r><m:t>i</m:t></m:r><m:r><m:rPr><m:sty m:val="p" /></m:rPr><m:t>=</m:t></m:r><m:r><m:t>1</m:t></m:r></m:sub><m:sup><m:r><m:t>n</m:t></m:r></m:sup><m:e><m:sSup><m:e><m:d><m:dPr><m:begChr m:val="(" /><m:endChr m:val=")" /><m:sepChr m:val="" /><m:grow /></m:dPr><m:e><m:sSub><m:e><m:r><m:t>y</m:t></m:r></m:e><m:sub><m:r><m:t>i</m:t></m:r></m:sub></m:sSub><m:r><m:rPr><m:sty m:val="p" /></m:rPr><m:t>−</m:t></m:r><m:acc><m:accPr><m:chr m:val="‾" /></m:accPr><m:e><m:r><m:t>y</m:t></m:r></m:e></m:acc></m:e></m:d></m:e><m:sup><m:r><m:t>2</m:t></m:r></m:sup></m:sSup></m:e></m:nary></m:oMath></a14:m></a:p></a:txBody></a:tc><a:tc><a:txBody><a:bodyPr /><a:lstStyle /><a:p><a:pPr lvl="0" indent="0" marL="0" algn="l"><a:buNone /></a:pPr><a14:m><m:oMath xmlns:m="http://schemas.openxmlformats.org/officeDocument/2006/math"><m:r><m:t>p</m:t></m:r></m:oMath></a14:m></a:p></a:txBody></a:tc><a:tc><a:txBody><a:bodyPr /><a:lstStyle /><a:p><a:pPr lvl="0" indent="0" marL="0" algn="l"><a:buNone /></a:pPr><a14:m><m:oMath xmlns:m="http://schemas.openxmlformats.org/officeDocument/2006/math"><m:f><m:fPr><m:type m:val="bar" /></m:fPr><m:num><m:nary><m:naryPr><m:chr m:val="∑" /><m:limLoc m:val="undOvr" /><m:subHide m:val="off" /><m:supHide m:val="off" /></m:naryPr><m:sub><m:r><m:t>i</m:t></m:r><m:r><m:rPr><m:sty m:val="p" /></m:rPr><m:t>=</m:t></m:r><m:r><m:t>1</m:t></m:r></m:sub><m:sup><m:r><m:t>n</m:t></m:r></m:sup><m:e><m:sSup><m:e><m:d><m:dPr><m:begChr m:val="(" /><m:endChr m:val=")" /><m:sepChr m:val="" /><m:grow /></m:dPr><m:e><m:sSub><m:e><m:r><m:t>y</m:t></m:r></m:e><m:sub><m:r><m:t>i</m:t></m:r></m:sub></m:sSub><m:r><m:rPr><m:sty m:val="p" /></m:rPr><m:t>−</m:t></m:r><m:acc><m:accPr><m:chr m:val="‾" /></m:accPr><m:e><m:r><m:t>y</m:t></m:r></m:e></m:acc></m:e></m:d></m:e><m:sup><m:r><m:t>2</m:t></m:r></m:sup></m:sSup></m:e></m:nary></m:num><m:den><m:r><m:t>p</m:t></m:r></m:den></m:f></m:oMath></a14:m></a:p></a:txBody></a:tc></a:tr><a:tr h="0"><a:tc><a:txBody><a:bodyPr /><a:lstStyle /><a:p><a:pPr lvl="0" indent="0" marL="0" algn="l"><a:buNone /></a:pPr><a:r><a:rPr /><a:t>Residual</a:t></a:r></a:p></a:txBody></a:tc><a:tc><a:txBody><a:bodyPr /><a:lstStyle /><a:p><a:pPr lvl="0" indent="0" marL="0" algn="l"><a:buNone /></a:pPr><a14:m><m:oMath xmlns:m="http://schemas.openxmlformats.org/officeDocument/2006/math"><m:nary><m:naryPr><m:chr m:val="∑" /><m:limLoc m:val="undOvr" /><m:subHide m:val="off" /><m:supHide m:val="off" /></m:naryPr><m:sub><m:r><m:t>i</m:t></m:r><m:r><m:rPr><m:sty m:val="p" /></m:rPr><m:t>=</m:t></m:r><m:r><m:t>1</m:t></m:r></m:sub><m:sup><m:r><m:t>n</m:t></m:r></m:sup><m:e><m:sSup><m:e><m:d><m:dPr><m:begChr m:val="(" /><m:endChr m:val=")" /><m:sepChr m:val="" /><m:grow /></m:dPr><m:e><m:sSub><m:e><m:r><m:t>y</m:t></m:r></m:e><m:sub><m:r><m:t>i</m:t></m:r></m:sub></m:sSub><m:r><m:rPr><m:sty m:val="p" /></m:rPr><m:t>−</m:t></m:r><m:sSub><m:e><m:acc><m:accPr><m:chr m:val="̂" /></m:accPr><m:e><m:r><m:t>y</m:t></m:r></m:e></m:acc></m:e><m:sub><m:r><m:t>i</m:t></m:r></m:sub></m:sSub></m:e></m:d></m:e><m:sup><m:r><m:t>2</m:t></m:r></m:sup></m:sSup></m:e></m:nary></m:oMath></a14:m></a:p></a:txBody></a:tc><a:tc><a:txBody><a:bodyPr /><a:lstStyle /><a:p><a:pPr lvl="0" indent="0" marL="0" algn="l"><a:buNone /></a:pPr><a14:m><m:oMath xmlns:m="http://schemas.openxmlformats.org/officeDocument/2006/math"><m:r><m:t>n</m:t></m:r><m:r><m:rPr><m:sty m:val="p" /></m:rPr><m:t>−</m:t></m:r><m:r><m:t>p</m:t></m:r><m:r><m:rPr><m:sty m:val="p" /></m:rPr><m:t>−</m:t></m:r><m:r><m:t>1</m:t></m:r></m:oMath></a14:m></a:p></a:txBody></a:tc><a:tc><a:txBody><a:bodyPr /><a:lstStyle /><a:p><a:pPr lvl="0" indent="0" marL="0" algn="l"><a:buNone /></a:pPr><a14:m><m:oMath xmlns:m="http://schemas.openxmlformats.org/officeDocument/2006/math"><m:f><m:fPr><m:type m:val="bar" /></m:fPr><m:num><m:nary><m:naryPr><m:chr m:val="∑" /><m:limLoc m:val="undOvr" /><m:subHide m:val="off" /><m:supHide m:val="off" /></m:naryPr><m:sub><m:r><m:t>i</m:t></m:r><m:r><m:rPr><m:sty m:val="p" /></m:rPr><m:t>=</m:t></m:r><m:r><m:t>1</m:t></m:r></m:sub><m:sup><m:r><m:t>n</m:t></m:r></m:sup><m:e><m:sSup><m:e><m:d><m:dPr><m:begChr m:val="(" /><m:endChr m:val=")" /><m:sepChr m:val="" /><m:grow /></m:dPr><m:e><m:sSub><m:e><m:r><m:t>y</m:t></m:r></m:e><m:sub><m:r><m:t>i</m:t></m:r></m:sub></m:sSub><m:r><m:rPr><m:sty m:val="p" /></m:rPr><m:t>−</m:t></m:r><m:sSub><m:e><m:acc><m:accPr><m:chr m:val="̂" /></m:accPr><m:e><m:r><m:t>y</m:t></m:r></m:e></m:acc></m:e><m:sub><m:r><m:t>i</m:t></m:r></m:sub></m:sSub></m:e></m:d></m:e><m:sup><m:r><m:t>2</m:t></m:r></m:sup></m:sSup></m:e></m:nary></m:num><m:den><m:r><m:t>n</m:t></m:r><m:r><m:rPr><m:sty m:val="p" /></m:rPr><m:t>−</m:t></m:r><m:r><m:t>p</m:t></m:r><m:r><m:rPr><m:sty m:val="p" /></m:rPr><m:t>−</m:t></m:r><m:r><m:t>1</m:t></m:r></m:den></m:f></m:oMath></a14:m></a:p></a:txBody></a:tc></a:tr><a:tr h="0"><a:tc><a:txBody><a:bodyPr /><a:lstStyle /><a:p><a:pPr lvl="0" indent="0" marL="0" algn="l"><a:buNone /></a:pPr><a:r><a:rPr /><a:t>Total</a:t></a:r></a:p></a:txBody></a:tc><a:tc><a:txBody><a:bodyPr /><a:lstStyle /><a:p><a:pPr lvl="0" indent="0" marL="0" algn="l"><a:buNone /></a:pPr><a14:m><m:oMath xmlns:m="http://schemas.openxmlformats.org/officeDocument/2006/math"><m:nary><m:naryPr><m:chr m:val="∑" /><m:limLoc m:val="undOvr" /><m:subHide m:val="off" /><m:supHide m:val="off" /></m:naryPr><m:sub><m:r><m:t>i</m:t></m:r><m:r><m:rPr><m:sty m:val="p" /></m:rPr><m:t>=</m:t></m:r><m:r><m:t>1</m:t></m:r></m:sub><m:sup><m:r><m:t>n</m:t></m:r></m:sup><m:e><m:sSup><m:e><m:d><m:dPr><m:begChr m:val="(" /><m:endChr m:val=")" /><m:sepChr m:val="" /><m:grow /></m:dPr><m:e><m:sSub><m:e><m:r><m:t>y</m:t></m:r></m:e><m:sub><m:r><m:t>i</m:t></m:r></m:sub></m:sSub><m:r><m:rPr><m:sty m:val="p" /></m:rPr><m:t>−</m:t></m:r><m:acc><m:accPr><m:chr m:val="‾" /></m:accPr><m:e><m:r><m:t>y</m:t></m:r></m:e></m:acc></m:e></m:d></m:e><m:sup><m:r><m:t>2</m:t></m:r></m:sup></m:sSup></m:e></m:nary></m:oMath></a14:m></a:p></a:txBody></a:tc><a:tc><a:txBody><a:bodyPr /><a:lstStyle /><a:p><a:pPr lvl="0" indent="0" marL="0" algn="l"><a:buNone /></a:pPr><a14:m><m:oMath xmlns:m="http://schemas.openxmlformats.org/officeDocument/2006/math"><m:r><m:t>n</m:t></m:r><m:r><m:rPr><m:sty m:val="p" /></m:rPr><m:t>−</m:t></m:r><m:r><m:t>1</m:t></m:r></m:oMath></a14:m></a:p></a:txBody></a:tc><a:tc><a:txBody><a:bodyPr /><a:lstStyle /><a:p><a:endParaRPr /></a:p></a:txBody></a:tc></a:tr></a:tbl></a:graphicData></a:graphic></p:graphicFrame></p:spTree></p:cSld></p:sld>
+<file path=ppt/slides/slide14.xml><?xml version="1.0" encoding="UTF-8"?><p:sld xmlns:a="http://schemas.openxmlformats.org/drawingml/2006/main" xmlns:r="http://schemas.openxmlformats.org/officeDocument/2006/relationships" xmlns:p="http://schemas.openxmlformats.org/presentationml/2006/main"><p:cSld><p:spTree><p:nvGrpSpPr><p:cNvPr id="1" name="" /><p:cNvGrpSpPr /><p:nvPr /></p:nvGrpSpPr><p:grpSpPr><a:xfrm><a:off x="0" y="0" /><a:ext cx="0" cy="0" /><a:chOff x="0" y="0" /><a:chExt cx="0" cy="0" /></a:xfrm></p:grpSpPr><p:sp><p:nvSpPr><p:cNvPr id="2" name="Title 1" /><p:cNvSpPr><a:spLocks noGrp="1" /></p:cNvSpPr><p:nvPr><p:ph type="title" /></p:nvPr></p:nvSpPr><p:spPr><a:xfrm><a:off x="0" y="0" /><a:ext cx="9144000" cy="871538" /></a:xfrm></p:spPr><p:txBody><a:bodyPr /><a:lstStyle /><a:p><a:pPr lvl="0" indent="0" marL="0"><a:buNone /></a:pPr><a:r><a:rPr b="1" /><a:t>Lecture 10:</a:t></a:r><a:r><a:rPr /><a:t> Analyses</a:t></a:r></a:p></p:txBody></p:sp><p:sp><p:nvSpPr><p:cNvPr id="4" name="Text Placeholder 3" /><p:cNvSpPr><a:spLocks noGrp="1" /></p:cNvSpPr><p:nvPr><p:ph idx="2" sz="half" type="body" /></p:nvPr></p:nvSpPr><p:spPr /><p:txBody><a:bodyPr /><a:lstStyle /><a:p><a:pPr lvl="0" indent="0" marL="0"><a:buNone /></a:pPr><a:r><a:rPr /><a:t>SS converted to non-additive MS (SS/df)</a:t></a:r></a:p><a:p><a:pPr lvl="0" /><a:r><a:rPr /><a:t>MSresidual: estimate population variance</a:t></a:r></a:p><a:p><a:pPr lvl="0" /><a:r><a:rPr /><a:t>MSregression: estimate population variance + variation due to strength of X-Y relationships</a:t></a:r></a:p><a:p><a:pPr lvl="0" /><a:r><a:rPr /><a:t>MS do not depend on sample size</a:t></a:r></a:p></p:txBody></p:sp><p:graphicFrame><p:nvGraphicFramePr><p:cNvPr id="6" name="Content Placeholder 5" /><p:cNvGraphicFramePr><a:graphicFrameLocks noGrp="1" /></p:cNvGraphicFramePr><p:nvPr><p:ph idx="1" /></p:nvPr></p:nvGraphicFramePr><p:xfrm><a:off x="3657600" y="952500" /><a:ext cx="5232400" cy="3797300" /></p:xfrm><a:graphic><a:graphicData uri="http://schemas.openxmlformats.org/drawingml/2006/table"><a:tbl><a:tblPr firstRow="1" bandRow="1"><a:tableStyleId>{5C22544A-7EE6-4342-B048-85BDC9FD1C3A}</a:tableStyleId></a:tblPr><a:tblGrid><a:gridCol w="1308100" /><a:gridCol w="1308100" /><a:gridCol w="1308100" /><a:gridCol w="1308100" /></a:tblGrid><a:tr h="0"><a:tc><a:txBody><a:bodyPr /><a:lstStyle /><a:p><a:pPr lvl="0" indent="0" marL="0" algn="l"><a:buNone /></a:pPr><a:r><a:rPr /><a:t>Source of variation</a:t></a:r></a:p></a:txBody><a:tcPr /></a:tc><a:tc><a:txBody><a:bodyPr /><a:lstStyle /><a:p><a:pPr lvl="0" indent="0" marL="0" algn="l"><a:buNone /></a:pPr><a:r><a:rPr /><a:t>SS</a:t></a:r></a:p></a:txBody><a:tcPr /></a:tc><a:tc><a:txBody><a:bodyPr /><a:lstStyle /><a:p><a:pPr lvl="0" indent="0" marL="0" algn="l"><a:buNone /></a:pPr><a:r><a:rPr /><a:t>df</a:t></a:r></a:p></a:txBody><a:tcPr /></a:tc><a:tc><a:txBody><a:bodyPr /><a:lstStyle /><a:p><a:pPr lvl="0" indent="0" marL="0" algn="l"><a:buNone /></a:pPr><a:r><a:rPr /><a:t>MS</a:t></a:r></a:p></a:txBody><a:tcPr /></a:tc></a:tr><a:tr h="0"><a:tc><a:txBody><a:bodyPr /><a:lstStyle /><a:p><a:pPr lvl="0" indent="0" marL="0" algn="l"><a:buNone /></a:pPr><a:r><a:rPr /><a:t>Regression</a:t></a:r></a:p></a:txBody></a:tc><a:tc><a:txBody><a:bodyPr /><a:lstStyle /><a:p><a:pPr lvl="0" indent="0" marL="0" algn="l"><a:buNone /></a:pPr><a14:m><m:oMath xmlns:m="http://schemas.openxmlformats.org/officeDocument/2006/math"><m:nary><m:naryPr><m:chr m:val="∑" /><m:limLoc m:val="undOvr" /><m:subHide m:val="off" /><m:supHide m:val="off" /></m:naryPr><m:sub><m:r><m:t>i</m:t></m:r><m:r><m:rPr><m:sty m:val="p" /></m:rPr><m:t>=</m:t></m:r><m:r><m:t>1</m:t></m:r></m:sub><m:sup><m:r><m:t>n</m:t></m:r></m:sup><m:e><m:sSup><m:e><m:d><m:dPr><m:begChr m:val="(" /><m:sepChr m:val="" /><m:endChr m:val=")" /><m:grow /></m:dPr><m:e><m:sSub><m:e><m:r><m:t>y</m:t></m:r></m:e><m:sub><m:r><m:t>i</m:t></m:r></m:sub></m:sSub><m:r><m:rPr><m:sty m:val="p" /></m:rPr><m:t>−</m:t></m:r><m:acc><m:accPr><m:chr m:val="‾" /></m:accPr><m:e><m:r><m:t>y</m:t></m:r></m:e></m:acc></m:e></m:d></m:e><m:sup><m:r><m:t>2</m:t></m:r></m:sup></m:sSup></m:e></m:nary></m:oMath></a14:m></a:p></a:txBody></a:tc><a:tc><a:txBody><a:bodyPr /><a:lstStyle /><a:p><a:pPr lvl="0" indent="0" marL="0" algn="l"><a:buNone /></a:pPr><a14:m><m:oMath xmlns:m="http://schemas.openxmlformats.org/officeDocument/2006/math"><m:r><m:t>p</m:t></m:r></m:oMath></a14:m></a:p></a:txBody></a:tc><a:tc><a:txBody><a:bodyPr /><a:lstStyle /><a:p><a:pPr lvl="0" indent="0" marL="0" algn="l"><a:buNone /></a:pPr><a14:m><m:oMath xmlns:m="http://schemas.openxmlformats.org/officeDocument/2006/math"><m:f><m:fPr><m:type m:val="bar" /></m:fPr><m:num><m:nary><m:naryPr><m:chr m:val="∑" /><m:limLoc m:val="undOvr" /><m:subHide m:val="off" /><m:supHide m:val="off" /></m:naryPr><m:sub><m:r><m:t>i</m:t></m:r><m:r><m:rPr><m:sty m:val="p" /></m:rPr><m:t>=</m:t></m:r><m:r><m:t>1</m:t></m:r></m:sub><m:sup><m:r><m:t>n</m:t></m:r></m:sup><m:e><m:sSup><m:e><m:d><m:dPr><m:begChr m:val="(" /><m:sepChr m:val="" /><m:endChr m:val=")" /><m:grow /></m:dPr><m:e><m:sSub><m:e><m:r><m:t>y</m:t></m:r></m:e><m:sub><m:r><m:t>i</m:t></m:r></m:sub></m:sSub><m:r><m:rPr><m:sty m:val="p" /></m:rPr><m:t>−</m:t></m:r><m:acc><m:accPr><m:chr m:val="‾" /></m:accPr><m:e><m:r><m:t>y</m:t></m:r></m:e></m:acc></m:e></m:d></m:e><m:sup><m:r><m:t>2</m:t></m:r></m:sup></m:sSup></m:e></m:nary></m:num><m:den><m:r><m:t>p</m:t></m:r></m:den></m:f></m:oMath></a14:m></a:p></a:txBody></a:tc></a:tr><a:tr h="0"><a:tc><a:txBody><a:bodyPr /><a:lstStyle /><a:p><a:pPr lvl="0" indent="0" marL="0" algn="l"><a:buNone /></a:pPr><a:r><a:rPr /><a:t>Residual</a:t></a:r></a:p></a:txBody></a:tc><a:tc><a:txBody><a:bodyPr /><a:lstStyle /><a:p><a:pPr lvl="0" indent="0" marL="0" algn="l"><a:buNone /></a:pPr><a14:m><m:oMath xmlns:m="http://schemas.openxmlformats.org/officeDocument/2006/math"><m:nary><m:naryPr><m:chr m:val="∑" /><m:limLoc m:val="undOvr" /><m:subHide m:val="off" /><m:supHide m:val="off" /></m:naryPr><m:sub><m:r><m:t>i</m:t></m:r><m:r><m:rPr><m:sty m:val="p" /></m:rPr><m:t>=</m:t></m:r><m:r><m:t>1</m:t></m:r></m:sub><m:sup><m:r><m:t>n</m:t></m:r></m:sup><m:e><m:sSup><m:e><m:d><m:dPr><m:begChr m:val="(" /><m:sepChr m:val="" /><m:endChr m:val=")" /><m:grow /></m:dPr><m:e><m:sSub><m:e><m:r><m:t>y</m:t></m:r></m:e><m:sub><m:r><m:t>i</m:t></m:r></m:sub></m:sSub><m:r><m:rPr><m:sty m:val="p" /></m:rPr><m:t>−</m:t></m:r><m:sSub><m:e><m:acc><m:accPr><m:chr m:val="̂" /></m:accPr><m:e><m:r><m:t>y</m:t></m:r></m:e></m:acc></m:e><m:sub><m:r><m:t>i</m:t></m:r></m:sub></m:sSub></m:e></m:d></m:e><m:sup><m:r><m:t>2</m:t></m:r></m:sup></m:sSup></m:e></m:nary></m:oMath></a14:m></a:p></a:txBody></a:tc><a:tc><a:txBody><a:bodyPr /><a:lstStyle /><a:p><a:pPr lvl="0" indent="0" marL="0" algn="l"><a:buNone /></a:pPr><a14:m><m:oMath xmlns:m="http://schemas.openxmlformats.org/officeDocument/2006/math"><m:r><m:t>n</m:t></m:r><m:r><m:rPr><m:sty m:val="p" /></m:rPr><m:t>−</m:t></m:r><m:r><m:t>p</m:t></m:r><m:r><m:rPr><m:sty m:val="p" /></m:rPr><m:t>−</m:t></m:r><m:r><m:t>1</m:t></m:r></m:oMath></a14:m></a:p></a:txBody></a:tc><a:tc><a:txBody><a:bodyPr /><a:lstStyle /><a:p><a:pPr lvl="0" indent="0" marL="0" algn="l"><a:buNone /></a:pPr><a14:m><m:oMath xmlns:m="http://schemas.openxmlformats.org/officeDocument/2006/math"><m:f><m:fPr><m:type m:val="bar" /></m:fPr><m:num><m:nary><m:naryPr><m:chr m:val="∑" /><m:limLoc m:val="undOvr" /><m:subHide m:val="off" /><m:supHide m:val="off" /></m:naryPr><m:sub><m:r><m:t>i</m:t></m:r><m:r><m:rPr><m:sty m:val="p" /></m:rPr><m:t>=</m:t></m:r><m:r><m:t>1</m:t></m:r></m:sub><m:sup><m:r><m:t>n</m:t></m:r></m:sup><m:e><m:sSup><m:e><m:d><m:dPr><m:begChr m:val="(" /><m:sepChr m:val="" /><m:endChr m:val=")" /><m:grow /></m:dPr><m:e><m:sSub><m:e><m:r><m:t>y</m:t></m:r></m:e><m:sub><m:r><m:t>i</m:t></m:r></m:sub></m:sSub><m:r><m:rPr><m:sty m:val="p" /></m:rPr><m:t>−</m:t></m:r><m:sSub><m:e><m:acc><m:accPr><m:chr m:val="̂" /></m:accPr><m:e><m:r><m:t>y</m:t></m:r></m:e></m:acc></m:e><m:sub><m:r><m:t>i</m:t></m:r></m:sub></m:sSub></m:e></m:d></m:e><m:sup><m:r><m:t>2</m:t></m:r></m:sup></m:sSup></m:e></m:nary></m:num><m:den><m:r><m:t>n</m:t></m:r><m:r><m:rPr><m:sty m:val="p" /></m:rPr><m:t>−</m:t></m:r><m:r><m:t>p</m:t></m:r><m:r><m:rPr><m:sty m:val="p" /></m:rPr><m:t>−</m:t></m:r><m:r><m:t>1</m:t></m:r></m:den></m:f></m:oMath></a14:m></a:p></a:txBody></a:tc></a:tr><a:tr h="0"><a:tc><a:txBody><a:bodyPr /><a:lstStyle /><a:p><a:pPr lvl="0" indent="0" marL="0" algn="l"><a:buNone /></a:pPr><a:r><a:rPr /><a:t>Total</a:t></a:r></a:p></a:txBody></a:tc><a:tc><a:txBody><a:bodyPr /><a:lstStyle /><a:p><a:pPr lvl="0" indent="0" marL="0" algn="l"><a:buNone /></a:pPr><a14:m><m:oMath xmlns:m="http://schemas.openxmlformats.org/officeDocument/2006/math"><m:nary><m:naryPr><m:chr m:val="∑" /><m:limLoc m:val="undOvr" /><m:subHide m:val="off" /><m:supHide m:val="off" /></m:naryPr><m:sub><m:r><m:t>i</m:t></m:r><m:r><m:rPr><m:sty m:val="p" /></m:rPr><m:t>=</m:t></m:r><m:r><m:t>1</m:t></m:r></m:sub><m:sup><m:r><m:t>n</m:t></m:r></m:sup><m:e><m:sSup><m:e><m:d><m:dPr><m:begChr m:val="(" /><m:sepChr m:val="" /><m:endChr m:val=")" /><m:grow /></m:dPr><m:e><m:sSub><m:e><m:r><m:t>y</m:t></m:r></m:e><m:sub><m:r><m:t>i</m:t></m:r></m:sub></m:sSub><m:r><m:rPr><m:sty m:val="p" /></m:rPr><m:t>−</m:t></m:r><m:acc><m:accPr><m:chr m:val="‾" /></m:accPr><m:e><m:r><m:t>y</m:t></m:r></m:e></m:acc></m:e></m:d></m:e><m:sup><m:r><m:t>2</m:t></m:r></m:sup></m:sSup></m:e></m:nary></m:oMath></a14:m></a:p></a:txBody></a:tc><a:tc><a:txBody><a:bodyPr /><a:lstStyle /><a:p><a:pPr lvl="0" indent="0" marL="0" algn="l"><a:buNone /></a:pPr><a14:m><m:oMath xmlns:m="http://schemas.openxmlformats.org/officeDocument/2006/math"><m:r><m:t>n</m:t></m:r><m:r><m:rPr><m:sty m:val="p" /></m:rPr><m:t>−</m:t></m:r><m:r><m:t>1</m:t></m:r></m:oMath></a14:m></a:p></a:txBody></a:tc><a:tc><a:txBody><a:bodyPr /><a:lstStyle /><a:p><a:endParaRPr /></a:p></a:txBody></a:tc></a:tr></a:tbl></a:graphicData></a:graphic></p:graphicFrame></p:spTree></p:cSld></p:sld>
 </file>
 
 <file path=ppt/slides/slide15.xml><?xml version="1.0" encoding="utf-8"?>
@@ -7515,8 +7515,8 @@
                           <m:d>
                             <m:dPr>
                               <m:begChr m:val="("/>
+                              <m:sepChr m:val=""/>
                               <m:endChr m:val=")"/>
-                              <m:sepChr m:val=""/>
                               <m:grow/>
                             </m:dPr>
                             <m:e>
@@ -7532,8 +7532,8 @@
                               <m:d>
                                 <m:dPr>
                                   <m:begChr m:val="("/>
+                                  <m:sepChr m:val=""/>
                                   <m:endChr m:val=")"/>
-                                  <m:sepChr m:val=""/>
                                   <m:grow/>
                                 </m:dPr>
                                 <m:e>
@@ -7583,8 +7583,8 @@
                           <m:d>
                             <m:dPr>
                               <m:begChr m:val="("/>
+                              <m:sepChr m:val=""/>
                               <m:endChr m:val=")"/>
-                              <m:sepChr m:val=""/>
                               <m:grow/>
                             </m:dPr>
                             <m:e>
@@ -7637,8 +7637,8 @@
                       <m:d>
                         <m:dPr>
                           <m:begChr m:val="["/>
+                          <m:sepChr m:val=""/>
                           <m:endChr m:val="]"/>
-                          <m:sepChr m:val=""/>
                           <m:grow/>
                         </m:dPr>
                         <m:e>
@@ -7651,8 +7651,8 @@
                           <m:d>
                             <m:dPr>
                               <m:begChr m:val="("/>
+                              <m:sepChr m:val=""/>
                               <m:endChr m:val=")"/>
-                              <m:sepChr m:val=""/>
                               <m:grow/>
                             </m:dPr>
                             <m:e>
@@ -7691,8 +7691,8 @@
                       <m:d>
                         <m:dPr>
                           <m:begChr m:val="("/>
+                          <m:sepChr m:val=""/>
                           <m:endChr m:val=")"/>
-                          <m:sepChr m:val=""/>
                           <m:grow/>
                         </m:dPr>
                         <m:e>
@@ -7728,8 +7728,8 @@
                       <m:d>
                         <m:dPr>
                           <m:begChr m:val="("/>
+                          <m:sepChr m:val=""/>
                           <m:endChr m:val=")"/>
-                          <m:sepChr m:val=""/>
                           <m:grow/>
                         </m:dPr>
                         <m:e>

--- a/docs/ecostats_lectures/lecture_10/10_01_lecture_powerpoint.pptx
+++ b/docs/ecostats_lectures/lecture_10/10_01_lecture_powerpoint.pptx
@@ -46,6 +46,8 @@
     <p:sldId id="294" r:id="rId40"/>
     <p:sldId id="295" r:id="rId41"/>
     <p:sldId id="296" r:id="rId42"/>
+    <p:sldId id="297" r:id="rId43"/>
+    <p:sldId id="298" r:id="rId44"/>
   </p:sldIdLst>
   <p:sldSz cx="9144000" cy="5143500" type="screen16x9"/>
   <p:notesSz cx="6858000" cy="9144000"/>
@@ -3405,6 +3407,275 @@
         <p:spPr>
           <a:xfrm>
             <a:off x="0" y="0"/>
+            <a:ext cx="9144000" cy="602780"/>
+          </a:xfrm>
+          <a:solidFill>
+            <a:srgbClr val="70121D"/>
+          </a:solidFill>
+        </p:spPr>
+        <p:txBody>
+          <a:bodyPr/>
+          <a:lstStyle/>
+          <a:p>
+            <a:pPr lvl="0" indent="0" marL="0">
+              <a:buNone/>
+            </a:pPr>
+            <a:r>
+              <a:rPr/>
+              <a:t>Lecture 10: Partial regression slopes</a:t>
+            </a:r>
+          </a:p>
+        </p:txBody>
+      </p:sp>
+      <p:sp>
+        <p:nvSpPr>
+          <p:cNvPr id="3" name="Content Placeholder 2"/>
+          <p:cNvSpPr>
+            <a:spLocks noGrp="1"/>
+          </p:cNvSpPr>
+          <p:nvPr>
+            <p:ph idx="1" sz="half"/>
+          </p:nvPr>
+        </p:nvSpPr>
+        <p:spPr/>
+        <p:txBody>
+          <a:bodyPr/>
+          <a:lstStyle/>
+          <a:p>
+            <a:pPr lvl="0" indent="0" marL="0">
+              <a:buNone/>
+            </a:pPr>
+            <a:r>
+              <a:rPr/>
+              <a:t>model: ant_spp ~ elevation + latitude</a:t>
+            </a:r>
+          </a:p>
+          <a:p>
+            <a:pPr lvl="0"/>
+            <a:r>
+              <a:rPr/>
+              <a:t>The partial slope for elevation tells you how ant species richness changes with elevation when latitude is held constant</a:t>
+            </a:r>
+          </a:p>
+          <a:p>
+            <a:pPr lvl="1"/>
+            <a:r>
+              <a:rPr/>
+              <a:t>1-m increase in elevation - ant spp decrease by 0.012 spp, holding latitude constant</a:t>
+            </a:r>
+          </a:p>
+          <a:p>
+            <a:pPr lvl="1"/>
+            <a:r>
+              <a:rPr/>
+              <a:t>Or 100-meter increase in elevation, lose 1.2 spp</a:t>
+            </a:r>
+          </a:p>
+          <a:p>
+            <a:pPr lvl="0"/>
+            <a:r>
+              <a:rPr/>
+              <a:t>The partial slope for latitude tells you how ant species richness changes with latitude when elevation is held constant</a:t>
+            </a:r>
+          </a:p>
+          <a:p>
+            <a:pPr lvl="1"/>
+            <a:r>
+              <a:rPr/>
+              <a:t>1-degree increase in latitude, ant spp decrease by 2 species, holding elevation constant</a:t>
+            </a:r>
+          </a:p>
+          <a:p>
+            <a:pPr lvl="1"/>
+            <a:r>
+              <a:rPr/>
+              <a:t>Moving north = fewer ant spp, even when comparing sites at same elevation</a:t>
+            </a:r>
+          </a:p>
+        </p:txBody>
+      </p:sp>
+      <p:sp>
+        <p:nvSpPr>
+          <p:cNvPr id="4" name="Content Placeholder 3"/>
+          <p:cNvSpPr>
+            <a:spLocks noGrp="1"/>
+          </p:cNvSpPr>
+          <p:nvPr>
+            <p:ph idx="2" sz="half"/>
+          </p:nvPr>
+        </p:nvSpPr>
+        <p:spPr/>
+        <p:txBody>
+          <a:bodyPr/>
+          <a:lstStyle/>
+          <a:p>
+            <a:pPr lvl="0" indent="0">
+              <a:buNone/>
+            </a:pPr>
+            <a:r>
+              <a:rPr>
+                <a:solidFill>
+                  <a:srgbClr val="003B4F"/>
+                </a:solidFill>
+                <a:latin typeface="Courier"/>
+              </a:rPr>
+              <a:t>model &lt;- </a:t>
+            </a:r>
+            <a:r>
+              <a:rPr>
+                <a:solidFill>
+                  <a:srgbClr val="4758AB"/>
+                </a:solidFill>
+                <a:latin typeface="Courier"/>
+              </a:rPr>
+              <a:t>lm</a:t>
+            </a:r>
+            <a:r>
+              <a:rPr>
+                <a:solidFill>
+                  <a:srgbClr val="003B4F"/>
+                </a:solidFill>
+                <a:latin typeface="Courier"/>
+              </a:rPr>
+              <a:t>(ant_spp </a:t>
+            </a:r>
+            <a:r>
+              <a:rPr>
+                <a:solidFill>
+                  <a:srgbClr val="5E5E5E"/>
+                </a:solidFill>
+                <a:latin typeface="Courier"/>
+              </a:rPr>
+              <a:t>~</a:t>
+            </a:r>
+            <a:r>
+              <a:rPr>
+                <a:solidFill>
+                  <a:srgbClr val="003B4F"/>
+                </a:solidFill>
+                <a:latin typeface="Courier"/>
+              </a:rPr>
+              <a:t> elevation </a:t>
+            </a:r>
+            <a:r>
+              <a:rPr>
+                <a:solidFill>
+                  <a:srgbClr val="5E5E5E"/>
+                </a:solidFill>
+                <a:latin typeface="Courier"/>
+              </a:rPr>
+              <a:t>+</a:t>
+            </a:r>
+            <a:r>
+              <a:rPr>
+                <a:solidFill>
+                  <a:srgbClr val="003B4F"/>
+                </a:solidFill>
+                <a:latin typeface="Courier"/>
+              </a:rPr>
+              <a:t> latitude, </a:t>
+            </a:r>
+            <a:r>
+              <a:rPr>
+                <a:solidFill>
+                  <a:srgbClr val="657422"/>
+                </a:solidFill>
+                <a:latin typeface="Courier"/>
+              </a:rPr>
+              <a:t>data =</a:t>
+            </a:r>
+            <a:r>
+              <a:rPr>
+                <a:solidFill>
+                  <a:srgbClr val="003B4F"/>
+                </a:solidFill>
+                <a:latin typeface="Courier"/>
+              </a:rPr>
+              <a:t> ant_df)</a:t>
+            </a:r>
+            <a:br/>
+            <a:r>
+              <a:rPr>
+                <a:solidFill>
+                  <a:srgbClr val="4758AB"/>
+                </a:solidFill>
+                <a:latin typeface="Courier"/>
+              </a:rPr>
+              <a:t>summary</a:t>
+            </a:r>
+            <a:r>
+              <a:rPr>
+                <a:solidFill>
+                  <a:srgbClr val="003B4F"/>
+                </a:solidFill>
+                <a:latin typeface="Courier"/>
+              </a:rPr>
+              <a:t>(model)</a:t>
+            </a:r>
+          </a:p>
+          <a:p>
+            <a:pPr lvl="0" indent="0">
+              <a:buNone/>
+            </a:pPr>
+            <a:r>
+              <a:rPr>
+                <a:latin typeface="Courier"/>
+              </a:rPr>
+              <a:t>
+Call:
+lm(formula = ant_spp ~ elevation + latitude, data = ant_df)
+Residuals:
+    Min      1Q  Median      3Q     Max 
+-6.1180 -2.3759  0.3218  1.9070  5.8369 
+Coefficients:
+            Estimate Std. Error t value Pr(&gt;|t|)   
+(Intercept) 98.49651   26.50701   3.716  0.00147 **
+elevation   -0.01226    0.00411  -2.983  0.00765 **
+latitude    -2.00981    0.61956  -3.244  0.00427 **
+---
+Signif. codes:  0 '***' 0.001 '**' 0.01 '*' 0.05 '.' 0.1 ' ' 1
+Residual standard error: 3.022 on 19 degrees of freedom
+Multiple R-squared:  0.5543,    Adjusted R-squared:  0.5074 
+F-statistic: 11.82 on 2 and 19 DF,  p-value: 0.000463</a:t>
+            </a:r>
+          </a:p>
+        </p:txBody>
+      </p:sp>
+    </p:spTree>
+  </p:cSld>
+</p:sld>
+</file>
+
+<file path=ppt/slides/slide11.xml><?xml version="1.0" encoding="utf-8"?>
+<p:sld xmlns:a="http://schemas.openxmlformats.org/drawingml/2006/main" xmlns:r="http://schemas.openxmlformats.org/officeDocument/2006/relationships" xmlns:p="http://schemas.openxmlformats.org/presentationml/2006/main">
+  <p:cSld>
+    <p:spTree>
+      <p:nvGrpSpPr>
+        <p:cNvPr id="1" name=""/>
+        <p:cNvGrpSpPr/>
+        <p:nvPr/>
+      </p:nvGrpSpPr>
+      <p:grpSpPr>
+        <a:xfrm>
+          <a:off x="0" y="0"/>
+          <a:ext cx="0" cy="0"/>
+          <a:chOff x="0" y="0"/>
+          <a:chExt cx="0" cy="0"/>
+        </a:xfrm>
+      </p:grpSpPr>
+      <p:sp>
+        <p:nvSpPr>
+          <p:cNvPr id="2" name="Title 1"/>
+          <p:cNvSpPr>
+            <a:spLocks noGrp="1"/>
+          </p:cNvSpPr>
+          <p:nvPr>
+            <p:ph type="title"/>
+          </p:nvPr>
+        </p:nvSpPr>
+        <p:spPr>
+          <a:xfrm>
+            <a:off x="0" y="0"/>
             <a:ext cx="9144000" cy="582780"/>
           </a:xfrm>
         </p:spPr>
@@ -3640,14 +3911,66 @@
                 <a:pPr lvl="0"/>
                 <a:r>
                   <a:rPr/>
-                  <a:t>εi: unexplained error - difference bw yi and value predicted by model (ŷi)</a:t>
+                  <a:t>ε</a:t>
+                </a:r>
+                <a:r>
+                  <a:rPr baseline="-25000"/>
+                  <a:t>i</a:t>
+                </a:r>
+                <a:r>
+                  <a:rPr/>
+                  <a:t>: unexplained error - difference between y</a:t>
+                </a:r>
+                <a:r>
+                  <a:rPr baseline="-25000"/>
+                  <a:t>i</a:t>
+                </a:r>
+                <a:r>
+                  <a:rPr/>
+                  <a:t> and value predicted by model (ŷ</a:t>
+                </a:r>
+                <a:r>
+                  <a:rPr baseline="-25000"/>
+                  <a:t>i</a:t>
+                </a:r>
+                <a:r>
+                  <a:rPr/>
+                  <a:t>)</a:t>
                 </a:r>
               </a:p>
               <a:p>
                 <a:pPr lvl="0"/>
                 <a:r>
                   <a:rPr/>
-                  <a:t>NPP = β0 + β1(lat) + β2 (long) + β3 (soil fertility) + εi</a:t>
+                  <a:t>ant_spp = β</a:t>
+                </a:r>
+                <a:r>
+                  <a:rPr baseline="-25000"/>
+                  <a:t>0</a:t>
+                </a:r>
+                <a:r>
+                  <a:rPr/>
+                  <a:t> + β</a:t>
+                </a:r>
+                <a:r>
+                  <a:rPr baseline="-25000"/>
+                  <a:t>1</a:t>
+                </a:r>
+                <a:r>
+                  <a:rPr/>
+                  <a:t>(lat) + β</a:t>
+                </a:r>
+                <a:r>
+                  <a:rPr baseline="-25000"/>
+                  <a:t>2</a:t>
+                </a:r>
+                <a:r>
+                  <a:rPr/>
+                  <a:t>(elevation) + ε</a:t>
+                </a:r>
+                <a:r>
+                  <a:rPr baseline="-25000"/>
+                  <a:t>i</a:t>
                 </a:r>
               </a:p>
             </p:txBody>
@@ -3659,7 +3982,7 @@
 </p:sld>
 </file>
 
-<file path=ppt/slides/slide11.xml><?xml version="1.0" encoding="utf-8"?>
+<file path=ppt/slides/slide12.xml><?xml version="1.0" encoding="utf-8"?>
 <p:sld xmlns:a="http://schemas.openxmlformats.org/drawingml/2006/main" xmlns:r="http://schemas.openxmlformats.org/officeDocument/2006/relationships" xmlns:p="http://schemas.openxmlformats.org/presentationml/2006/main">
   <p:cSld>
     <p:spTree>
@@ -3931,14 +4254,78 @@
                 <a:pPr lvl="0"/>
                 <a:r>
                   <a:rPr/>
-                  <a:t>OLS minimize ∑(yi-ŷi)2, the SS (vertical distance) between observed yi and predicted ŷi for each xij</a:t>
+                  <a:t>OLS minimize ∑(y</a:t>
+                </a:r>
+                <a:r>
+                  <a:rPr baseline="-25000"/>
+                  <a:t>i</a:t>
+                </a:r>
+                <a:r>
+                  <a:rPr/>
+                  <a:t>-ŷ</a:t>
+                </a:r>
+                <a:r>
+                  <a:rPr baseline="-25000"/>
+                  <a:t>i</a:t>
+                </a:r>
+                <a:r>
+                  <a:rPr/>
+                  <a:t>)</a:t>
+                </a:r>
+                <a:r>
+                  <a:rPr baseline="30000"/>
+                  <a:t>2</a:t>
+                </a:r>
+                <a:r>
+                  <a:rPr/>
+                  <a:t>, the SS (vertical distance) between observed y</a:t>
+                </a:r>
+                <a:r>
+                  <a:rPr baseline="-25000"/>
+                  <a:t>i</a:t>
+                </a:r>
+                <a:r>
+                  <a:rPr/>
+                  <a:t> and predicted ŷ</a:t>
+                </a:r>
+                <a:r>
+                  <a:rPr baseline="-25000"/>
+                  <a:t>i</a:t>
+                </a:r>
+                <a:r>
+                  <a:rPr/>
+                  <a:t> for each x</a:t>
+                </a:r>
+                <a:r>
+                  <a:rPr baseline="-25000"/>
+                  <a:t>ij</a:t>
                 </a:r>
               </a:p>
               <a:p>
                 <a:pPr lvl="0"/>
                 <a:r>
                   <a:rPr/>
-                  <a:t>ε estimated as residuals: εi = yi-ŷi</a:t>
+                  <a:t>ε estimated as residuals: ε</a:t>
+                </a:r>
+                <a:r>
+                  <a:rPr baseline="-25000"/>
+                  <a:t>i</a:t>
+                </a:r>
+                <a:r>
+                  <a:rPr/>
+                  <a:t> = y</a:t>
+                </a:r>
+                <a:r>
+                  <a:rPr baseline="-25000"/>
+                  <a:t>i</a:t>
+                </a:r>
+                <a:r>
+                  <a:rPr/>
+                  <a:t>-ŷ</a:t>
+                </a:r>
+                <a:r>
+                  <a:rPr baseline="-25000"/>
+                  <a:t>i</a:t>
                 </a:r>
               </a:p>
               <a:p>
@@ -3957,7 +4344,7 @@
 </p:sld>
 </file>
 
-<file path=ppt/slides/slide12.xml><?xml version="1.0" encoding="utf-8"?>
+<file path=ppt/slides/slide13.xml><?xml version="1.0" encoding="utf-8"?>
 <p:sld xmlns:a="http://schemas.openxmlformats.org/drawingml/2006/main" xmlns:r="http://schemas.openxmlformats.org/officeDocument/2006/relationships" xmlns:p="http://schemas.openxmlformats.org/presentationml/2006/main">
   <p:cSld>
     <p:spTree>
@@ -4073,119 +4460,10 @@
 </p:sld>
 </file>
 
-<file path=ppt/slides/slide13.xml><?xml version="1.0" encoding="UTF-8"?><p:sld xmlns:a="http://schemas.openxmlformats.org/drawingml/2006/main" xmlns:r="http://schemas.openxmlformats.org/officeDocument/2006/relationships" xmlns:p="http://schemas.openxmlformats.org/presentationml/2006/main"><p:cSld><p:spTree><p:nvGrpSpPr><p:cNvPr id="1" name="" /><p:cNvGrpSpPr /><p:nvPr /></p:nvGrpSpPr><p:grpSpPr><a:xfrm><a:off x="0" y="0" /><a:ext cx="0" cy="0" /><a:chOff x="0" y="0" /><a:chExt cx="0" cy="0" /></a:xfrm></p:grpSpPr><p:sp><p:nvSpPr><p:cNvPr id="2" name="Title 1" /><p:cNvSpPr><a:spLocks noGrp="1" /></p:cNvSpPr><p:nvPr><p:ph type="title" /></p:nvPr></p:nvSpPr><p:spPr><a:xfrm><a:off x="0" y="0" /><a:ext cx="9144000" cy="871538" /></a:xfrm></p:spPr><p:txBody><a:bodyPr /><a:lstStyle /><a:p><a:pPr lvl="0" indent="0" marL="0"><a:buNone /></a:pPr><a:r><a:rPr b="1" /><a:t>Lecture 10:</a:t></a:r><a:r><a:rPr /><a:t> Analyses of variance</a:t></a:r></a:p></p:txBody></p:sp><p:sp><p:nvSpPr><p:cNvPr id="4" name="Text Placeholder 3" /><p:cNvSpPr><a:spLocks noGrp="1" /></p:cNvSpPr><p:nvPr><p:ph idx="2" sz="half" type="body" /></p:nvPr></p:nvSpPr><p:spPr /><p:txBody><a:bodyPr /><a:lstStyle /><a:p><a:pPr lvl="0" indent="0" marL="0"><a:buNone /></a:pPr><a:r><a:rPr /><a:t>Variance - SStotal partitioned into SSregression and SSresidual</a:t></a:r></a:p><a:p><a:pPr lvl="0" /><a:r><a:rPr /><a:t>SSregression is variance in Y explained by model</a:t></a:r></a:p><a:p><a:pPr lvl="0" /><a:r><a:rPr /><a:t>SSresidual is variance not explained by model</a:t></a:r></a:p></p:txBody></p:sp><p:graphicFrame><p:nvGraphicFramePr><p:cNvPr id="6" name="Content Placeholder 5" /><p:cNvGraphicFramePr><a:graphicFrameLocks noGrp="1" /></p:cNvGraphicFramePr><p:nvPr><p:ph idx="1" /></p:nvPr></p:nvGraphicFramePr><p:xfrm><a:off x="3657600" y="952500" /><a:ext cx="5232400" cy="3797300" /></p:xfrm><a:graphic><a:graphicData uri="http://schemas.openxmlformats.org/drawingml/2006/table"><a:tbl><a:tblPr firstRow="1" bandRow="1"><a:tableStyleId>{5C22544A-7EE6-4342-B048-85BDC9FD1C3A}</a:tableStyleId></a:tblPr><a:tblGrid><a:gridCol w="1041400" /><a:gridCol w="1041400" /><a:gridCol w="1041400" /><a:gridCol w="1041400" /><a:gridCol w="1041400" /></a:tblGrid><a:tr h="0"><a:tc><a:txBody><a:bodyPr /><a:lstStyle /><a:p><a:pPr lvl="0" indent="0" marL="0" algn="l"><a:buNone /></a:pPr><a:r><a:rPr /><a:t>Source of variation</a:t></a:r></a:p></a:txBody><a:tcPr /></a:tc><a:tc><a:txBody><a:bodyPr /><a:lstStyle /><a:p><a:pPr lvl="0" indent="0" marL="0" algn="l"><a:buNone /></a:pPr><a:r><a:rPr /><a:t>SS</a:t></a:r></a:p></a:txBody><a:tcPr /></a:tc><a:tc><a:txBody><a:bodyPr /><a:lstStyle /><a:p><a:pPr lvl="0" indent="0" marL="0" algn="l"><a:buNone /></a:pPr><a:r><a:rPr /><a:t>df</a:t></a:r></a:p></a:txBody><a:tcPr /></a:tc><a:tc><a:txBody><a:bodyPr /><a:lstStyle /><a:p><a:pPr lvl="0" indent="0" marL="0" algn="l"><a:buNone /></a:pPr><a:r><a:rPr /><a:t>MS</a:t></a:r></a:p></a:txBody><a:tcPr /></a:tc><a:tc><a:txBody><a:bodyPr /><a:lstStyle /><a:p><a:pPr lvl="0" indent="0" marL="0" algn="l"><a:buNone /></a:pPr><a:r><a:rPr /><a:t>Interpretation</a:t></a:r></a:p></a:txBody><a:tcPr /></a:tc></a:tr><a:tr h="0"><a:tc><a:txBody><a:bodyPr /><a:lstStyle /><a:p><a:pPr lvl="0" indent="0" marL="0" algn="l"><a:buNone /></a:pPr><a:r><a:rPr /><a:t>Regression</a:t></a:r></a:p></a:txBody></a:tc><a:tc><a:txBody><a:bodyPr /><a:lstStyle /><a:p><a:pPr lvl="0" indent="0" marL="0" algn="l"><a:buNone /></a:pPr><a14:m><m:oMath xmlns:m="http://schemas.openxmlformats.org/officeDocument/2006/math"><m:nary><m:naryPr><m:chr m:val="∑" /><m:limLoc m:val="undOvr" /><m:subHide m:val="off" /><m:supHide m:val="off" /></m:naryPr><m:sub><m:r><m:t>i</m:t></m:r><m:r><m:rPr><m:sty m:val="p" /></m:rPr><m:t>=</m:t></m:r><m:r><m:t>1</m:t></m:r></m:sub><m:sup><m:r><m:t>n</m:t></m:r></m:sup><m:e><m:sSup><m:e><m:d><m:dPr><m:begChr m:val="(" /><m:sepChr m:val="" /><m:endChr m:val=")" /><m:grow /></m:dPr><m:e><m:sSub><m:e><m:r><m:t>y</m:t></m:r></m:e><m:sub><m:r><m:t>i</m:t></m:r></m:sub></m:sSub><m:r><m:rPr><m:sty m:val="p" /></m:rPr><m:t>−</m:t></m:r><m:acc><m:accPr><m:chr m:val="‾" /></m:accPr><m:e><m:r><m:t>y</m:t></m:r></m:e></m:acc></m:e></m:d></m:e><m:sup><m:r><m:t>2</m:t></m:r></m:sup></m:sSup></m:e></m:nary></m:oMath></a14:m></a:p></a:txBody></a:tc><a:tc><a:txBody><a:bodyPr /><a:lstStyle /><a:p><a:pPr lvl="0" indent="0" marL="0" algn="l"><a:buNone /></a:pPr><a14:m><m:oMath xmlns:m="http://schemas.openxmlformats.org/officeDocument/2006/math"><m:r><m:t>p</m:t></m:r></m:oMath></a14:m></a:p></a:txBody></a:tc><a:tc><a:txBody><a:bodyPr /><a:lstStyle /><a:p><a:pPr lvl="0" indent="0" marL="0" algn="l"><a:buNone /></a:pPr><a14:m><m:oMath xmlns:m="http://schemas.openxmlformats.org/officeDocument/2006/math"><m:f><m:fPr><m:type m:val="bar" /></m:fPr><m:num><m:nary><m:naryPr><m:chr m:val="∑" /><m:limLoc m:val="undOvr" /><m:subHide m:val="off" /><m:supHide m:val="off" /></m:naryPr><m:sub><m:r><m:t>i</m:t></m:r><m:r><m:rPr><m:sty m:val="p" /></m:rPr><m:t>=</m:t></m:r><m:r><m:t>1</m:t></m:r></m:sub><m:sup><m:r><m:t>n</m:t></m:r></m:sup><m:e><m:sSup><m:e><m:d><m:dPr><m:begChr m:val="(" /><m:sepChr m:val="" /><m:endChr m:val=")" /><m:grow /></m:dPr><m:e><m:sSub><m:e><m:r><m:t>y</m:t></m:r></m:e><m:sub><m:r><m:t>i</m:t></m:r></m:sub></m:sSub><m:r><m:rPr><m:sty m:val="p" /></m:rPr><m:t>−</m:t></m:r><m:acc><m:accPr><m:chr m:val="‾" /></m:accPr><m:e><m:r><m:t>y</m:t></m:r></m:e></m:acc></m:e></m:d></m:e><m:sup><m:r><m:t>2</m:t></m:r></m:sup></m:sSup></m:e></m:nary></m:num><m:den><m:r><m:t>p</m:t></m:r></m:den></m:f></m:oMath></a14:m></a:p></a:txBody></a:tc><a:tc><a:txBody><a:bodyPr /><a:lstStyle /><a:p><a:pPr lvl="0" indent="0" marL="0" algn="l"><a:buNone /></a:pPr><a:r><a:rPr /><a:t>Difference between predicted observation and mean</a:t></a:r></a:p></a:txBody></a:tc></a:tr><a:tr h="0"><a:tc><a:txBody><a:bodyPr /><a:lstStyle /><a:p><a:pPr lvl="0" indent="0" marL="0" algn="l"><a:buNone /></a:pPr><a:r><a:rPr /><a:t>Residual</a:t></a:r></a:p></a:txBody></a:tc><a:tc><a:txBody><a:bodyPr /><a:lstStyle /><a:p><a:pPr lvl="0" indent="0" marL="0" algn="l"><a:buNone /></a:pPr><a14:m><m:oMath xmlns:m="http://schemas.openxmlformats.org/officeDocument/2006/math"><m:nary><m:naryPr><m:chr m:val="∑" /><m:limLoc m:val="undOvr" /><m:subHide m:val="off" /><m:supHide m:val="off" /></m:naryPr><m:sub><m:r><m:t>i</m:t></m:r><m:r><m:rPr><m:sty m:val="p" /></m:rPr><m:t>=</m:t></m:r><m:r><m:t>1</m:t></m:r></m:sub><m:sup><m:r><m:t>n</m:t></m:r></m:sup><m:e><m:sSup><m:e><m:d><m:dPr><m:begChr m:val="(" /><m:sepChr m:val="" /><m:endChr m:val=")" /><m:grow /></m:dPr><m:e><m:sSub><m:e><m:r><m:t>y</m:t></m:r></m:e><m:sub><m:r><m:t>i</m:t></m:r></m:sub></m:sSub><m:r><m:rPr><m:sty m:val="p" /></m:rPr><m:t>−</m:t></m:r><m:sSub><m:e><m:acc><m:accPr><m:chr m:val="̂" /></m:accPr><m:e><m:r><m:t>y</m:t></m:r></m:e></m:acc></m:e><m:sub><m:r><m:t>i</m:t></m:r></m:sub></m:sSub></m:e></m:d></m:e><m:sup><m:r><m:t>2</m:t></m:r></m:sup></m:sSup></m:e></m:nary></m:oMath></a14:m></a:p></a:txBody></a:tc><a:tc><a:txBody><a:bodyPr /><a:lstStyle /><a:p><a:pPr lvl="0" indent="0" marL="0" algn="l"><a:buNone /></a:pPr><a14:m><m:oMath xmlns:m="http://schemas.openxmlformats.org/officeDocument/2006/math"><m:r><m:t>n</m:t></m:r><m:r><m:rPr><m:sty m:val="p" /></m:rPr><m:t>−</m:t></m:r><m:r><m:t>p</m:t></m:r><m:r><m:rPr><m:sty m:val="p" /></m:rPr><m:t>−</m:t></m:r><m:r><m:t>1</m:t></m:r></m:oMath></a14:m></a:p></a:txBody></a:tc><a:tc><a:txBody><a:bodyPr /><a:lstStyle /><a:p><a:pPr lvl="0" indent="0" marL="0" algn="l"><a:buNone /></a:pPr><a14:m><m:oMath xmlns:m="http://schemas.openxmlformats.org/officeDocument/2006/math"><m:f><m:fPr><m:type m:val="bar" /></m:fPr><m:num><m:nary><m:naryPr><m:chr m:val="∑" /><m:limLoc m:val="undOvr" /><m:subHide m:val="off" /><m:supHide m:val="off" /></m:naryPr><m:sub><m:r><m:t>i</m:t></m:r><m:r><m:rPr><m:sty m:val="p" /></m:rPr><m:t>=</m:t></m:r><m:r><m:t>1</m:t></m:r></m:sub><m:sup><m:r><m:t>n</m:t></m:r></m:sup><m:e><m:sSup><m:e><m:d><m:dPr><m:begChr m:val="(" /><m:sepChr m:val="" /><m:endChr m:val=")" /><m:grow /></m:dPr><m:e><m:sSub><m:e><m:r><m:t>y</m:t></m:r></m:e><m:sub><m:r><m:t>i</m:t></m:r></m:sub></m:sSub><m:r><m:rPr><m:sty m:val="p" /></m:rPr><m:t>−</m:t></m:r><m:sSub><m:e><m:acc><m:accPr><m:chr m:val="̂" /></m:accPr><m:e><m:r><m:t>y</m:t></m:r></m:e></m:acc></m:e><m:sub><m:r><m:t>i</m:t></m:r></m:sub></m:sSub></m:e></m:d></m:e><m:sup><m:r><m:t>2</m:t></m:r></m:sup></m:sSup></m:e></m:nary></m:num><m:den><m:r><m:t>n</m:t></m:r><m:r><m:rPr><m:sty m:val="p" /></m:rPr><m:t>−</m:t></m:r><m:r><m:t>p</m:t></m:r><m:r><m:rPr><m:sty m:val="p" /></m:rPr><m:t>−</m:t></m:r><m:r><m:t>1</m:t></m:r></m:den></m:f></m:oMath></a14:m></a:p></a:txBody></a:tc><a:tc><a:txBody><a:bodyPr /><a:lstStyle /><a:p><a:pPr lvl="0" indent="0" marL="0" algn="l"><a:buNone /></a:pPr><a:r><a:rPr /><a:t>Difference between each observation and predicted</a:t></a:r></a:p></a:txBody></a:tc></a:tr><a:tr h="0"><a:tc><a:txBody><a:bodyPr /><a:lstStyle /><a:p><a:pPr lvl="0" indent="0" marL="0" algn="l"><a:buNone /></a:pPr><a:r><a:rPr /><a:t>Total</a:t></a:r></a:p></a:txBody></a:tc><a:tc><a:txBody><a:bodyPr /><a:lstStyle /><a:p><a:pPr lvl="0" indent="0" marL="0" algn="l"><a:buNone /></a:pPr><a14:m><m:oMath xmlns:m="http://schemas.openxmlformats.org/officeDocument/2006/math"><m:nary><m:naryPr><m:chr m:val="∑" /><m:limLoc m:val="undOvr" /><m:subHide m:val="off" /><m:supHide m:val="off" /></m:naryPr><m:sub><m:r><m:t>i</m:t></m:r><m:r><m:rPr><m:sty m:val="p" /></m:rPr><m:t>=</m:t></m:r><m:r><m:t>1</m:t></m:r></m:sub><m:sup><m:r><m:t>n</m:t></m:r></m:sup><m:e><m:sSup><m:e><m:d><m:dPr><m:begChr m:val="(" /><m:sepChr m:val="" /><m:endChr m:val=")" /><m:grow /></m:dPr><m:e><m:sSub><m:e><m:r><m:t>y</m:t></m:r></m:e><m:sub><m:r><m:t>i</m:t></m:r></m:sub></m:sSub><m:r><m:rPr><m:sty m:val="p" /></m:rPr><m:t>−</m:t></m:r><m:acc><m:accPr><m:chr m:val="‾" /></m:accPr><m:e><m:r><m:t>y</m:t></m:r></m:e></m:acc></m:e></m:d></m:e><m:sup><m:r><m:t>2</m:t></m:r></m:sup></m:sSup></m:e></m:nary></m:oMath></a14:m></a:p></a:txBody></a:tc><a:tc><a:txBody><a:bodyPr /><a:lstStyle /><a:p><a:pPr lvl="0" indent="0" marL="0" algn="l"><a:buNone /></a:pPr><a14:m><m:oMath xmlns:m="http://schemas.openxmlformats.org/officeDocument/2006/math"><m:r><m:t>n</m:t></m:r><m:r><m:rPr><m:sty m:val="p" /></m:rPr><m:t>−</m:t></m:r><m:r><m:t>1</m:t></m:r></m:oMath></a14:m></a:p></a:txBody></a:tc><a:tc><a:txBody><a:bodyPr /><a:lstStyle /><a:p><a:endParaRPr /></a:p></a:txBody></a:tc><a:tc><a:txBody><a:bodyPr /><a:lstStyle /><a:p><a:pPr lvl="0" indent="0" marL="0" algn="l"><a:buNone /></a:pPr><a:r><a:rPr /><a:t>Difference between each observation and mean</a:t></a:r></a:p></a:txBody></a:tc></a:tr></a:tbl></a:graphicData></a:graphic></p:graphicFrame></p:spTree></p:cSld></p:sld>
+<file path=ppt/slides/slide14.xml><?xml version="1.0" encoding="UTF-8"?><p:sld xmlns:a="http://schemas.openxmlformats.org/drawingml/2006/main" xmlns:r="http://schemas.openxmlformats.org/officeDocument/2006/relationships" xmlns:p="http://schemas.openxmlformats.org/presentationml/2006/main"><p:cSld><p:spTree><p:nvGrpSpPr><p:cNvPr id="1" name="" /><p:cNvGrpSpPr /><p:nvPr /></p:nvGrpSpPr><p:grpSpPr><a:xfrm><a:off x="0" y="0" /><a:ext cx="0" cy="0" /><a:chOff x="0" y="0" /><a:chExt cx="0" cy="0" /></a:xfrm></p:grpSpPr><p:sp><p:nvSpPr><p:cNvPr id="2" name="Title 1" /><p:cNvSpPr><a:spLocks noGrp="1" /></p:cNvSpPr><p:nvPr><p:ph type="title" /></p:nvPr></p:nvSpPr><p:spPr><a:xfrm><a:off x="0" y="0" /><a:ext cx="9144000" cy="871538" /></a:xfrm></p:spPr><p:txBody><a:bodyPr /><a:lstStyle /><a:p><a:pPr lvl="0" indent="0" marL="0"><a:buNone /></a:pPr><a:r><a:rPr b="1" /><a:t>Lecture 10:</a:t></a:r><a:r><a:rPr /><a:t> Analyses of variance or sums of squares</a:t></a:r></a:p></p:txBody></p:sp><p:sp><p:nvSpPr><p:cNvPr id="4" name="Text Placeholder 3" /><p:cNvSpPr><a:spLocks noGrp="1" /></p:cNvSpPr><p:nvPr><p:ph idx="2" sz="half" type="body" /></p:nvPr></p:nvSpPr><p:spPr /><p:txBody><a:bodyPr /><a:lstStyle /><a:p><a:pPr lvl="0" indent="0" marL="0"><a:buNone /></a:pPr><a:r><a:rPr /><a:t>Variance - SS</a:t></a:r><a:r><a:rPr baseline="-25000" /><a:t>total</a:t></a:r><a:r><a:rPr /><a:t> partitioned into SS</a:t></a:r><a:r><a:rPr baseline="-25000" /><a:t>regression</a:t></a:r><a:r><a:rPr /><a:t> and SS</a:t></a:r><a:r><a:rPr baseline="-25000" /><a:t>residual</a:t></a:r></a:p><a:p><a:pPr lvl="0" /><a:r><a:rPr /><a:t>SS</a:t></a:r><a:r><a:rPr baseline="-25000" /><a:t>regression</a:t></a:r><a:r><a:rPr /><a:t> is variance in Y explained by model</a:t></a:r></a:p><a:p><a:pPr lvl="0" /><a:r><a:rPr /><a:t>SS</a:t></a:r><a:r><a:rPr baseline="-25000" /><a:t>residual</a:t></a:r><a:r><a:rPr /><a:t> is variance not explained by model</a:t></a:r></a:p></p:txBody></p:sp><p:graphicFrame><p:nvGraphicFramePr><p:cNvPr id="6" name="Content Placeholder 5" /><p:cNvGraphicFramePr><a:graphicFrameLocks noGrp="1" /></p:cNvGraphicFramePr><p:nvPr><p:ph idx="1" /></p:nvPr></p:nvGraphicFramePr><p:xfrm><a:off x="3657600" y="952500" /><a:ext cx="5232400" cy="3797300" /></p:xfrm><a:graphic><a:graphicData uri="http://schemas.openxmlformats.org/drawingml/2006/table"><a:tbl><a:tblPr firstRow="1" bandRow="1"><a:tableStyleId>{5C22544A-7EE6-4342-B048-85BDC9FD1C3A}</a:tableStyleId></a:tblPr><a:tblGrid><a:gridCol w="1041400" /><a:gridCol w="1041400" /><a:gridCol w="1041400" /><a:gridCol w="1041400" /><a:gridCol w="1041400" /></a:tblGrid><a:tr h="0"><a:tc><a:txBody><a:bodyPr /><a:lstStyle /><a:p><a:pPr lvl="0" indent="0" marL="0" algn="l"><a:buNone /></a:pPr><a:r><a:rPr /><a:t>Source of variation</a:t></a:r></a:p></a:txBody><a:tcPr /></a:tc><a:tc><a:txBody><a:bodyPr /><a:lstStyle /><a:p><a:pPr lvl="0" indent="0" marL="0" algn="l"><a:buNone /></a:pPr><a:r><a:rPr /><a:t>SS</a:t></a:r></a:p></a:txBody><a:tcPr /></a:tc><a:tc><a:txBody><a:bodyPr /><a:lstStyle /><a:p><a:pPr lvl="0" indent="0" marL="0" algn="l"><a:buNone /></a:pPr><a:r><a:rPr /><a:t>df</a:t></a:r></a:p></a:txBody><a:tcPr /></a:tc><a:tc><a:txBody><a:bodyPr /><a:lstStyle /><a:p><a:pPr lvl="0" indent="0" marL="0" algn="l"><a:buNone /></a:pPr><a:r><a:rPr /><a:t>MS</a:t></a:r></a:p></a:txBody><a:tcPr /></a:tc><a:tc><a:txBody><a:bodyPr /><a:lstStyle /><a:p><a:pPr lvl="0" indent="0" marL="0" algn="l"><a:buNone /></a:pPr><a:r><a:rPr /><a:t>Interpretation</a:t></a:r></a:p></a:txBody><a:tcPr /></a:tc></a:tr><a:tr h="0"><a:tc><a:txBody><a:bodyPr /><a:lstStyle /><a:p><a:pPr lvl="0" indent="0" marL="0" algn="l"><a:buNone /></a:pPr><a:r><a:rPr /><a:t>Regression</a:t></a:r></a:p></a:txBody></a:tc><a:tc><a:txBody><a:bodyPr /><a:lstStyle /><a:p><a:pPr lvl="0" indent="0" marL="0" algn="l"><a:buNone /></a:pPr><a14:m><m:oMath xmlns:m="http://schemas.openxmlformats.org/officeDocument/2006/math"><m:nary><m:naryPr><m:chr m:val="∑" /><m:limLoc m:val="undOvr" /><m:subHide m:val="off" /><m:supHide m:val="off" /></m:naryPr><m:sub><m:r><m:t>i</m:t></m:r><m:r><m:rPr><m:sty m:val="p" /></m:rPr><m:t>=</m:t></m:r><m:r><m:t>1</m:t></m:r></m:sub><m:sup><m:r><m:t>n</m:t></m:r></m:sup><m:e><m:sSup><m:e><m:d><m:dPr><m:begChr m:val="(" /><m:sepChr m:val="" /><m:endChr m:val=")" /><m:grow /></m:dPr><m:e><m:sSub><m:e><m:r><m:t>y</m:t></m:r></m:e><m:sub><m:r><m:t>i</m:t></m:r></m:sub></m:sSub><m:r><m:rPr><m:sty m:val="p" /></m:rPr><m:t>−</m:t></m:r><m:acc><m:accPr><m:chr m:val="‾" /></m:accPr><m:e><m:r><m:t>y</m:t></m:r></m:e></m:acc></m:e></m:d></m:e><m:sup><m:r><m:t>2</m:t></m:r></m:sup></m:sSup></m:e></m:nary></m:oMath></a14:m></a:p></a:txBody></a:tc><a:tc><a:txBody><a:bodyPr /><a:lstStyle /><a:p><a:pPr lvl="0" indent="0" marL="0" algn="l"><a:buNone /></a:pPr><a14:m><m:oMath xmlns:m="http://schemas.openxmlformats.org/officeDocument/2006/math"><m:r><m:t>p</m:t></m:r></m:oMath></a14:m></a:p></a:txBody></a:tc><a:tc><a:txBody><a:bodyPr /><a:lstStyle /><a:p><a:pPr lvl="0" indent="0" marL="0" algn="l"><a:buNone /></a:pPr><a14:m><m:oMath xmlns:m="http://schemas.openxmlformats.org/officeDocument/2006/math"><m:f><m:fPr><m:type m:val="bar" /></m:fPr><m:num><m:nary><m:naryPr><m:chr m:val="∑" /><m:limLoc m:val="undOvr" /><m:subHide m:val="off" /><m:supHide m:val="off" /></m:naryPr><m:sub><m:r><m:t>i</m:t></m:r><m:r><m:rPr><m:sty m:val="p" /></m:rPr><m:t>=</m:t></m:r><m:r><m:t>1</m:t></m:r></m:sub><m:sup><m:r><m:t>n</m:t></m:r></m:sup><m:e><m:sSup><m:e><m:d><m:dPr><m:begChr m:val="(" /><m:sepChr m:val="" /><m:endChr m:val=")" /><m:grow /></m:dPr><m:e><m:sSub><m:e><m:r><m:t>y</m:t></m:r></m:e><m:sub><m:r><m:t>i</m:t></m:r></m:sub></m:sSub><m:r><m:rPr><m:sty m:val="p" /></m:rPr><m:t>−</m:t></m:r><m:acc><m:accPr><m:chr m:val="‾" /></m:accPr><m:e><m:r><m:t>y</m:t></m:r></m:e></m:acc></m:e></m:d></m:e><m:sup><m:r><m:t>2</m:t></m:r></m:sup></m:sSup></m:e></m:nary></m:num><m:den><m:r><m:t>p</m:t></m:r></m:den></m:f></m:oMath></a14:m></a:p></a:txBody></a:tc><a:tc><a:txBody><a:bodyPr /><a:lstStyle /><a:p><a:pPr lvl="0" indent="0" marL="0" algn="l"><a:buNone /></a:pPr><a:r><a:rPr /><a:t>Difference between predicted observation and mean</a:t></a:r></a:p></a:txBody></a:tc></a:tr><a:tr h="0"><a:tc><a:txBody><a:bodyPr /><a:lstStyle /><a:p><a:pPr lvl="0" indent="0" marL="0" algn="l"><a:buNone /></a:pPr><a:r><a:rPr /><a:t>Residual</a:t></a:r></a:p></a:txBody></a:tc><a:tc><a:txBody><a:bodyPr /><a:lstStyle /><a:p><a:pPr lvl="0" indent="0" marL="0" algn="l"><a:buNone /></a:pPr><a14:m><m:oMath xmlns:m="http://schemas.openxmlformats.org/officeDocument/2006/math"><m:nary><m:naryPr><m:chr m:val="∑" /><m:limLoc m:val="undOvr" /><m:subHide m:val="off" /><m:supHide m:val="off" /></m:naryPr><m:sub><m:r><m:t>i</m:t></m:r><m:r><m:rPr><m:sty m:val="p" /></m:rPr><m:t>=</m:t></m:r><m:r><m:t>1</m:t></m:r></m:sub><m:sup><m:r><m:t>n</m:t></m:r></m:sup><m:e><m:sSup><m:e><m:d><m:dPr><m:begChr m:val="(" /><m:sepChr m:val="" /><m:endChr m:val=")" /><m:grow /></m:dPr><m:e><m:sSub><m:e><m:r><m:t>y</m:t></m:r></m:e><m:sub><m:r><m:t>i</m:t></m:r></m:sub></m:sSub><m:r><m:rPr><m:sty m:val="p" /></m:rPr><m:t>−</m:t></m:r><m:sSub><m:e><m:acc><m:accPr><m:chr m:val="̂" /></m:accPr><m:e><m:r><m:t>y</m:t></m:r></m:e></m:acc></m:e><m:sub><m:r><m:t>i</m:t></m:r></m:sub></m:sSub></m:e></m:d></m:e><m:sup><m:r><m:t>2</m:t></m:r></m:sup></m:sSup></m:e></m:nary></m:oMath></a14:m></a:p></a:txBody></a:tc><a:tc><a:txBody><a:bodyPr /><a:lstStyle /><a:p><a:pPr lvl="0" indent="0" marL="0" algn="l"><a:buNone /></a:pPr><a14:m><m:oMath xmlns:m="http://schemas.openxmlformats.org/officeDocument/2006/math"><m:r><m:t>n</m:t></m:r><m:r><m:rPr><m:sty m:val="p" /></m:rPr><m:t>−</m:t></m:r><m:r><m:t>p</m:t></m:r><m:r><m:rPr><m:sty m:val="p" /></m:rPr><m:t>−</m:t></m:r><m:r><m:t>1</m:t></m:r></m:oMath></a14:m></a:p></a:txBody></a:tc><a:tc><a:txBody><a:bodyPr /><a:lstStyle /><a:p><a:pPr lvl="0" indent="0" marL="0" algn="l"><a:buNone /></a:pPr><a14:m><m:oMath xmlns:m="http://schemas.openxmlformats.org/officeDocument/2006/math"><m:f><m:fPr><m:type m:val="bar" /></m:fPr><m:num><m:nary><m:naryPr><m:chr m:val="∑" /><m:limLoc m:val="undOvr" /><m:subHide m:val="off" /><m:supHide m:val="off" /></m:naryPr><m:sub><m:r><m:t>i</m:t></m:r><m:r><m:rPr><m:sty m:val="p" /></m:rPr><m:t>=</m:t></m:r><m:r><m:t>1</m:t></m:r></m:sub><m:sup><m:r><m:t>n</m:t></m:r></m:sup><m:e><m:sSup><m:e><m:d><m:dPr><m:begChr m:val="(" /><m:sepChr m:val="" /><m:endChr m:val=")" /><m:grow /></m:dPr><m:e><m:sSub><m:e><m:r><m:t>y</m:t></m:r></m:e><m:sub><m:r><m:t>i</m:t></m:r></m:sub></m:sSub><m:r><m:rPr><m:sty m:val="p" /></m:rPr><m:t>−</m:t></m:r><m:sSub><m:e><m:acc><m:accPr><m:chr m:val="̂" /></m:accPr><m:e><m:r><m:t>y</m:t></m:r></m:e></m:acc></m:e><m:sub><m:r><m:t>i</m:t></m:r></m:sub></m:sSub></m:e></m:d></m:e><m:sup><m:r><m:t>2</m:t></m:r></m:sup></m:sSup></m:e></m:nary></m:num><m:den><m:r><m:t>n</m:t></m:r><m:r><m:rPr><m:sty m:val="p" /></m:rPr><m:t>−</m:t></m:r><m:r><m:t>p</m:t></m:r><m:r><m:rPr><m:sty m:val="p" /></m:rPr><m:t>−</m:t></m:r><m:r><m:t>1</m:t></m:r></m:den></m:f></m:oMath></a14:m></a:p></a:txBody></a:tc><a:tc><a:txBody><a:bodyPr /><a:lstStyle /><a:p><a:pPr lvl="0" indent="0" marL="0" algn="l"><a:buNone /></a:pPr><a:r><a:rPr /><a:t>Difference between each observation and predicted</a:t></a:r></a:p></a:txBody></a:tc></a:tr><a:tr h="0"><a:tc><a:txBody><a:bodyPr /><a:lstStyle /><a:p><a:pPr lvl="0" indent="0" marL="0" algn="l"><a:buNone /></a:pPr><a:r><a:rPr /><a:t>Total</a:t></a:r></a:p></a:txBody></a:tc><a:tc><a:txBody><a:bodyPr /><a:lstStyle /><a:p><a:pPr lvl="0" indent="0" marL="0" algn="l"><a:buNone /></a:pPr><a14:m><m:oMath xmlns:m="http://schemas.openxmlformats.org/officeDocument/2006/math"><m:nary><m:naryPr><m:chr m:val="∑" /><m:limLoc m:val="undOvr" /><m:subHide m:val="off" /><m:supHide m:val="off" /></m:naryPr><m:sub><m:r><m:t>i</m:t></m:r><m:r><m:rPr><m:sty m:val="p" /></m:rPr><m:t>=</m:t></m:r><m:r><m:t>1</m:t></m:r></m:sub><m:sup><m:r><m:t>n</m:t></m:r></m:sup><m:e><m:sSup><m:e><m:d><m:dPr><m:begChr m:val="(" /><m:sepChr m:val="" /><m:endChr m:val=")" /><m:grow /></m:dPr><m:e><m:sSub><m:e><m:r><m:t>y</m:t></m:r></m:e><m:sub><m:r><m:t>i</m:t></m:r></m:sub></m:sSub><m:r><m:rPr><m:sty m:val="p" /></m:rPr><m:t>−</m:t></m:r><m:acc><m:accPr><m:chr m:val="‾" /></m:accPr><m:e><m:r><m:t>y</m:t></m:r></m:e></m:acc></m:e></m:d></m:e><m:sup><m:r><m:t>2</m:t></m:r></m:sup></m:sSup></m:e></m:nary></m:oMath></a14:m></a:p></a:txBody></a:tc><a:tc><a:txBody><a:bodyPr /><a:lstStyle /><a:p><a:pPr lvl="0" indent="0" marL="0" algn="l"><a:buNone /></a:pPr><a14:m><m:oMath xmlns:m="http://schemas.openxmlformats.org/officeDocument/2006/math"><m:r><m:t>n</m:t></m:r><m:r><m:rPr><m:sty m:val="p" /></m:rPr><m:t>−</m:t></m:r><m:r><m:t>1</m:t></m:r></m:oMath></a14:m></a:p></a:txBody></a:tc><a:tc><a:txBody><a:bodyPr /><a:lstStyle /><a:p><a:endParaRPr /></a:p></a:txBody></a:tc><a:tc><a:txBody><a:bodyPr /><a:lstStyle /><a:p><a:pPr lvl="0" indent="0" marL="0" algn="l"><a:buNone /></a:pPr><a:r><a:rPr /><a:t>Difference between each observation and mean</a:t></a:r></a:p></a:txBody></a:tc></a:tr></a:tbl></a:graphicData></a:graphic></p:graphicFrame></p:spTree></p:cSld></p:sld>
 </file>
 
-<file path=ppt/slides/slide14.xml><?xml version="1.0" encoding="UTF-8"?><p:sld xmlns:a="http://schemas.openxmlformats.org/drawingml/2006/main" xmlns:r="http://schemas.openxmlformats.org/officeDocument/2006/relationships" xmlns:p="http://schemas.openxmlformats.org/presentationml/2006/main"><p:cSld><p:spTree><p:nvGrpSpPr><p:cNvPr id="1" name="" /><p:cNvGrpSpPr /><p:nvPr /></p:nvGrpSpPr><p:grpSpPr><a:xfrm><a:off x="0" y="0" /><a:ext cx="0" cy="0" /><a:chOff x="0" y="0" /><a:chExt cx="0" cy="0" /></a:xfrm></p:grpSpPr><p:sp><p:nvSpPr><p:cNvPr id="2" name="Title 1" /><p:cNvSpPr><a:spLocks noGrp="1" /></p:cNvSpPr><p:nvPr><p:ph type="title" /></p:nvPr></p:nvSpPr><p:spPr><a:xfrm><a:off x="0" y="0" /><a:ext cx="9144000" cy="871538" /></a:xfrm></p:spPr><p:txBody><a:bodyPr /><a:lstStyle /><a:p><a:pPr lvl="0" indent="0" marL="0"><a:buNone /></a:pPr><a:r><a:rPr b="1" /><a:t>Lecture 10:</a:t></a:r><a:r><a:rPr /><a:t> Analyses</a:t></a:r></a:p></p:txBody></p:sp><p:sp><p:nvSpPr><p:cNvPr id="4" name="Text Placeholder 3" /><p:cNvSpPr><a:spLocks noGrp="1" /></p:cNvSpPr><p:nvPr><p:ph idx="2" sz="half" type="body" /></p:nvPr></p:nvSpPr><p:spPr /><p:txBody><a:bodyPr /><a:lstStyle /><a:p><a:pPr lvl="0" indent="0" marL="0"><a:buNone /></a:pPr><a:r><a:rPr /><a:t>SS converted to non-additive MS (SS/df)</a:t></a:r></a:p><a:p><a:pPr lvl="0" /><a:r><a:rPr /><a:t>MSresidual: estimate population variance</a:t></a:r></a:p><a:p><a:pPr lvl="0" /><a:r><a:rPr /><a:t>MSregression: estimate population variance + variation due to strength of X-Y relationships</a:t></a:r></a:p><a:p><a:pPr lvl="0" /><a:r><a:rPr /><a:t>MS do not depend on sample size</a:t></a:r></a:p></p:txBody></p:sp><p:graphicFrame><p:nvGraphicFramePr><p:cNvPr id="6" name="Content Placeholder 5" /><p:cNvGraphicFramePr><a:graphicFrameLocks noGrp="1" /></p:cNvGraphicFramePr><p:nvPr><p:ph idx="1" /></p:nvPr></p:nvGraphicFramePr><p:xfrm><a:off x="3657600" y="952500" /><a:ext cx="5232400" cy="3797300" /></p:xfrm><a:graphic><a:graphicData uri="http://schemas.openxmlformats.org/drawingml/2006/table"><a:tbl><a:tblPr firstRow="1" bandRow="1"><a:tableStyleId>{5C22544A-7EE6-4342-B048-85BDC9FD1C3A}</a:tableStyleId></a:tblPr><a:tblGrid><a:gridCol w="1308100" /><a:gridCol w="1308100" /><a:gridCol w="1308100" /><a:gridCol w="1308100" /></a:tblGrid><a:tr h="0"><a:tc><a:txBody><a:bodyPr /><a:lstStyle /><a:p><a:pPr lvl="0" indent="0" marL="0" algn="l"><a:buNone /></a:pPr><a:r><a:rPr /><a:t>Source of variation</a:t></a:r></a:p></a:txBody><a:tcPr /></a:tc><a:tc><a:txBody><a:bodyPr /><a:lstStyle /><a:p><a:pPr lvl="0" indent="0" marL="0" algn="l"><a:buNone /></a:pPr><a:r><a:rPr /><a:t>SS</a:t></a:r></a:p></a:txBody><a:tcPr /></a:tc><a:tc><a:txBody><a:bodyPr /><a:lstStyle /><a:p><a:pPr lvl="0" indent="0" marL="0" algn="l"><a:buNone /></a:pPr><a:r><a:rPr /><a:t>df</a:t></a:r></a:p></a:txBody><a:tcPr /></a:tc><a:tc><a:txBody><a:bodyPr /><a:lstStyle /><a:p><a:pPr lvl="0" indent="0" marL="0" algn="l"><a:buNone /></a:pPr><a:r><a:rPr /><a:t>MS</a:t></a:r></a:p></a:txBody><a:tcPr /></a:tc></a:tr><a:tr h="0"><a:tc><a:txBody><a:bodyPr /><a:lstStyle /><a:p><a:pPr lvl="0" indent="0" marL="0" algn="l"><a:buNone /></a:pPr><a:r><a:rPr /><a:t>Regression</a:t></a:r></a:p></a:txBody></a:tc><a:tc><a:txBody><a:bodyPr /><a:lstStyle /><a:p><a:pPr lvl="0" indent="0" marL="0" algn="l"><a:buNone /></a:pPr><a14:m><m:oMath xmlns:m="http://schemas.openxmlformats.org/officeDocument/2006/math"><m:nary><m:naryPr><m:chr m:val="∑" /><m:limLoc m:val="undOvr" /><m:subHide m:val="off" /><m:supHide m:val="off" /></m:naryPr><m:sub><m:r><m:t>i</m:t></m:r><m:r><m:rPr><m:sty m:val="p" /></m:rPr><m:t>=</m:t></m:r><m:r><m:t>1</m:t></m:r></m:sub><m:sup><m:r><m:t>n</m:t></m:r></m:sup><m:e><m:sSup><m:e><m:d><m:dPr><m:begChr m:val="(" /><m:sepChr m:val="" /><m:endChr m:val=")" /><m:grow /></m:dPr><m:e><m:sSub><m:e><m:r><m:t>y</m:t></m:r></m:e><m:sub><m:r><m:t>i</m:t></m:r></m:sub></m:sSub><m:r><m:rPr><m:sty m:val="p" /></m:rPr><m:t>−</m:t></m:r><m:acc><m:accPr><m:chr m:val="‾" /></m:accPr><m:e><m:r><m:t>y</m:t></m:r></m:e></m:acc></m:e></m:d></m:e><m:sup><m:r><m:t>2</m:t></m:r></m:sup></m:sSup></m:e></m:nary></m:oMath></a14:m></a:p></a:txBody></a:tc><a:tc><a:txBody><a:bodyPr /><a:lstStyle /><a:p><a:pPr lvl="0" indent="0" marL="0" algn="l"><a:buNone /></a:pPr><a14:m><m:oMath xmlns:m="http://schemas.openxmlformats.org/officeDocument/2006/math"><m:r><m:t>p</m:t></m:r></m:oMath></a14:m></a:p></a:txBody></a:tc><a:tc><a:txBody><a:bodyPr /><a:lstStyle /><a:p><a:pPr lvl="0" indent="0" marL="0" algn="l"><a:buNone /></a:pPr><a14:m><m:oMath xmlns:m="http://schemas.openxmlformats.org/officeDocument/2006/math"><m:f><m:fPr><m:type m:val="bar" /></m:fPr><m:num><m:nary><m:naryPr><m:chr m:val="∑" /><m:limLoc m:val="undOvr" /><m:subHide m:val="off" /><m:supHide m:val="off" /></m:naryPr><m:sub><m:r><m:t>i</m:t></m:r><m:r><m:rPr><m:sty m:val="p" /></m:rPr><m:t>=</m:t></m:r><m:r><m:t>1</m:t></m:r></m:sub><m:sup><m:r><m:t>n</m:t></m:r></m:sup><m:e><m:sSup><m:e><m:d><m:dPr><m:begChr m:val="(" /><m:sepChr m:val="" /><m:endChr m:val=")" /><m:grow /></m:dPr><m:e><m:sSub><m:e><m:r><m:t>y</m:t></m:r></m:e><m:sub><m:r><m:t>i</m:t></m:r></m:sub></m:sSub><m:r><m:rPr><m:sty m:val="p" /></m:rPr><m:t>−</m:t></m:r><m:acc><m:accPr><m:chr m:val="‾" /></m:accPr><m:e><m:r><m:t>y</m:t></m:r></m:e></m:acc></m:e></m:d></m:e><m:sup><m:r><m:t>2</m:t></m:r></m:sup></m:sSup></m:e></m:nary></m:num><m:den><m:r><m:t>p</m:t></m:r></m:den></m:f></m:oMath></a14:m></a:p></a:txBody></a:tc></a:tr><a:tr h="0"><a:tc><a:txBody><a:bodyPr /><a:lstStyle /><a:p><a:pPr lvl="0" indent="0" marL="0" algn="l"><a:buNone /></a:pPr><a:r><a:rPr /><a:t>Residual</a:t></a:r></a:p></a:txBody></a:tc><a:tc><a:txBody><a:bodyPr /><a:lstStyle /><a:p><a:pPr lvl="0" indent="0" marL="0" algn="l"><a:buNone /></a:pPr><a14:m><m:oMath xmlns:m="http://schemas.openxmlformats.org/officeDocument/2006/math"><m:nary><m:naryPr><m:chr m:val="∑" /><m:limLoc m:val="undOvr" /><m:subHide m:val="off" /><m:supHide m:val="off" /></m:naryPr><m:sub><m:r><m:t>i</m:t></m:r><m:r><m:rPr><m:sty m:val="p" /></m:rPr><m:t>=</m:t></m:r><m:r><m:t>1</m:t></m:r></m:sub><m:sup><m:r><m:t>n</m:t></m:r></m:sup><m:e><m:sSup><m:e><m:d><m:dPr><m:begChr m:val="(" /><m:sepChr m:val="" /><m:endChr m:val=")" /><m:grow /></m:dPr><m:e><m:sSub><m:e><m:r><m:t>y</m:t></m:r></m:e><m:sub><m:r><m:t>i</m:t></m:r></m:sub></m:sSub><m:r><m:rPr><m:sty m:val="p" /></m:rPr><m:t>−</m:t></m:r><m:sSub><m:e><m:acc><m:accPr><m:chr m:val="̂" /></m:accPr><m:e><m:r><m:t>y</m:t></m:r></m:e></m:acc></m:e><m:sub><m:r><m:t>i</m:t></m:r></m:sub></m:sSub></m:e></m:d></m:e><m:sup><m:r><m:t>2</m:t></m:r></m:sup></m:sSup></m:e></m:nary></m:oMath></a14:m></a:p></a:txBody></a:tc><a:tc><a:txBody><a:bodyPr /><a:lstStyle /><a:p><a:pPr lvl="0" indent="0" marL="0" algn="l"><a:buNone /></a:pPr><a14:m><m:oMath xmlns:m="http://schemas.openxmlformats.org/officeDocument/2006/math"><m:r><m:t>n</m:t></m:r><m:r><m:rPr><m:sty m:val="p" /></m:rPr><m:t>−</m:t></m:r><m:r><m:t>p</m:t></m:r><m:r><m:rPr><m:sty m:val="p" /></m:rPr><m:t>−</m:t></m:r><m:r><m:t>1</m:t></m:r></m:oMath></a14:m></a:p></a:txBody></a:tc><a:tc><a:txBody><a:bodyPr /><a:lstStyle /><a:p><a:pPr lvl="0" indent="0" marL="0" algn="l"><a:buNone /></a:pPr><a14:m><m:oMath xmlns:m="http://schemas.openxmlformats.org/officeDocument/2006/math"><m:f><m:fPr><m:type m:val="bar" /></m:fPr><m:num><m:nary><m:naryPr><m:chr m:val="∑" /><m:limLoc m:val="undOvr" /><m:subHide m:val="off" /><m:supHide m:val="off" /></m:naryPr><m:sub><m:r><m:t>i</m:t></m:r><m:r><m:rPr><m:sty m:val="p" /></m:rPr><m:t>=</m:t></m:r><m:r><m:t>1</m:t></m:r></m:sub><m:sup><m:r><m:t>n</m:t></m:r></m:sup><m:e><m:sSup><m:e><m:d><m:dPr><m:begChr m:val="(" /><m:sepChr m:val="" /><m:endChr m:val=")" /><m:grow /></m:dPr><m:e><m:sSub><m:e><m:r><m:t>y</m:t></m:r></m:e><m:sub><m:r><m:t>i</m:t></m:r></m:sub></m:sSub><m:r><m:rPr><m:sty m:val="p" /></m:rPr><m:t>−</m:t></m:r><m:sSub><m:e><m:acc><m:accPr><m:chr m:val="̂" /></m:accPr><m:e><m:r><m:t>y</m:t></m:r></m:e></m:acc></m:e><m:sub><m:r><m:t>i</m:t></m:r></m:sub></m:sSub></m:e></m:d></m:e><m:sup><m:r><m:t>2</m:t></m:r></m:sup></m:sSup></m:e></m:nary></m:num><m:den><m:r><m:t>n</m:t></m:r><m:r><m:rPr><m:sty m:val="p" /></m:rPr><m:t>−</m:t></m:r><m:r><m:t>p</m:t></m:r><m:r><m:rPr><m:sty m:val="p" /></m:rPr><m:t>−</m:t></m:r><m:r><m:t>1</m:t></m:r></m:den></m:f></m:oMath></a14:m></a:p></a:txBody></a:tc></a:tr><a:tr h="0"><a:tc><a:txBody><a:bodyPr /><a:lstStyle /><a:p><a:pPr lvl="0" indent="0" marL="0" algn="l"><a:buNone /></a:pPr><a:r><a:rPr /><a:t>Total</a:t></a:r></a:p></a:txBody></a:tc><a:tc><a:txBody><a:bodyPr /><a:lstStyle /><a:p><a:pPr lvl="0" indent="0" marL="0" algn="l"><a:buNone /></a:pPr><a14:m><m:oMath xmlns:m="http://schemas.openxmlformats.org/officeDocument/2006/math"><m:nary><m:naryPr><m:chr m:val="∑" /><m:limLoc m:val="undOvr" /><m:subHide m:val="off" /><m:supHide m:val="off" /></m:naryPr><m:sub><m:r><m:t>i</m:t></m:r><m:r><m:rPr><m:sty m:val="p" /></m:rPr><m:t>=</m:t></m:r><m:r><m:t>1</m:t></m:r></m:sub><m:sup><m:r><m:t>n</m:t></m:r></m:sup><m:e><m:sSup><m:e><m:d><m:dPr><m:begChr m:val="(" /><m:sepChr m:val="" /><m:endChr m:val=")" /><m:grow /></m:dPr><m:e><m:sSub><m:e><m:r><m:t>y</m:t></m:r></m:e><m:sub><m:r><m:t>i</m:t></m:r></m:sub></m:sSub><m:r><m:rPr><m:sty m:val="p" /></m:rPr><m:t>−</m:t></m:r><m:acc><m:accPr><m:chr m:val="‾" /></m:accPr><m:e><m:r><m:t>y</m:t></m:r></m:e></m:acc></m:e></m:d></m:e><m:sup><m:r><m:t>2</m:t></m:r></m:sup></m:sSup></m:e></m:nary></m:oMath></a14:m></a:p></a:txBody></a:tc><a:tc><a:txBody><a:bodyPr /><a:lstStyle /><a:p><a:pPr lvl="0" indent="0" marL="0" algn="l"><a:buNone /></a:pPr><a14:m><m:oMath xmlns:m="http://schemas.openxmlformats.org/officeDocument/2006/math"><m:r><m:t>n</m:t></m:r><m:r><m:rPr><m:sty m:val="p" /></m:rPr><m:t>−</m:t></m:r><m:r><m:t>1</m:t></m:r></m:oMath></a14:m></a:p></a:txBody></a:tc><a:tc><a:txBody><a:bodyPr /><a:lstStyle /><a:p><a:endParaRPr /></a:p></a:txBody></a:tc></a:tr></a:tbl></a:graphicData></a:graphic></p:graphicFrame></p:spTree></p:cSld></p:sld>
-</file>
-
-<file path=ppt/slides/slide15.xml><?xml version="1.0" encoding="utf-8"?>
-<p:sld xmlns:a="http://schemas.openxmlformats.org/drawingml/2006/main" xmlns:r="http://schemas.openxmlformats.org/officeDocument/2006/relationships" xmlns:p="http://schemas.openxmlformats.org/presentationml/2006/main">
-  <p:cSld>
-    <p:spTree>
-      <p:nvGrpSpPr>
-        <p:cNvPr id="1" name=""/>
-        <p:cNvGrpSpPr/>
-        <p:nvPr/>
-      </p:nvGrpSpPr>
-      <p:grpSpPr>
-        <a:xfrm>
-          <a:off x="0" y="0"/>
-          <a:ext cx="0" cy="0"/>
-          <a:chOff x="0" y="0"/>
-          <a:chExt cx="0" cy="0"/>
-        </a:xfrm>
-      </p:grpSpPr>
-      <p:sp>
-        <p:nvSpPr>
-          <p:cNvPr id="2" name="Title 1"/>
-          <p:cNvSpPr>
-            <a:spLocks noGrp="1"/>
-          </p:cNvSpPr>
-          <p:nvPr>
-            <p:ph type="title"/>
-          </p:nvPr>
-        </p:nvSpPr>
-        <p:spPr>
-          <a:xfrm>
-            <a:off x="0" y="0"/>
-            <a:ext cx="9144000" cy="582780"/>
-          </a:xfrm>
-        </p:spPr>
-        <p:txBody>
-          <a:bodyPr/>
-          <a:lstStyle/>
-          <a:p>
-            <a:pPr lvl="0" indent="0" marL="0">
-              <a:buNone/>
-            </a:pPr>
-            <a:r>
-              <a:rPr b="1"/>
-              <a:t>Lecture 10:</a:t>
-            </a:r>
-            <a:r>
-              <a:rPr/>
-              <a:t> Hypotheses</a:t>
-            </a:r>
-          </a:p>
-        </p:txBody>
-      </p:sp>
-      <p:sp>
-        <p:nvSpPr>
-          <p:cNvPr id="3" name="Content Placeholder 2"/>
-          <p:cNvSpPr>
-            <a:spLocks noGrp="1"/>
-          </p:cNvSpPr>
-          <p:nvPr>
-            <p:ph idx="1"/>
-          </p:nvPr>
-        </p:nvSpPr>
-        <p:spPr/>
-        <p:txBody>
-          <a:bodyPr/>
-          <a:lstStyle/>
-          <a:p>
-            <a:pPr lvl="0" indent="0" marL="0">
-              <a:buNone/>
-            </a:pPr>
-            <a:r>
-              <a:rPr/>
-              <a:t>Two Hos usually tested in MLR:</a:t>
-            </a:r>
-          </a:p>
-          <a:p>
-            <a:pPr lvl="0"/>
-            <a:r>
-              <a:rPr/>
-              <a:t>“Basic” Ho: all partial regression slopes equal 0; β1 = β2 = … = βp = 0</a:t>
-            </a:r>
-          </a:p>
-          <a:p>
-            <a:pPr lvl="0"/>
-            <a:r>
-              <a:rPr/>
-              <a:t>If “basic” Ho true, MSregression and MSresidual estimate variance and their ratio (F-ratio) = 1</a:t>
-            </a:r>
-          </a:p>
-          <a:p>
-            <a:pPr lvl="0"/>
-            <a:r>
-              <a:rPr/>
-              <a:t>If “basic” Ho false (at least one β ≠ 0) MSregression estimates variance + partial regression slope and their ratio (F-ratio)</a:t>
-            </a:r>
-          </a:p>
-          <a:p>
-            <a:pPr lvl="0"/>
-            <a:r>
-              <a:rPr/>
-              <a:t>will be &gt; 1 - F-ratio compared to F-distribution for p-value</a:t>
-            </a:r>
-          </a:p>
-        </p:txBody>
-      </p:sp>
-    </p:spTree>
-  </p:cSld>
-</p:sld>
+<file path=ppt/slides/slide15.xml><?xml version="1.0" encoding="UTF-8"?><p:sld xmlns:a="http://schemas.openxmlformats.org/drawingml/2006/main" xmlns:r="http://schemas.openxmlformats.org/officeDocument/2006/relationships" xmlns:p="http://schemas.openxmlformats.org/presentationml/2006/main"><p:cSld><p:spTree><p:nvGrpSpPr><p:cNvPr id="1" name="" /><p:cNvGrpSpPr /><p:nvPr /></p:nvGrpSpPr><p:grpSpPr><a:xfrm><a:off x="0" y="0" /><a:ext cx="0" cy="0" /><a:chOff x="0" y="0" /><a:chExt cx="0" cy="0" /></a:xfrm></p:grpSpPr><p:sp><p:nvSpPr><p:cNvPr id="2" name="Title 1" /><p:cNvSpPr><a:spLocks noGrp="1" /></p:cNvSpPr><p:nvPr><p:ph type="title" /></p:nvPr></p:nvSpPr><p:spPr><a:xfrm><a:off x="0" y="0" /><a:ext cx="9144000" cy="871538" /></a:xfrm></p:spPr><p:txBody><a:bodyPr /><a:lstStyle /><a:p><a:pPr lvl="0" indent="0" marL="0"><a:buNone /></a:pPr><a:r><a:rPr b="1" /><a:t>Lecture 10:</a:t></a:r><a:r><a:rPr /><a:t> Analyses</a:t></a:r></a:p></p:txBody></p:sp><p:sp><p:nvSpPr><p:cNvPr id="4" name="Text Placeholder 3" /><p:cNvSpPr><a:spLocks noGrp="1" /></p:cNvSpPr><p:nvPr><p:ph idx="2" sz="half" type="body" /></p:nvPr></p:nvSpPr><p:spPr /><p:txBody><a:bodyPr /><a:lstStyle /><a:p><a:pPr lvl="0" indent="0" marL="0"><a:spcBef><a:spcPts val="3000" /></a:spcBef><a:buNone /></a:pPr><a:r><a:rPr b="1" /><a:t>SS converted to non-additive MS=(SS/df)</a:t></a:r></a:p><a:p><a:pPr lvl="0" /><a:r><a:rPr /><a:t>MS</a:t></a:r><a:r><a:rPr baseline="-25000" /><a:t>residual</a:t></a:r><a:r><a:rPr /><a:t>: estimate population variance</a:t></a:r></a:p><a:p><a:pPr lvl="0" /><a:r><a:rPr /><a:t>MS</a:t></a:r><a:r><a:rPr baseline="-25000" /><a:t>regression</a:t></a:r><a:r><a:rPr /><a:t>: estimate population variance + variation due to strength of X-Y relationships</a:t></a:r></a:p><a:p><a:pPr lvl="0" /><a:r><a:rPr /><a:t>MS is an estimate of variance that doesn’t increase with sample size the way Sum of Squares (SS) does</a:t></a:r></a:p></p:txBody></p:sp><p:graphicFrame><p:nvGraphicFramePr><p:cNvPr id="6" name="Content Placeholder 5" /><p:cNvGraphicFramePr><a:graphicFrameLocks noGrp="1" /></p:cNvGraphicFramePr><p:nvPr><p:ph idx="1" /></p:nvPr></p:nvGraphicFramePr><p:xfrm><a:off x="3657600" y="952500" /><a:ext cx="5232400" cy="3797300" /></p:xfrm><a:graphic><a:graphicData uri="http://schemas.openxmlformats.org/drawingml/2006/table"><a:tbl><a:tblPr firstRow="1" bandRow="1"><a:tableStyleId>{5C22544A-7EE6-4342-B048-85BDC9FD1C3A}</a:tableStyleId></a:tblPr><a:tblGrid><a:gridCol w="1308100" /><a:gridCol w="1308100" /><a:gridCol w="1308100" /><a:gridCol w="1308100" /></a:tblGrid><a:tr h="0"><a:tc><a:txBody><a:bodyPr /><a:lstStyle /><a:p><a:pPr lvl="0" indent="0" marL="0" algn="l"><a:buNone /></a:pPr><a:r><a:rPr /><a:t>Source of variation</a:t></a:r></a:p></a:txBody><a:tcPr /></a:tc><a:tc><a:txBody><a:bodyPr /><a:lstStyle /><a:p><a:pPr lvl="0" indent="0" marL="0" algn="l"><a:buNone /></a:pPr><a:r><a:rPr /><a:t>SS</a:t></a:r></a:p></a:txBody><a:tcPr /></a:tc><a:tc><a:txBody><a:bodyPr /><a:lstStyle /><a:p><a:pPr lvl="0" indent="0" marL="0" algn="l"><a:buNone /></a:pPr><a:r><a:rPr /><a:t>df</a:t></a:r></a:p></a:txBody><a:tcPr /></a:tc><a:tc><a:txBody><a:bodyPr /><a:lstStyle /><a:p><a:pPr lvl="0" indent="0" marL="0" algn="l"><a:buNone /></a:pPr><a:r><a:rPr /><a:t>MS</a:t></a:r></a:p></a:txBody><a:tcPr /></a:tc></a:tr><a:tr h="0"><a:tc><a:txBody><a:bodyPr /><a:lstStyle /><a:p><a:pPr lvl="0" indent="0" marL="0" algn="l"><a:buNone /></a:pPr><a:r><a:rPr /><a:t>Regression</a:t></a:r></a:p></a:txBody></a:tc><a:tc><a:txBody><a:bodyPr /><a:lstStyle /><a:p><a:pPr lvl="0" indent="0" marL="0" algn="l"><a:buNone /></a:pPr><a14:m><m:oMath xmlns:m="http://schemas.openxmlformats.org/officeDocument/2006/math"><m:nary><m:naryPr><m:chr m:val="∑" /><m:limLoc m:val="undOvr" /><m:subHide m:val="off" /><m:supHide m:val="off" /></m:naryPr><m:sub><m:r><m:t>i</m:t></m:r><m:r><m:rPr><m:sty m:val="p" /></m:rPr><m:t>=</m:t></m:r><m:r><m:t>1</m:t></m:r></m:sub><m:sup><m:r><m:t>n</m:t></m:r></m:sup><m:e><m:sSup><m:e><m:d><m:dPr><m:begChr m:val="(" /><m:sepChr m:val="" /><m:endChr m:val=")" /><m:grow /></m:dPr><m:e><m:sSub><m:e><m:r><m:t>y</m:t></m:r></m:e><m:sub><m:r><m:t>i</m:t></m:r></m:sub></m:sSub><m:r><m:rPr><m:sty m:val="p" /></m:rPr><m:t>−</m:t></m:r><m:acc><m:accPr><m:chr m:val="‾" /></m:accPr><m:e><m:r><m:t>y</m:t></m:r></m:e></m:acc></m:e></m:d></m:e><m:sup><m:r><m:t>2</m:t></m:r></m:sup></m:sSup></m:e></m:nary></m:oMath></a14:m></a:p></a:txBody></a:tc><a:tc><a:txBody><a:bodyPr /><a:lstStyle /><a:p><a:pPr lvl="0" indent="0" marL="0" algn="l"><a:buNone /></a:pPr><a14:m><m:oMath xmlns:m="http://schemas.openxmlformats.org/officeDocument/2006/math"><m:r><m:t>p</m:t></m:r></m:oMath></a14:m></a:p></a:txBody></a:tc><a:tc><a:txBody><a:bodyPr /><a:lstStyle /><a:p><a:pPr lvl="0" indent="0" marL="0" algn="l"><a:buNone /></a:pPr><a14:m><m:oMath xmlns:m="http://schemas.openxmlformats.org/officeDocument/2006/math"><m:f><m:fPr><m:type m:val="bar" /></m:fPr><m:num><m:nary><m:naryPr><m:chr m:val="∑" /><m:limLoc m:val="undOvr" /><m:subHide m:val="off" /><m:supHide m:val="off" /></m:naryPr><m:sub><m:r><m:t>i</m:t></m:r><m:r><m:rPr><m:sty m:val="p" /></m:rPr><m:t>=</m:t></m:r><m:r><m:t>1</m:t></m:r></m:sub><m:sup><m:r><m:t>n</m:t></m:r></m:sup><m:e><m:sSup><m:e><m:d><m:dPr><m:begChr m:val="(" /><m:sepChr m:val="" /><m:endChr m:val=")" /><m:grow /></m:dPr><m:e><m:sSub><m:e><m:r><m:t>y</m:t></m:r></m:e><m:sub><m:r><m:t>i</m:t></m:r></m:sub></m:sSub><m:r><m:rPr><m:sty m:val="p" /></m:rPr><m:t>−</m:t></m:r><m:acc><m:accPr><m:chr m:val="‾" /></m:accPr><m:e><m:r><m:t>y</m:t></m:r></m:e></m:acc></m:e></m:d></m:e><m:sup><m:r><m:t>2</m:t></m:r></m:sup></m:sSup></m:e></m:nary></m:num><m:den><m:r><m:t>p</m:t></m:r></m:den></m:f></m:oMath></a14:m></a:p></a:txBody></a:tc></a:tr><a:tr h="0"><a:tc><a:txBody><a:bodyPr /><a:lstStyle /><a:p><a:pPr lvl="0" indent="0" marL="0" algn="l"><a:buNone /></a:pPr><a:r><a:rPr /><a:t>Residual</a:t></a:r></a:p></a:txBody></a:tc><a:tc><a:txBody><a:bodyPr /><a:lstStyle /><a:p><a:pPr lvl="0" indent="0" marL="0" algn="l"><a:buNone /></a:pPr><a14:m><m:oMath xmlns:m="http://schemas.openxmlformats.org/officeDocument/2006/math"><m:nary><m:naryPr><m:chr m:val="∑" /><m:limLoc m:val="undOvr" /><m:subHide m:val="off" /><m:supHide m:val="off" /></m:naryPr><m:sub><m:r><m:t>i</m:t></m:r><m:r><m:rPr><m:sty m:val="p" /></m:rPr><m:t>=</m:t></m:r><m:r><m:t>1</m:t></m:r></m:sub><m:sup><m:r><m:t>n</m:t></m:r></m:sup><m:e><m:sSup><m:e><m:d><m:dPr><m:begChr m:val="(" /><m:sepChr m:val="" /><m:endChr m:val=")" /><m:grow /></m:dPr><m:e><m:sSub><m:e><m:r><m:t>y</m:t></m:r></m:e><m:sub><m:r><m:t>i</m:t></m:r></m:sub></m:sSub><m:r><m:rPr><m:sty m:val="p" /></m:rPr><m:t>−</m:t></m:r><m:sSub><m:e><m:acc><m:accPr><m:chr m:val="̂" /></m:accPr><m:e><m:r><m:t>y</m:t></m:r></m:e></m:acc></m:e><m:sub><m:r><m:t>i</m:t></m:r></m:sub></m:sSub></m:e></m:d></m:e><m:sup><m:r><m:t>2</m:t></m:r></m:sup></m:sSup></m:e></m:nary></m:oMath></a14:m></a:p></a:txBody></a:tc><a:tc><a:txBody><a:bodyPr /><a:lstStyle /><a:p><a:pPr lvl="0" indent="0" marL="0" algn="l"><a:buNone /></a:pPr><a14:m><m:oMath xmlns:m="http://schemas.openxmlformats.org/officeDocument/2006/math"><m:r><m:t>n</m:t></m:r><m:r><m:rPr><m:sty m:val="p" /></m:rPr><m:t>−</m:t></m:r><m:r><m:t>p</m:t></m:r><m:r><m:rPr><m:sty m:val="p" /></m:rPr><m:t>−</m:t></m:r><m:r><m:t>1</m:t></m:r></m:oMath></a14:m></a:p></a:txBody></a:tc><a:tc><a:txBody><a:bodyPr /><a:lstStyle /><a:p><a:pPr lvl="0" indent="0" marL="0" algn="l"><a:buNone /></a:pPr><a14:m><m:oMath xmlns:m="http://schemas.openxmlformats.org/officeDocument/2006/math"><m:f><m:fPr><m:type m:val="bar" /></m:fPr><m:num><m:nary><m:naryPr><m:chr m:val="∑" /><m:limLoc m:val="undOvr" /><m:subHide m:val="off" /><m:supHide m:val="off" /></m:naryPr><m:sub><m:r><m:t>i</m:t></m:r><m:r><m:rPr><m:sty m:val="p" /></m:rPr><m:t>=</m:t></m:r><m:r><m:t>1</m:t></m:r></m:sub><m:sup><m:r><m:t>n</m:t></m:r></m:sup><m:e><m:sSup><m:e><m:d><m:dPr><m:begChr m:val="(" /><m:sepChr m:val="" /><m:endChr m:val=")" /><m:grow /></m:dPr><m:e><m:sSub><m:e><m:r><m:t>y</m:t></m:r></m:e><m:sub><m:r><m:t>i</m:t></m:r></m:sub></m:sSub><m:r><m:rPr><m:sty m:val="p" /></m:rPr><m:t>−</m:t></m:r><m:sSub><m:e><m:acc><m:accPr><m:chr m:val="̂" /></m:accPr><m:e><m:r><m:t>y</m:t></m:r></m:e></m:acc></m:e><m:sub><m:r><m:t>i</m:t></m:r></m:sub></m:sSub></m:e></m:d></m:e><m:sup><m:r><m:t>2</m:t></m:r></m:sup></m:sSup></m:e></m:nary></m:num><m:den><m:r><m:t>n</m:t></m:r><m:r><m:rPr><m:sty m:val="p" /></m:rPr><m:t>−</m:t></m:r><m:r><m:t>p</m:t></m:r><m:r><m:rPr><m:sty m:val="p" /></m:rPr><m:t>−</m:t></m:r><m:r><m:t>1</m:t></m:r></m:den></m:f></m:oMath></a14:m></a:p></a:txBody></a:tc></a:tr><a:tr h="0"><a:tc><a:txBody><a:bodyPr /><a:lstStyle /><a:p><a:pPr lvl="0" indent="0" marL="0" algn="l"><a:buNone /></a:pPr><a:r><a:rPr /><a:t>Total</a:t></a:r></a:p></a:txBody></a:tc><a:tc><a:txBody><a:bodyPr /><a:lstStyle /><a:p><a:pPr lvl="0" indent="0" marL="0" algn="l"><a:buNone /></a:pPr><a14:m><m:oMath xmlns:m="http://schemas.openxmlformats.org/officeDocument/2006/math"><m:nary><m:naryPr><m:chr m:val="∑" /><m:limLoc m:val="undOvr" /><m:subHide m:val="off" /><m:supHide m:val="off" /></m:naryPr><m:sub><m:r><m:t>i</m:t></m:r><m:r><m:rPr><m:sty m:val="p" /></m:rPr><m:t>=</m:t></m:r><m:r><m:t>1</m:t></m:r></m:sub><m:sup><m:r><m:t>n</m:t></m:r></m:sup><m:e><m:sSup><m:e><m:d><m:dPr><m:begChr m:val="(" /><m:sepChr m:val="" /><m:endChr m:val=")" /><m:grow /></m:dPr><m:e><m:sSub><m:e><m:r><m:t>y</m:t></m:r></m:e><m:sub><m:r><m:t>i</m:t></m:r></m:sub></m:sSub><m:r><m:rPr><m:sty m:val="p" /></m:rPr><m:t>−</m:t></m:r><m:acc><m:accPr><m:chr m:val="‾" /></m:accPr><m:e><m:r><m:t>y</m:t></m:r></m:e></m:acc></m:e></m:d></m:e><m:sup><m:r><m:t>2</m:t></m:r></m:sup></m:sSup></m:e></m:nary></m:oMath></a14:m></a:p></a:txBody></a:tc><a:tc><a:txBody><a:bodyPr /><a:lstStyle /><a:p><a:pPr lvl="0" indent="0" marL="0" algn="l"><a:buNone /></a:pPr><a14:m><m:oMath xmlns:m="http://schemas.openxmlformats.org/officeDocument/2006/math"><m:r><m:t>n</m:t></m:r><m:r><m:rPr><m:sty m:val="p" /></m:rPr><m:t>−</m:t></m:r><m:r><m:t>1</m:t></m:r></m:oMath></a14:m></a:p></a:txBody></a:tc><a:tc><a:txBody><a:bodyPr /><a:lstStyle /><a:p><a:endParaRPr /></a:p></a:txBody></a:tc></a:tr></a:tbl></a:graphicData></a:graphic></p:graphicFrame></p:spTree></p:cSld></p:sld>
 </file>
 
 <file path=ppt/slides/slide16.xml><?xml version="1.0" encoding="utf-8"?>
@@ -4255,53 +4533,107 @@
           <a:lstStyle/>
           <a:p>
             <a:pPr lvl="0" indent="0" marL="0">
+              <a:spcBef>
+                <a:spcPts val="3000"/>
+              </a:spcBef>
               <a:buNone/>
             </a:pPr>
             <a:r>
-              <a:rPr/>
-              <a:t>Also: is any specific β = 0 (explanatory role)?</a:t>
+              <a:rPr b="1"/>
+              <a:t>Two Null Hypotheses usually tested in MLR:</a:t>
             </a:r>
           </a:p>
           <a:p>
             <a:pPr lvl="0"/>
             <a:r>
               <a:rPr/>
-              <a:t>E.g., does LAT have effect on NPP?</a:t>
+              <a:t>“Basic” H</a:t>
+            </a:r>
+            <a:r>
+              <a:rPr baseline="-25000"/>
+              <a:t>o</a:t>
+            </a:r>
+            <a:r>
+              <a:rPr/>
+              <a:t>: all partial regression slopes equal 0; β</a:t>
+            </a:r>
+            <a:r>
+              <a:rPr baseline="-25000"/>
+              <a:t>1</a:t>
+            </a:r>
+            <a:r>
+              <a:rPr/>
+              <a:t> = β</a:t>
+            </a:r>
+            <a:r>
+              <a:rPr baseline="-25000"/>
+              <a:t>2</a:t>
+            </a:r>
+            <a:r>
+              <a:rPr/>
+              <a:t> = … = β</a:t>
+            </a:r>
+            <a:r>
+              <a:rPr baseline="-25000"/>
+              <a:t>p</a:t>
+            </a:r>
+            <a:r>
+              <a:rPr/>
+              <a:t> = 0</a:t>
             </a:r>
           </a:p>
           <a:p>
             <a:pPr lvl="0"/>
             <a:r>
               <a:rPr/>
-              <a:t>These Hs tested through model comparison</a:t>
+              <a:t>If “basic” H</a:t>
+            </a:r>
+            <a:r>
+              <a:rPr baseline="-25000"/>
+              <a:t>o</a:t>
+            </a:r>
+            <a:r>
+              <a:rPr/>
+              <a:t> true, MS</a:t>
+            </a:r>
+            <a:r>
+              <a:rPr baseline="-25000"/>
+              <a:t>regression</a:t>
+            </a:r>
+            <a:r>
+              <a:rPr/>
+              <a:t> and MS</a:t>
+            </a:r>
+            <a:r>
+              <a:rPr baseline="-25000"/>
+              <a:t>residual</a:t>
+            </a:r>
+            <a:r>
+              <a:rPr/>
+              <a:t> estimate variance and their ratio (F-ratio) = 1</a:t>
             </a:r>
           </a:p>
           <a:p>
             <a:pPr lvl="0"/>
             <a:r>
               <a:rPr/>
-              <a:t>Model w 3 predictors X1, X2,X3 (model 1):</a:t>
-            </a:r>
-          </a:p>
-          <a:p>
-            <a:pPr lvl="0"/>
-            <a:r>
-              <a:rPr/>
-              <a:t>yi= β0 +β1xi1+β2xi2+β3xi3+ εi</a:t>
-            </a:r>
-          </a:p>
-          <a:p>
-            <a:pPr lvl="0"/>
-            <a:r>
-              <a:rPr/>
-              <a:t>To test Ho that β1 = 0 compare fit of model 1 to model 2:</a:t>
-            </a:r>
-          </a:p>
-          <a:p>
-            <a:pPr lvl="0"/>
-            <a:r>
-              <a:rPr/>
-              <a:t>yi= β0 +β2xi2+β3xi3+ εi</a:t>
+              <a:t>If “basic” H</a:t>
+            </a:r>
+            <a:r>
+              <a:rPr baseline="-25000"/>
+              <a:t>o</a:t>
+            </a:r>
+            <a:r>
+              <a:rPr/>
+              <a:t> false (at least one β ≠ 0) MS</a:t>
+            </a:r>
+            <a:r>
+              <a:rPr baseline="-25000"/>
+              <a:t>regression</a:t>
+            </a:r>
+            <a:r>
+              <a:rPr/>
+              <a:t> estimates variance + partial regression slope and their ratio (F-ratio) will be &gt; 1 - F-ratio compared to F-distribution for p-value</a:t>
             </a:r>
           </a:p>
         </p:txBody>
@@ -4362,6 +4694,260 @@
           </a:p>
         </p:txBody>
       </p:sp>
+      <p:sp>
+        <p:nvSpPr>
+          <p:cNvPr id="3" name="Content Placeholder 2"/>
+          <p:cNvSpPr>
+            <a:spLocks noGrp="1"/>
+          </p:cNvSpPr>
+          <p:nvPr>
+            <p:ph idx="1"/>
+          </p:nvPr>
+        </p:nvSpPr>
+        <p:spPr/>
+        <p:txBody>
+          <a:bodyPr/>
+          <a:lstStyle/>
+          <a:p>
+            <a:pPr lvl="0" indent="0" marL="0">
+              <a:spcBef>
+                <a:spcPts val="3000"/>
+              </a:spcBef>
+              <a:buNone/>
+            </a:pPr>
+            <a:r>
+              <a:rPr b="1"/>
+              <a:t>Also: is any specific β = 0 (explanatory role)?</a:t>
+            </a:r>
+          </a:p>
+          <a:p>
+            <a:pPr lvl="0"/>
+            <a:r>
+              <a:rPr/>
+              <a:t>E.g., does LAT have effect on Ant species?</a:t>
+            </a:r>
+          </a:p>
+          <a:p>
+            <a:pPr lvl="0"/>
+            <a:r>
+              <a:rPr/>
+              <a:t>These H’s tested through model comparison</a:t>
+            </a:r>
+          </a:p>
+          <a:p>
+            <a:pPr lvl="0"/>
+            <a:r>
+              <a:rPr/>
+              <a:t>Model 1 - model with 2 predictors X</a:t>
+            </a:r>
+            <a:r>
+              <a:rPr baseline="-25000"/>
+              <a:t>1</a:t>
+            </a:r>
+            <a:r>
+              <a:rPr/>
+              <a:t>, X</a:t>
+            </a:r>
+            <a:r>
+              <a:rPr baseline="-25000"/>
+              <a:t>2</a:t>
+            </a:r>
+            <a:r>
+              <a:rPr/>
+              <a:t>:</a:t>
+            </a:r>
+          </a:p>
+          <a:p>
+            <a:pPr lvl="1"/>
+            <a:r>
+              <a:rPr/>
+              <a:t>yi= β</a:t>
+            </a:r>
+            <a:r>
+              <a:rPr baseline="-25000"/>
+              <a:t>0</a:t>
+            </a:r>
+            <a:r>
+              <a:rPr/>
+              <a:t> +β</a:t>
+            </a:r>
+            <a:r>
+              <a:rPr baseline="-25000"/>
+              <a:t>1</a:t>
+            </a:r>
+            <a:r>
+              <a:rPr/>
+              <a:t>x</a:t>
+            </a:r>
+            <a:r>
+              <a:rPr baseline="-25000"/>
+              <a:t>i1</a:t>
+            </a:r>
+            <a:r>
+              <a:rPr/>
+              <a:t>+β</a:t>
+            </a:r>
+            <a:r>
+              <a:rPr baseline="-25000"/>
+              <a:t>2</a:t>
+            </a:r>
+            <a:r>
+              <a:rPr/>
+              <a:t>x</a:t>
+            </a:r>
+            <a:r>
+              <a:rPr baseline="-25000"/>
+              <a:t>i2</a:t>
+            </a:r>
+            <a:r>
+              <a:rPr/>
+              <a:t>+ ε</a:t>
+            </a:r>
+            <a:r>
+              <a:rPr baseline="-25000"/>
+              <a:t>i</a:t>
+            </a:r>
+          </a:p>
+          <a:p>
+            <a:pPr lvl="0"/>
+            <a:r>
+              <a:rPr/>
+              <a:t>Model 2 - To test H</a:t>
+            </a:r>
+            <a:r>
+              <a:rPr baseline="-25000"/>
+              <a:t>o</a:t>
+            </a:r>
+            <a:r>
+              <a:rPr/>
+              <a:t> that β</a:t>
+            </a:r>
+            <a:r>
+              <a:rPr baseline="-25000"/>
+              <a:t>2</a:t>
+            </a:r>
+            <a:r>
+              <a:rPr/>
+              <a:t> = 0 compare fit of </a:t>
+            </a:r>
+            <a:r>
+              <a:rPr b="1"/>
+              <a:t>model 1</a:t>
+            </a:r>
+            <a:r>
+              <a:rPr/>
+              <a:t> to </a:t>
+            </a:r>
+            <a:r>
+              <a:rPr b="1"/>
+              <a:t>model 2</a:t>
+            </a:r>
+            <a:r>
+              <a:rPr/>
+              <a:t> with 1 predictor:</a:t>
+            </a:r>
+          </a:p>
+          <a:p>
+            <a:pPr lvl="1"/>
+            <a:r>
+              <a:rPr/>
+              <a:t>y</a:t>
+            </a:r>
+            <a:r>
+              <a:rPr baseline="-25000"/>
+              <a:t>i</a:t>
+            </a:r>
+            <a:r>
+              <a:rPr/>
+              <a:t>= β</a:t>
+            </a:r>
+            <a:r>
+              <a:rPr baseline="-25000"/>
+              <a:t>0</a:t>
+            </a:r>
+            <a:r>
+              <a:rPr/>
+              <a:t> +β</a:t>
+            </a:r>
+            <a:r>
+              <a:rPr baseline="-25000"/>
+              <a:t>1</a:t>
+            </a:r>
+            <a:r>
+              <a:rPr/>
+              <a:t>x</a:t>
+            </a:r>
+            <a:r>
+              <a:rPr baseline="-25000"/>
+              <a:t>i1</a:t>
+            </a:r>
+            <a:r>
+              <a:rPr/>
+              <a:t>+ ε</a:t>
+            </a:r>
+            <a:r>
+              <a:rPr baseline="-25000"/>
+              <a:t>i</a:t>
+            </a:r>
+          </a:p>
+        </p:txBody>
+      </p:sp>
+    </p:spTree>
+  </p:cSld>
+</p:sld>
+</file>
+
+<file path=ppt/slides/slide18.xml><?xml version="1.0" encoding="utf-8"?>
+<p:sld xmlns:a="http://schemas.openxmlformats.org/drawingml/2006/main" xmlns:r="http://schemas.openxmlformats.org/officeDocument/2006/relationships" xmlns:p="http://schemas.openxmlformats.org/presentationml/2006/main">
+  <p:cSld>
+    <p:spTree>
+      <p:nvGrpSpPr>
+        <p:cNvPr id="1" name=""/>
+        <p:cNvGrpSpPr/>
+        <p:nvPr/>
+      </p:nvGrpSpPr>
+      <p:grpSpPr>
+        <a:xfrm>
+          <a:off x="0" y="0"/>
+          <a:ext cx="0" cy="0"/>
+          <a:chOff x="0" y="0"/>
+          <a:chExt cx="0" cy="0"/>
+        </a:xfrm>
+      </p:grpSpPr>
+      <p:sp>
+        <p:nvSpPr>
+          <p:cNvPr id="2" name="Title 1"/>
+          <p:cNvSpPr>
+            <a:spLocks noGrp="1"/>
+          </p:cNvSpPr>
+          <p:nvPr>
+            <p:ph type="title"/>
+          </p:nvPr>
+        </p:nvSpPr>
+        <p:spPr>
+          <a:xfrm>
+            <a:off x="0" y="0"/>
+            <a:ext cx="9144000" cy="582780"/>
+          </a:xfrm>
+        </p:spPr>
+        <p:txBody>
+          <a:bodyPr/>
+          <a:lstStyle/>
+          <a:p>
+            <a:pPr lvl="0" indent="0" marL="0">
+              <a:buNone/>
+            </a:pPr>
+            <a:r>
+              <a:rPr b="1"/>
+              <a:t>Lecture 10:</a:t>
+            </a:r>
+            <a:r>
+              <a:rPr/>
+              <a:t> Hypotheses</a:t>
+            </a:r>
+          </a:p>
+        </p:txBody>
+      </p:sp>
       <mc:AlternateContent xmlns:mc="http://schemas.openxmlformats.org/markup-compatibility/2006">
         <mc:Choice xmlns:a14="http://schemas.microsoft.com/office/drawing/2010/main" Requires="a14">
           <p:sp>
@@ -4382,28 +4968,188 @@
                 <a:pPr lvl="0"/>
                 <a:r>
                   <a:rPr/>
-                  <a:t>If SSregression of mod1=mod2, cannot reject Ho β1 = 0</a:t>
+                  <a:t>If SS</a:t>
+                </a:r>
+                <a:r>
+                  <a:rPr baseline="-25000"/>
+                  <a:t>regression</a:t>
+                </a:r>
+                <a:r>
+                  <a:rPr/>
+                  <a:t> of model</a:t>
+                </a:r>
+                <a:r>
+                  <a:rPr baseline="-25000"/>
+                  <a:t>1</a:t>
+                </a:r>
+                <a:r>
+                  <a:rPr/>
+                  <a:t>=model</a:t>
+                </a:r>
+                <a:r>
+                  <a:rPr baseline="-25000"/>
+                  <a:t>2</a:t>
+                </a:r>
+                <a:r>
+                  <a:rPr/>
+                  <a:t>, cannot reject H</a:t>
+                </a:r>
+                <a:r>
+                  <a:rPr baseline="-25000"/>
+                  <a:t>o</a:t>
+                </a:r>
+                <a:r>
+                  <a:rPr/>
+                  <a:t> β</a:t>
+                </a:r>
+                <a:r>
+                  <a:rPr baseline="-25000"/>
+                  <a:t>1</a:t>
+                </a:r>
+                <a:r>
+                  <a:rPr/>
+                  <a:t> = 0</a:t>
+                </a:r>
+              </a:p>
+              <a:p>
+                <a:pPr lvl="1"/>
+                <a:r>
+                  <a:rPr/>
+                  <a:t>adding X</a:t>
+                </a:r>
+                <a:r>
+                  <a:rPr baseline="-25000"/>
+                  <a:t>2</a:t>
+                </a:r>
+                <a:r>
+                  <a:rPr/>
+                  <a:t> did not explain any additional variance</a:t>
                 </a:r>
               </a:p>
               <a:p>
                 <a:pPr lvl="0"/>
                 <a:r>
                   <a:rPr/>
-                  <a:t>If SSregression of mod1 &gt; mod2, evidence to reject Ho β1 = 0</a:t>
+                  <a:t>If SS</a:t>
+                </a:r>
+                <a:r>
+                  <a:rPr baseline="-25000"/>
+                  <a:t>regression</a:t>
+                </a:r>
+                <a:r>
+                  <a:rPr/>
+                  <a:t> of mod1 &gt; mod2, evidence to reject H</a:t>
+                </a:r>
+                <a:r>
+                  <a:rPr baseline="-25000"/>
+                  <a:t>o</a:t>
+                </a:r>
+                <a:r>
+                  <a:rPr/>
+                  <a:t> β</a:t>
+                </a:r>
+                <a:r>
+                  <a:rPr baseline="-25000"/>
+                  <a:t>1</a:t>
+                </a:r>
+                <a:r>
+                  <a:rPr/>
+                  <a:t> = 0</a:t>
+                </a:r>
+              </a:p>
+              <a:p>
+                <a:pPr lvl="1"/>
+                <a:r>
+                  <a:rPr/>
+                  <a:t>adding X2 explains more variance</a:t>
+                </a:r>
+              </a:p>
+              <a:p>
+                <a:pPr lvl="1"/>
+                <a:r>
+                  <a:rPr/>
+                  <a:t>evidence to reject H0: β</a:t>
+                </a:r>
+                <a:r>
+                  <a:rPr baseline="-25000"/>
+                  <a:t>2</a:t>
+                </a:r>
+                <a:r>
+                  <a:rPr/>
+                  <a:t> = 2</a:t>
                 </a:r>
               </a:p>
               <a:p>
                 <a:pPr lvl="0"/>
                 <a:r>
                   <a:rPr/>
-                  <a:t>SS for β1 is SSextraβ1 = Full SSregression - Reduced SSregression</a:t>
+                  <a:t>SS for β</a:t>
+                </a:r>
+                <a:r>
+                  <a:rPr baseline="-25000"/>
+                  <a:t>1</a:t>
+                </a:r>
+                <a:r>
+                  <a:rPr/>
+                  <a:t> is SS</a:t>
+                </a:r>
+                <a:r>
+                  <a:rPr baseline="-25000"/>
+                  <a:t>extra</a:t>
+                </a:r>
+                <a:r>
+                  <a:rPr/>
+                  <a:t>β</a:t>
+                </a:r>
+                <a:r>
+                  <a:rPr baseline="-25000"/>
+                  <a:t>1</a:t>
+                </a:r>
+                <a:r>
+                  <a:rPr/>
+                  <a:t> = Full SS</a:t>
+                </a:r>
+                <a:r>
+                  <a:rPr baseline="-25000"/>
+                  <a:t>regression</a:t>
+                </a:r>
+                <a:r>
+                  <a:rPr/>
+                  <a:t> - Reduced SS</a:t>
+                </a:r>
+                <a:r>
+                  <a:rPr baseline="-25000"/>
+                  <a:t>regression</a:t>
+                </a:r>
+              </a:p>
+              <a:p>
+                <a:pPr lvl="1"/>
+                <a:r>
+                  <a:rPr/>
+                  <a:t>This quantifies how much additional variance X</a:t>
+                </a:r>
+                <a:r>
+                  <a:rPr baseline="-25000"/>
+                  <a:t>2</a:t>
+                </a:r>
+                <a:r>
+                  <a:rPr/>
+                  <a:t> explains</a:t>
                 </a:r>
               </a:p>
               <a:p>
                 <a:pPr lvl="0"/>
                 <a:r>
                   <a:rPr/>
-                  <a:t>Use partial F-test to test Ho β1 = 0 :</a:t>
+                  <a:t>Use partial F-test to test Ho β</a:t>
+                </a:r>
+                <a:r>
+                  <a:rPr baseline="-25000"/>
+                  <a:t>1</a:t>
+                </a:r>
+                <a:r>
+                  <a:rPr/>
+                  <a:t> = 0 :</a:t>
                 </a:r>
               </a:p>
               <a:p>
@@ -4548,7 +5294,7 @@
                   <a:buNone/>
                 </a:pPr>
                 <a:r>
-                  <a:rPr/>
+                  <a:rPr b="1"/>
                   <a:t>Can also use t-test (R provides this value)</a:t>
                 </a:r>
               </a:p>
@@ -4561,7 +5307,7 @@
 </p:sld>
 </file>
 
-<file path=ppt/slides/slide18.xml><?xml version="1.0" encoding="utf-8"?>
+<file path=ppt/slides/slide19.xml><?xml version="1.0" encoding="utf-8"?>
 <p:sld xmlns:a="http://schemas.openxmlformats.org/drawingml/2006/main" xmlns:r="http://schemas.openxmlformats.org/officeDocument/2006/relationships" xmlns:p="http://schemas.openxmlformats.org/presentationml/2006/main">
   <p:cSld>
     <p:spTree>
@@ -4634,7 +5380,15 @@
                 </a:pPr>
                 <a:r>
                   <a:rPr/>
-                  <a:t>Explained variance (r2) is calculated the same way as for simple regression:</a:t>
+                  <a:t>Explained variance (r</a:t>
+                </a:r>
+                <a:r>
+                  <a:rPr baseline="30000"/>
+                  <a:t>2</a:t>
+                </a:r>
+                <a:r>
+                  <a:rPr/>
+                  <a:t>) is calculated the same way as for simple regression:</a:t>
                 </a:r>
               </a:p>
               <a:p>
@@ -4838,153 +5592,51 @@
                 <a:pPr lvl="0"/>
                 <a:r>
                   <a:rPr/>
-                  <a:t>r2 values can not be used to directly compare models</a:t>
+                  <a:t>r</a:t>
+                </a:r>
+                <a:r>
+                  <a:rPr baseline="30000"/>
+                  <a:t>2</a:t>
+                </a:r>
+                <a:r>
+                  <a:rPr/>
+                  <a:t> values can not be used to directly compare models</a:t>
                 </a:r>
               </a:p>
               <a:p>
                 <a:pPr lvl="0"/>
                 <a:r>
                   <a:rPr/>
-                  <a:t>r2 values will always increase as predictors added</a:t>
+                  <a:t>r</a:t>
+                </a:r>
+                <a:r>
+                  <a:rPr baseline="30000"/>
+                  <a:t>2</a:t>
+                </a:r>
+                <a:r>
+                  <a:rPr/>
+                  <a:t> values will always increase as predictors added</a:t>
                 </a:r>
               </a:p>
               <a:p>
                 <a:pPr lvl="0"/>
                 <a:r>
                   <a:rPr/>
-                  <a:t>r2 values with different transformation will differ</a:t>
+                  <a:t>r</a:t>
+                </a:r>
+                <a:r>
+                  <a:rPr baseline="30000"/>
+                  <a:t>2</a:t>
+                </a:r>
+                <a:r>
+                  <a:rPr/>
+                  <a:t> values with different transformation will differ</a:t>
                 </a:r>
               </a:p>
             </p:txBody>
           </p:sp>
         </mc:Choice>
       </mc:AlternateContent>
-    </p:spTree>
-  </p:cSld>
-</p:sld>
-</file>
-
-<file path=ppt/slides/slide19.xml><?xml version="1.0" encoding="utf-8"?>
-<p:sld xmlns:a="http://schemas.openxmlformats.org/drawingml/2006/main" xmlns:r="http://schemas.openxmlformats.org/officeDocument/2006/relationships" xmlns:p="http://schemas.openxmlformats.org/presentationml/2006/main">
-  <p:cSld>
-    <p:spTree>
-      <p:nvGrpSpPr>
-        <p:cNvPr id="1" name=""/>
-        <p:cNvGrpSpPr/>
-        <p:nvPr/>
-      </p:nvGrpSpPr>
-      <p:grpSpPr>
-        <a:xfrm>
-          <a:off x="0" y="0"/>
-          <a:ext cx="0" cy="0"/>
-          <a:chOff x="0" y="0"/>
-          <a:chExt cx="0" cy="0"/>
-        </a:xfrm>
-      </p:grpSpPr>
-      <p:sp>
-        <p:nvSpPr>
-          <p:cNvPr id="2" name="Title 1"/>
-          <p:cNvSpPr>
-            <a:spLocks noGrp="1"/>
-          </p:cNvSpPr>
-          <p:nvPr>
-            <p:ph type="title"/>
-          </p:nvPr>
-        </p:nvSpPr>
-        <p:spPr>
-          <a:xfrm>
-            <a:off x="0" y="0"/>
-            <a:ext cx="9144000" cy="602780"/>
-          </a:xfrm>
-          <a:solidFill>
-            <a:srgbClr val="70121D"/>
-          </a:solidFill>
-        </p:spPr>
-        <p:txBody>
-          <a:bodyPr/>
-          <a:lstStyle/>
-          <a:p>
-            <a:pPr lvl="0" indent="0" marL="0">
-              <a:buNone/>
-            </a:pPr>
-            <a:r>
-              <a:rPr b="1"/>
-              <a:t>Lecture 10:</a:t>
-            </a:r>
-            <a:r>
-              <a:rPr/>
-              <a:t> Assumptions and diagnostics</a:t>
-            </a:r>
-          </a:p>
-        </p:txBody>
-      </p:sp>
-      <p:sp>
-        <p:nvSpPr>
-          <p:cNvPr id="3" name="Content Placeholder 2"/>
-          <p:cNvSpPr>
-            <a:spLocks noGrp="1"/>
-          </p:cNvSpPr>
-          <p:nvPr>
-            <p:ph idx="1" sz="half"/>
-          </p:nvPr>
-        </p:nvSpPr>
-        <p:spPr/>
-        <p:txBody>
-          <a:bodyPr/>
-          <a:lstStyle/>
-          <a:p>
-            <a:pPr lvl="0"/>
-            <a:r>
-              <a:rPr/>
-              <a:t>Assume fixed Xs; unrealistic in most biological settings</a:t>
-            </a:r>
-          </a:p>
-          <a:p>
-            <a:pPr lvl="0"/>
-            <a:r>
-              <a:rPr/>
-              <a:t>No major (influential) outliers</a:t>
-            </a:r>
-          </a:p>
-          <a:p>
-            <a:pPr lvl="0"/>
-            <a:r>
-              <a:rPr/>
-              <a:t>Check leverage, influence- Cook’s Di</a:t>
-            </a:r>
-          </a:p>
-        </p:txBody>
-      </p:sp>
-      <p:pic>
-        <p:nvPicPr>
-          <p:cNvPr descr="images/clipboard-2650668640.png" id="0" name="Picture 1"/>
-          <p:cNvPicPr>
-            <a:picLocks noGrp="1" noChangeAspect="1"/>
-          </p:cNvPicPr>
-          <p:nvPr/>
-        </p:nvPicPr>
-        <p:blipFill>
-          <a:blip r:embed="rId2"/>
-          <a:stretch>
-            <a:fillRect/>
-          </a:stretch>
-        </p:blipFill>
-        <p:spPr bwMode="auto">
-          <a:xfrm>
-            <a:off x="6121400" y="1866900"/>
-            <a:ext cx="2781300" cy="2057400"/>
-          </a:xfrm>
-          <a:prstGeom prst="rect">
-            <a:avLst/>
-          </a:prstGeom>
-          <a:noFill/>
-          <a:ln w="9525">
-            <a:noFill/>
-            <a:headEnd/>
-            <a:tailEnd/>
-          </a:ln>
-        </p:spPr>
-      </p:pic>
     </p:spTree>
   </p:cSld>
 </p:sld>
@@ -5081,11 +5733,41 @@
             <a:pPr lvl="0"/>
             <a:r>
               <a:rPr/>
-              <a:t>Model II Regression</a:t>
-            </a:r>
-          </a:p>
-        </p:txBody>
-      </p:sp>
+              <a:t>sum of squared allocation and subdivision from total sums of squares</a:t>
+            </a:r>
+          </a:p>
+        </p:txBody>
+      </p:sp>
+      <p:pic>
+        <p:nvPicPr>
+          <p:cNvPr descr="10_01_lecture_powerpoint_files/figure-pptx/review-plot-1.png" id="0" name="Picture 1"/>
+          <p:cNvPicPr>
+            <a:picLocks noGrp="1" noChangeAspect="1"/>
+          </p:cNvPicPr>
+          <p:nvPr/>
+        </p:nvPicPr>
+        <p:blipFill>
+          <a:blip r:embed="rId2"/>
+          <a:stretch>
+            <a:fillRect/>
+          </a:stretch>
+        </p:blipFill>
+        <p:spPr bwMode="auto">
+          <a:xfrm>
+            <a:off x="6121400" y="1498600"/>
+            <a:ext cx="2781300" cy="2781300"/>
+          </a:xfrm>
+          <a:prstGeom prst="rect">
+            <a:avLst/>
+          </a:prstGeom>
+          <a:noFill/>
+          <a:ln w="9525">
+            <a:noFill/>
+            <a:headEnd/>
+            <a:tailEnd/>
+          </a:ln>
+        </p:spPr>
+      </p:pic>
     </p:spTree>
   </p:cSld>
 </p:sld>
@@ -5120,12 +5802,9 @@
         </p:nvSpPr>
         <p:spPr>
           <a:xfrm>
-            <a:off x="0" y="0"/>
-            <a:ext cx="9144000" cy="602780"/>
+            <a:off x="139485" y="78119"/>
+            <a:ext cx="8229600" cy="607682"/>
           </a:xfrm>
-          <a:solidFill>
-            <a:srgbClr val="70121D"/>
-          </a:solidFill>
         </p:spPr>
         <p:txBody>
           <a:bodyPr/>
@@ -5147,12 +5826,12 @@
       </p:sp>
       <p:sp>
         <p:nvSpPr>
-          <p:cNvPr id="3" name="Content Placeholder 2"/>
-          <p:cNvSpPr>
-            <a:spLocks noGrp="1"/>
-          </p:cNvSpPr>
-          <p:nvPr>
-            <p:ph idx="1" sz="half"/>
+          <p:cNvPr id="3" name="Text Placeholder 2"/>
+          <p:cNvSpPr>
+            <a:spLocks noGrp="1"/>
+          </p:cNvSpPr>
+          <p:nvPr>
+            <p:ph idx="1" type="body"/>
           </p:nvPr>
         </p:nvSpPr>
         <p:spPr/>
@@ -5163,28 +5842,113 @@
             <a:pPr lvl="0"/>
             <a:r>
               <a:rPr/>
-              <a:t>Normality, equal variance, independence</a:t>
+              <a:t>Assume fixed Xs; unrealistic in most biological settings</a:t>
             </a:r>
           </a:p>
           <a:p>
             <a:pPr lvl="0"/>
             <a:r>
               <a:rPr/>
-              <a:t>Residual QQ-plots, residuals vs. predicted values plot</a:t>
+              <a:t>No major (influential) outliers</a:t>
             </a:r>
           </a:p>
           <a:p>
             <a:pPr lvl="0"/>
             <a:r>
               <a:rPr/>
-              <a:t>Distribution/variance often corrected by transforming Y</a:t>
+              <a:t>Check leverage, influence- Cook’s Di</a:t>
+            </a:r>
+          </a:p>
+        </p:txBody>
+      </p:sp>
+      <p:sp>
+        <p:nvSpPr>
+          <p:cNvPr id="5" name="Text Placeholder 4"/>
+          <p:cNvSpPr>
+            <a:spLocks noGrp="1"/>
+          </p:cNvSpPr>
+          <p:nvPr>
+            <p:ph idx="3" sz="quarter" type="body"/>
+          </p:nvPr>
+        </p:nvSpPr>
+        <p:spPr/>
+        <p:txBody>
+          <a:bodyPr/>
+          <a:lstStyle/>
+          <a:p>
+            <a:pPr lvl="0" indent="0">
+              <a:buNone/>
+            </a:pPr>
+            <a:r>
+              <a:rPr>
+                <a:solidFill>
+                  <a:srgbClr val="5E5E5E"/>
+                </a:solidFill>
+                <a:latin typeface="Courier"/>
+              </a:rPr>
+              <a:t># Plot Cook's distance</a:t>
+            </a:r>
+            <a:br/>
+            <a:r>
+              <a:rPr>
+                <a:solidFill>
+                  <a:srgbClr val="4758AB"/>
+                </a:solidFill>
+                <a:latin typeface="Courier"/>
+              </a:rPr>
+              <a:t>plot</a:t>
+            </a:r>
+            <a:r>
+              <a:rPr>
+                <a:solidFill>
+                  <a:srgbClr val="003B4F"/>
+                </a:solidFill>
+                <a:latin typeface="Courier"/>
+              </a:rPr>
+              <a:t>(model, </a:t>
+            </a:r>
+            <a:r>
+              <a:rPr>
+                <a:solidFill>
+                  <a:srgbClr val="657422"/>
+                </a:solidFill>
+                <a:latin typeface="Courier"/>
+              </a:rPr>
+              <a:t>which =</a:t>
+            </a:r>
+            <a:r>
+              <a:rPr>
+                <a:solidFill>
+                  <a:srgbClr val="003B4F"/>
+                </a:solidFill>
+                <a:latin typeface="Courier"/>
+              </a:rPr>
+              <a:t> </a:t>
+            </a:r>
+            <a:r>
+              <a:rPr>
+                <a:solidFill>
+                  <a:srgbClr val="AD0000"/>
+                </a:solidFill>
+                <a:latin typeface="Courier"/>
+              </a:rPr>
+              <a:t>4</a:t>
+            </a:r>
+            <a:r>
+              <a:rPr>
+                <a:solidFill>
+                  <a:srgbClr val="003B4F"/>
+                </a:solidFill>
+                <a:latin typeface="Courier"/>
+              </a:rPr>
+              <a:t>)</a:t>
             </a:r>
           </a:p>
         </p:txBody>
       </p:sp>
       <p:pic>
         <p:nvPicPr>
-          <p:cNvPr descr="images/clipboard-3093948430.png" id="0" name="Picture 1"/>
+          <p:cNvPr descr="10_01_lecture_powerpoint_files/figure-pptx/unnamed-chunk-4-1.png" id="0" name="Picture 1"/>
           <p:cNvPicPr>
             <a:picLocks noGrp="1" noChangeAspect="1"/>
           </p:cNvPicPr>
@@ -5198,8 +5962,8 @@
         </p:blipFill>
         <p:spPr bwMode="auto">
           <a:xfrm>
-            <a:off x="6121400" y="812800"/>
-            <a:ext cx="2781300" cy="4152900"/>
+            <a:off x="4749800" y="1689100"/>
+            <a:ext cx="4038600" cy="2489200"/>
           </a:xfrm>
           <a:prstGeom prst="rect">
             <a:avLst/>
@@ -5247,8 +6011,11 @@
         <p:spPr>
           <a:xfrm>
             <a:off x="0" y="0"/>
-            <a:ext cx="9144000" cy="582780"/>
+            <a:ext cx="9144000" cy="602780"/>
           </a:xfrm>
+          <a:solidFill>
+            <a:srgbClr val="70121D"/>
+          </a:solidFill>
         </p:spPr>
         <p:txBody>
           <a:bodyPr/>
@@ -5275,7 +6042,7 @@
             <a:spLocks noGrp="1"/>
           </p:cNvSpPr>
           <p:nvPr>
-            <p:ph idx="1"/>
+            <p:ph idx="1" sz="half"/>
           </p:nvPr>
         </p:nvSpPr>
         <p:spPr/>
@@ -5283,37 +6050,58 @@
           <a:bodyPr/>
           <a:lstStyle/>
           <a:p>
-            <a:pPr lvl="0" indent="0" marL="0">
-              <a:buNone/>
-            </a:pPr>
-            <a:r>
-              <a:rPr/>
-              <a:t>More observations than predictor variables</a:t>
-            </a:r>
-          </a:p>
-          <a:p>
             <a:pPr lvl="0"/>
             <a:r>
               <a:rPr/>
-              <a:t>Ideally at least 10x observations than predictors to avoid “overfitting”</a:t>
+              <a:t>Normality, equal variance, independence</a:t>
             </a:r>
           </a:p>
           <a:p>
             <a:pPr lvl="0"/>
             <a:r>
               <a:rPr/>
-              <a:t>Uncorrelated predictor variables (assessed using scatterplot matrix; VIFs)</a:t>
+              <a:t>Residual QQ-plots, residuals vs. predicted values plot</a:t>
             </a:r>
           </a:p>
           <a:p>
             <a:pPr lvl="0"/>
             <a:r>
               <a:rPr/>
-              <a:t>Linear relationship between Y and each X, holding others constant (non-linearity assessed by AV plots)</a:t>
-            </a:r>
-          </a:p>
-        </p:txBody>
-      </p:sp>
+              <a:t>Distribution/variance often corrected by transforming Y</a:t>
+            </a:r>
+          </a:p>
+        </p:txBody>
+      </p:sp>
+      <p:pic>
+        <p:nvPicPr>
+          <p:cNvPr descr="10_01_lecture_powerpoint_files/figure-pptx/qq_and_resid-1.png" id="0" name="Picture 1"/>
+          <p:cNvPicPr>
+            <a:picLocks noGrp="1" noChangeAspect="1"/>
+          </p:cNvPicPr>
+          <p:nvPr/>
+        </p:nvPicPr>
+        <p:blipFill>
+          <a:blip r:embed="rId2"/>
+          <a:stretch>
+            <a:fillRect/>
+          </a:stretch>
+        </p:blipFill>
+        <p:spPr bwMode="auto">
+          <a:xfrm>
+            <a:off x="6121400" y="2044700"/>
+            <a:ext cx="2781300" cy="1714500"/>
+          </a:xfrm>
+          <a:prstGeom prst="rect">
+            <a:avLst/>
+          </a:prstGeom>
+          <a:noFill/>
+          <a:ln w="9525">
+            <a:noFill/>
+            <a:headEnd/>
+            <a:tailEnd/>
+          </a:ln>
+        </p:spPr>
+      </p:pic>
     </p:spTree>
   </p:cSld>
 </p:sld>
@@ -5349,11 +6137,8 @@
         <p:spPr>
           <a:xfrm>
             <a:off x="0" y="0"/>
-            <a:ext cx="9144000" cy="602780"/>
+            <a:ext cx="9144000" cy="582780"/>
           </a:xfrm>
-          <a:solidFill>
-            <a:srgbClr val="70121D"/>
-          </a:solidFill>
         </p:spPr>
         <p:txBody>
           <a:bodyPr/>
@@ -5368,7 +6153,7 @@
             </a:r>
             <a:r>
               <a:rPr/>
-              <a:t> Analyses</a:t>
+              <a:t> Assumptions and diagnostics</a:t>
             </a:r>
           </a:p>
         </p:txBody>
@@ -5380,7 +6165,7 @@
             <a:spLocks noGrp="1"/>
           </p:cNvSpPr>
           <p:nvPr>
-            <p:ph idx="1" sz="half"/>
+            <p:ph idx="1"/>
           </p:nvPr>
         </p:nvSpPr>
         <p:spPr/>
@@ -5388,21 +6173,101 @@
           <a:bodyPr/>
           <a:lstStyle/>
           <a:p>
-            <a:pPr lvl="0" indent="0" marL="0">
-              <a:buNone/>
-            </a:pPr>
-            <a:r>
-              <a:rPr/>
-              <a:t>Regression of Y vs. each X does not consider effect of other predictors:</a:t>
-            </a:r>
-          </a:p>
-          <a:p>
-            <a:pPr lvl="0" indent="0" marL="0">
-              <a:buNone/>
-            </a:pPr>
-            <a:r>
-              <a:rPr/>
-              <a:t>want to know shape of relationship while holding other predictors constant</a:t>
+            <a:pPr lvl="0"/>
+            <a:r>
+              <a:rPr b="1"/>
+              <a:t>More observations than predictor variables</a:t>
+            </a:r>
+          </a:p>
+          <a:p>
+            <a:pPr lvl="1"/>
+            <a:r>
+              <a:rPr/>
+              <a:t>Ideally </a:t>
+            </a:r>
+            <a:r>
+              <a:rPr b="1"/>
+              <a:t>at least 10x observations than predictors</a:t>
+            </a:r>
+            <a:r>
+              <a:rPr/>
+              <a:t> to avoid “overfitting” </a:t>
+            </a:r>
+            <a:r>
+              <a:rPr b="1"/>
+              <a:t>10:1</a:t>
+            </a:r>
+          </a:p>
+          <a:p>
+            <a:pPr lvl="2"/>
+            <a:r>
+              <a:rPr/>
+              <a:t>2 predictors = 20 observations!!!</a:t>
+            </a:r>
+          </a:p>
+          <a:p>
+            <a:pPr lvl="0"/>
+            <a:r>
+              <a:rPr b="1"/>
+              <a:t>No colinearity</a:t>
+            </a:r>
+          </a:p>
+          <a:p>
+            <a:pPr lvl="1"/>
+            <a:r>
+              <a:rPr b="1"/>
+              <a:t>Need Uncorrelated predictor variables (assessed using scatterplot matrix; VIFs)</a:t>
+            </a:r>
+          </a:p>
+          <a:p>
+            <a:pPr lvl="0"/>
+            <a:r>
+              <a:rPr b="1"/>
+              <a:t>Each X has linear relationship with Y after accounting for other predictors</a:t>
+            </a:r>
+          </a:p>
+          <a:p>
+            <a:pPr lvl="1"/>
+            <a:r>
+              <a:rPr b="1"/>
+              <a:t>Added Variable (AV) plots</a:t>
+            </a:r>
+            <a:r>
+              <a:rPr/>
+              <a:t> (also called partial regression plots)</a:t>
+            </a:r>
+          </a:p>
+          <a:p>
+            <a:pPr lvl="2"/>
+            <a:r>
+              <a:rPr/>
+              <a:t>These show the relationship between Y and X₁ after removing the linear effects of all other predictors</a:t>
+            </a:r>
+          </a:p>
+          <a:p>
+            <a:pPr lvl="2"/>
+            <a:r>
+              <a:rPr/>
+              <a:t>Create AV plots for all predictors - </a:t>
+            </a:r>
+            <a:r>
+              <a:rPr>
+                <a:latin typeface="Courier"/>
+              </a:rPr>
+              <a:t>avPlots(model)</a:t>
+            </a:r>
+          </a:p>
+          <a:p>
+            <a:pPr lvl="2"/>
+            <a:r>
+              <a:rPr/>
+              <a:t>Or for just one predictor - </a:t>
+            </a:r>
+            <a:r>
+              <a:rPr>
+                <a:latin typeface="Courier"/>
+              </a:rPr>
+              <a:t>avPlot(model, variable = "proportion_black")</a:t>
             </a:r>
           </a:p>
         </p:txBody>
@@ -5441,8 +6306,8 @@
         </p:nvSpPr>
         <p:spPr>
           <a:xfrm>
-            <a:off x="0" y="0"/>
-            <a:ext cx="9144000" cy="871538"/>
+            <a:off x="139485" y="78119"/>
+            <a:ext cx="8229600" cy="607682"/>
           </a:xfrm>
         </p:spPr>
         <p:txBody>
@@ -5458,19 +6323,19 @@
             </a:r>
             <a:r>
               <a:rPr/>
-              <a:t> Collinearity</a:t>
-            </a:r>
-          </a:p>
-        </p:txBody>
-      </p:sp>
-      <p:sp>
-        <p:nvSpPr>
-          <p:cNvPr id="4" name="Text Placeholder 3"/>
-          <p:cNvSpPr>
-            <a:spLocks noGrp="1"/>
-          </p:cNvSpPr>
-          <p:nvPr>
-            <p:ph idx="2" sz="half" type="body"/>
+              <a:t> Analyses</a:t>
+            </a:r>
+          </a:p>
+        </p:txBody>
+      </p:sp>
+      <p:sp>
+        <p:nvSpPr>
+          <p:cNvPr id="3" name="Text Placeholder 2"/>
+          <p:cNvSpPr>
+            <a:spLocks noGrp="1"/>
+          </p:cNvSpPr>
+          <p:nvPr>
+            <p:ph idx="1" type="body"/>
           </p:nvPr>
         </p:nvSpPr>
         <p:spPr/>
@@ -5478,38 +6343,1133 @@
           <a:bodyPr/>
           <a:lstStyle/>
           <a:p>
-            <a:pPr lvl="0"/>
-            <a:r>
-              <a:rPr/>
-              <a:t>Potential predictor variables are often correlated (e.g., morphometrics, nutrients, climatic parameters)</a:t>
-            </a:r>
-          </a:p>
-          <a:p>
-            <a:pPr lvl="0"/>
-            <a:r>
-              <a:rPr/>
-              <a:t>Multicollinearity (strong correlation between predictors) causes problems for parameter estimates</a:t>
-            </a:r>
-          </a:p>
-          <a:p>
-            <a:pPr lvl="0"/>
-            <a:r>
-              <a:rPr/>
-              <a:t>Severe collinearity causes unstable parameter estimates: small change in a single value can result in large changes in βp - estimates</a:t>
-            </a:r>
-          </a:p>
-          <a:p>
-            <a:pPr lvl="0"/>
-            <a:r>
-              <a:rPr/>
-              <a:t>Inflates partial slope error estimates, loss of power</a:t>
+            <a:pPr lvl="0" indent="0" marL="0">
+              <a:buNone/>
+            </a:pPr>
+            <a:r>
+              <a:rPr/>
+              <a:t>Regression of Y vs. each X does not consider effect of other predictors:</a:t>
+            </a:r>
+          </a:p>
+          <a:p>
+            <a:pPr lvl="0" indent="0" marL="0">
+              <a:buNone/>
+            </a:pPr>
+            <a:r>
+              <a:rPr/>
+              <a:t>want to know shape of relationship while holding other predictors constant</a:t>
+            </a:r>
+          </a:p>
+        </p:txBody>
+      </p:sp>
+      <p:sp>
+        <p:nvSpPr>
+          <p:cNvPr id="5" name="Text Placeholder 4"/>
+          <p:cNvSpPr>
+            <a:spLocks noGrp="1"/>
+          </p:cNvSpPr>
+          <p:nvPr>
+            <p:ph idx="3" sz="quarter" type="body"/>
+          </p:nvPr>
+        </p:nvSpPr>
+        <p:spPr/>
+        <p:txBody>
+          <a:bodyPr/>
+          <a:lstStyle/>
+          <a:p>
+            <a:pPr lvl="0" indent="0">
+              <a:buNone/>
+            </a:pPr>
+            <a:r>
+              <a:rPr>
+                <a:solidFill>
+                  <a:srgbClr val="5E5E5E"/>
+                </a:solidFill>
+                <a:latin typeface="Courier"/>
+              </a:rPr>
+              <a:t>#| echo: false</a:t>
+            </a:r>
+            <a:br/>
+            <a:r>
+              <a:rPr>
+                <a:solidFill>
+                  <a:srgbClr val="5E5E5E"/>
+                </a:solidFill>
+                <a:latin typeface="Courier"/>
+              </a:rPr>
+              <a:t>#| message: false</a:t>
+            </a:r>
+            <a:br/>
+            <a:r>
+              <a:rPr>
+                <a:solidFill>
+                  <a:srgbClr val="5E5E5E"/>
+                </a:solidFill>
+                <a:latin typeface="Courier"/>
+              </a:rPr>
+              <a:t>#| warning: false</a:t>
+            </a:r>
+            <a:br/>
+            <a:r>
+              <a:rPr>
+                <a:solidFill>
+                  <a:srgbClr val="5E5E5E"/>
+                </a:solidFill>
+                <a:latin typeface="Courier"/>
+              </a:rPr>
+              <a:t>#| paged-print: false</a:t>
+            </a:r>
+            <a:br/>
+            <a:r>
+              <a:rPr>
+                <a:solidFill>
+                  <a:srgbClr val="5E5E5E"/>
+                </a:solidFill>
+                <a:latin typeface="Courier"/>
+              </a:rPr>
+              <a:t># Plot 1: Ant species vs Elevation</a:t>
+            </a:r>
+            <a:br/>
+            <a:r>
+              <a:rPr>
+                <a:solidFill>
+                  <a:srgbClr val="003B4F"/>
+                </a:solidFill>
+                <a:latin typeface="Courier"/>
+              </a:rPr>
+              <a:t>p1 &lt;- </a:t>
+            </a:r>
+            <a:r>
+              <a:rPr>
+                <a:solidFill>
+                  <a:srgbClr val="4758AB"/>
+                </a:solidFill>
+                <a:latin typeface="Courier"/>
+              </a:rPr>
+              <a:t>ggplot</a:t>
+            </a:r>
+            <a:r>
+              <a:rPr>
+                <a:solidFill>
+                  <a:srgbClr val="003B4F"/>
+                </a:solidFill>
+                <a:latin typeface="Courier"/>
+              </a:rPr>
+              <a:t>(ant_df, </a:t>
+            </a:r>
+            <a:r>
+              <a:rPr>
+                <a:solidFill>
+                  <a:srgbClr val="4758AB"/>
+                </a:solidFill>
+                <a:latin typeface="Courier"/>
+              </a:rPr>
+              <a:t>aes</a:t>
+            </a:r>
+            <a:r>
+              <a:rPr>
+                <a:solidFill>
+                  <a:srgbClr val="003B4F"/>
+                </a:solidFill>
+                <a:latin typeface="Courier"/>
+              </a:rPr>
+              <a:t>(</a:t>
+            </a:r>
+            <a:r>
+              <a:rPr>
+                <a:solidFill>
+                  <a:srgbClr val="657422"/>
+                </a:solidFill>
+                <a:latin typeface="Courier"/>
+              </a:rPr>
+              <a:t>x =</a:t>
+            </a:r>
+            <a:r>
+              <a:rPr>
+                <a:solidFill>
+                  <a:srgbClr val="003B4F"/>
+                </a:solidFill>
+                <a:latin typeface="Courier"/>
+              </a:rPr>
+              <a:t> elevation, </a:t>
+            </a:r>
+            <a:r>
+              <a:rPr>
+                <a:solidFill>
+                  <a:srgbClr val="657422"/>
+                </a:solidFill>
+                <a:latin typeface="Courier"/>
+              </a:rPr>
+              <a:t>y =</a:t>
+            </a:r>
+            <a:r>
+              <a:rPr>
+                <a:solidFill>
+                  <a:srgbClr val="003B4F"/>
+                </a:solidFill>
+                <a:latin typeface="Courier"/>
+              </a:rPr>
+              <a:t> ant_spp)) </a:t>
+            </a:r>
+            <a:r>
+              <a:rPr>
+                <a:solidFill>
+                  <a:srgbClr val="5E5E5E"/>
+                </a:solidFill>
+                <a:latin typeface="Courier"/>
+              </a:rPr>
+              <a:t>+</a:t>
+            </a:r>
+            <a:br/>
+            <a:r>
+              <a:rPr>
+                <a:solidFill>
+                  <a:srgbClr val="003B4F"/>
+                </a:solidFill>
+                <a:latin typeface="Courier"/>
+              </a:rPr>
+              <a:t>  </a:t>
+            </a:r>
+            <a:r>
+              <a:rPr>
+                <a:solidFill>
+                  <a:srgbClr val="4758AB"/>
+                </a:solidFill>
+                <a:latin typeface="Courier"/>
+              </a:rPr>
+              <a:t>geom_point</a:t>
+            </a:r>
+            <a:r>
+              <a:rPr>
+                <a:solidFill>
+                  <a:srgbClr val="003B4F"/>
+                </a:solidFill>
+                <a:latin typeface="Courier"/>
+              </a:rPr>
+              <a:t>(</a:t>
+            </a:r>
+            <a:r>
+              <a:rPr>
+                <a:solidFill>
+                  <a:srgbClr val="657422"/>
+                </a:solidFill>
+                <a:latin typeface="Courier"/>
+              </a:rPr>
+              <a:t>size =</a:t>
+            </a:r>
+            <a:r>
+              <a:rPr>
+                <a:solidFill>
+                  <a:srgbClr val="003B4F"/>
+                </a:solidFill>
+                <a:latin typeface="Courier"/>
+              </a:rPr>
+              <a:t> </a:t>
+            </a:r>
+            <a:r>
+              <a:rPr>
+                <a:solidFill>
+                  <a:srgbClr val="AD0000"/>
+                </a:solidFill>
+                <a:latin typeface="Courier"/>
+              </a:rPr>
+              <a:t>3</a:t>
+            </a:r>
+            <a:r>
+              <a:rPr>
+                <a:solidFill>
+                  <a:srgbClr val="003B4F"/>
+                </a:solidFill>
+                <a:latin typeface="Courier"/>
+              </a:rPr>
+              <a:t>, </a:t>
+            </a:r>
+            <a:r>
+              <a:rPr>
+                <a:solidFill>
+                  <a:srgbClr val="657422"/>
+                </a:solidFill>
+                <a:latin typeface="Courier"/>
+              </a:rPr>
+              <a:t>color =</a:t>
+            </a:r>
+            <a:r>
+              <a:rPr>
+                <a:solidFill>
+                  <a:srgbClr val="003B4F"/>
+                </a:solidFill>
+                <a:latin typeface="Courier"/>
+              </a:rPr>
+              <a:t> </a:t>
+            </a:r>
+            <a:r>
+              <a:rPr>
+                <a:solidFill>
+                  <a:srgbClr val="20794D"/>
+                </a:solidFill>
+                <a:latin typeface="Courier"/>
+              </a:rPr>
+              <a:t>"steelblue"</a:t>
+            </a:r>
+            <a:r>
+              <a:rPr>
+                <a:solidFill>
+                  <a:srgbClr val="003B4F"/>
+                </a:solidFill>
+                <a:latin typeface="Courier"/>
+              </a:rPr>
+              <a:t>) </a:t>
+            </a:r>
+            <a:r>
+              <a:rPr>
+                <a:solidFill>
+                  <a:srgbClr val="5E5E5E"/>
+                </a:solidFill>
+                <a:latin typeface="Courier"/>
+              </a:rPr>
+              <a:t>+</a:t>
+            </a:r>
+            <a:br/>
+            <a:r>
+              <a:rPr>
+                <a:solidFill>
+                  <a:srgbClr val="003B4F"/>
+                </a:solidFill>
+                <a:latin typeface="Courier"/>
+              </a:rPr>
+              <a:t>  </a:t>
+            </a:r>
+            <a:r>
+              <a:rPr>
+                <a:solidFill>
+                  <a:srgbClr val="4758AB"/>
+                </a:solidFill>
+                <a:latin typeface="Courier"/>
+              </a:rPr>
+              <a:t>geom_smooth</a:t>
+            </a:r>
+            <a:r>
+              <a:rPr>
+                <a:solidFill>
+                  <a:srgbClr val="003B4F"/>
+                </a:solidFill>
+                <a:latin typeface="Courier"/>
+              </a:rPr>
+              <a:t>(</a:t>
+            </a:r>
+            <a:r>
+              <a:rPr>
+                <a:solidFill>
+                  <a:srgbClr val="657422"/>
+                </a:solidFill>
+                <a:latin typeface="Courier"/>
+              </a:rPr>
+              <a:t>method =</a:t>
+            </a:r>
+            <a:r>
+              <a:rPr>
+                <a:solidFill>
+                  <a:srgbClr val="003B4F"/>
+                </a:solidFill>
+                <a:latin typeface="Courier"/>
+              </a:rPr>
+              <a:t> </a:t>
+            </a:r>
+            <a:r>
+              <a:rPr>
+                <a:solidFill>
+                  <a:srgbClr val="20794D"/>
+                </a:solidFill>
+                <a:latin typeface="Courier"/>
+              </a:rPr>
+              <a:t>"lm"</a:t>
+            </a:r>
+            <a:r>
+              <a:rPr>
+                <a:solidFill>
+                  <a:srgbClr val="003B4F"/>
+                </a:solidFill>
+                <a:latin typeface="Courier"/>
+              </a:rPr>
+              <a:t>, </a:t>
+            </a:r>
+            <a:r>
+              <a:rPr>
+                <a:solidFill>
+                  <a:srgbClr val="657422"/>
+                </a:solidFill>
+                <a:latin typeface="Courier"/>
+              </a:rPr>
+              <a:t>se =</a:t>
+            </a:r>
+            <a:r>
+              <a:rPr>
+                <a:solidFill>
+                  <a:srgbClr val="003B4F"/>
+                </a:solidFill>
+                <a:latin typeface="Courier"/>
+              </a:rPr>
+              <a:t> </a:t>
+            </a:r>
+            <a:r>
+              <a:rPr>
+                <a:solidFill>
+                  <a:srgbClr val="8F5902"/>
+                </a:solidFill>
+                <a:latin typeface="Courier"/>
+              </a:rPr>
+              <a:t>TRUE</a:t>
+            </a:r>
+            <a:r>
+              <a:rPr>
+                <a:solidFill>
+                  <a:srgbClr val="003B4F"/>
+                </a:solidFill>
+                <a:latin typeface="Courier"/>
+              </a:rPr>
+              <a:t>, </a:t>
+            </a:r>
+            <a:r>
+              <a:rPr>
+                <a:solidFill>
+                  <a:srgbClr val="657422"/>
+                </a:solidFill>
+                <a:latin typeface="Courier"/>
+              </a:rPr>
+              <a:t>color =</a:t>
+            </a:r>
+            <a:r>
+              <a:rPr>
+                <a:solidFill>
+                  <a:srgbClr val="003B4F"/>
+                </a:solidFill>
+                <a:latin typeface="Courier"/>
+              </a:rPr>
+              <a:t> </a:t>
+            </a:r>
+            <a:r>
+              <a:rPr>
+                <a:solidFill>
+                  <a:srgbClr val="20794D"/>
+                </a:solidFill>
+                <a:latin typeface="Courier"/>
+              </a:rPr>
+              <a:t>"red"</a:t>
+            </a:r>
+            <a:r>
+              <a:rPr>
+                <a:solidFill>
+                  <a:srgbClr val="003B4F"/>
+                </a:solidFill>
+                <a:latin typeface="Courier"/>
+              </a:rPr>
+              <a:t>) </a:t>
+            </a:r>
+            <a:r>
+              <a:rPr>
+                <a:solidFill>
+                  <a:srgbClr val="5E5E5E"/>
+                </a:solidFill>
+                <a:latin typeface="Courier"/>
+              </a:rPr>
+              <a:t>+</a:t>
+            </a:r>
+            <a:br/>
+            <a:r>
+              <a:rPr>
+                <a:solidFill>
+                  <a:srgbClr val="003B4F"/>
+                </a:solidFill>
+                <a:latin typeface="Courier"/>
+              </a:rPr>
+              <a:t>  </a:t>
+            </a:r>
+            <a:r>
+              <a:rPr>
+                <a:solidFill>
+                  <a:srgbClr val="4758AB"/>
+                </a:solidFill>
+                <a:latin typeface="Courier"/>
+              </a:rPr>
+              <a:t>labs</a:t>
+            </a:r>
+            <a:r>
+              <a:rPr>
+                <a:solidFill>
+                  <a:srgbClr val="003B4F"/>
+                </a:solidFill>
+                <a:latin typeface="Courier"/>
+              </a:rPr>
+              <a:t>(</a:t>
+            </a:r>
+            <a:r>
+              <a:rPr>
+                <a:solidFill>
+                  <a:srgbClr val="657422"/>
+                </a:solidFill>
+                <a:latin typeface="Courier"/>
+              </a:rPr>
+              <a:t>x =</a:t>
+            </a:r>
+            <a:r>
+              <a:rPr>
+                <a:solidFill>
+                  <a:srgbClr val="003B4F"/>
+                </a:solidFill>
+                <a:latin typeface="Courier"/>
+              </a:rPr>
+              <a:t> </a:t>
+            </a:r>
+            <a:r>
+              <a:rPr>
+                <a:solidFill>
+                  <a:srgbClr val="20794D"/>
+                </a:solidFill>
+                <a:latin typeface="Courier"/>
+              </a:rPr>
+              <a:t>"Elevation (m)"</a:t>
+            </a:r>
+            <a:r>
+              <a:rPr>
+                <a:solidFill>
+                  <a:srgbClr val="003B4F"/>
+                </a:solidFill>
+                <a:latin typeface="Courier"/>
+              </a:rPr>
+              <a:t>, </a:t>
+            </a:r>
+            <a:br/>
+            <a:r>
+              <a:rPr>
+                <a:solidFill>
+                  <a:srgbClr val="003B4F"/>
+                </a:solidFill>
+                <a:latin typeface="Courier"/>
+              </a:rPr>
+              <a:t>       </a:t>
+            </a:r>
+            <a:r>
+              <a:rPr>
+                <a:solidFill>
+                  <a:srgbClr val="657422"/>
+                </a:solidFill>
+                <a:latin typeface="Courier"/>
+              </a:rPr>
+              <a:t>y =</a:t>
+            </a:r>
+            <a:r>
+              <a:rPr>
+                <a:solidFill>
+                  <a:srgbClr val="003B4F"/>
+                </a:solidFill>
+                <a:latin typeface="Courier"/>
+              </a:rPr>
+              <a:t> </a:t>
+            </a:r>
+            <a:r>
+              <a:rPr>
+                <a:solidFill>
+                  <a:srgbClr val="20794D"/>
+                </a:solidFill>
+                <a:latin typeface="Courier"/>
+              </a:rPr>
+              <a:t>"Ant Species Richness"</a:t>
+            </a:r>
+            <a:r>
+              <a:rPr>
+                <a:solidFill>
+                  <a:srgbClr val="003B4F"/>
+                </a:solidFill>
+                <a:latin typeface="Courier"/>
+              </a:rPr>
+              <a:t>) </a:t>
+            </a:r>
+            <a:r>
+              <a:rPr>
+                <a:solidFill>
+                  <a:srgbClr val="5E5E5E"/>
+                </a:solidFill>
+                <a:latin typeface="Courier"/>
+              </a:rPr>
+              <a:t>+</a:t>
+            </a:r>
+            <a:br/>
+            <a:r>
+              <a:rPr>
+                <a:solidFill>
+                  <a:srgbClr val="003B4F"/>
+                </a:solidFill>
+                <a:latin typeface="Courier"/>
+              </a:rPr>
+              <a:t>  </a:t>
+            </a:r>
+            <a:r>
+              <a:rPr>
+                <a:solidFill>
+                  <a:srgbClr val="4758AB"/>
+                </a:solidFill>
+                <a:latin typeface="Courier"/>
+              </a:rPr>
+              <a:t>theme_minimal</a:t>
+            </a:r>
+            <a:r>
+              <a:rPr>
+                <a:solidFill>
+                  <a:srgbClr val="003B4F"/>
+                </a:solidFill>
+                <a:latin typeface="Courier"/>
+              </a:rPr>
+              <a:t>()</a:t>
+            </a:r>
+            <a:br/>
+            <a:br/>
+            <a:r>
+              <a:rPr>
+                <a:solidFill>
+                  <a:srgbClr val="5E5E5E"/>
+                </a:solidFill>
+                <a:latin typeface="Courier"/>
+              </a:rPr>
+              <a:t># Plot 2: Ant species vs Latitude</a:t>
+            </a:r>
+            <a:br/>
+            <a:r>
+              <a:rPr>
+                <a:solidFill>
+                  <a:srgbClr val="003B4F"/>
+                </a:solidFill>
+                <a:latin typeface="Courier"/>
+              </a:rPr>
+              <a:t>p2 &lt;- </a:t>
+            </a:r>
+            <a:r>
+              <a:rPr>
+                <a:solidFill>
+                  <a:srgbClr val="4758AB"/>
+                </a:solidFill>
+                <a:latin typeface="Courier"/>
+              </a:rPr>
+              <a:t>ggplot</a:t>
+            </a:r>
+            <a:r>
+              <a:rPr>
+                <a:solidFill>
+                  <a:srgbClr val="003B4F"/>
+                </a:solidFill>
+                <a:latin typeface="Courier"/>
+              </a:rPr>
+              <a:t>(ant_df, </a:t>
+            </a:r>
+            <a:r>
+              <a:rPr>
+                <a:solidFill>
+                  <a:srgbClr val="4758AB"/>
+                </a:solidFill>
+                <a:latin typeface="Courier"/>
+              </a:rPr>
+              <a:t>aes</a:t>
+            </a:r>
+            <a:r>
+              <a:rPr>
+                <a:solidFill>
+                  <a:srgbClr val="003B4F"/>
+                </a:solidFill>
+                <a:latin typeface="Courier"/>
+              </a:rPr>
+              <a:t>(</a:t>
+            </a:r>
+            <a:r>
+              <a:rPr>
+                <a:solidFill>
+                  <a:srgbClr val="657422"/>
+                </a:solidFill>
+                <a:latin typeface="Courier"/>
+              </a:rPr>
+              <a:t>x =</a:t>
+            </a:r>
+            <a:r>
+              <a:rPr>
+                <a:solidFill>
+                  <a:srgbClr val="003B4F"/>
+                </a:solidFill>
+                <a:latin typeface="Courier"/>
+              </a:rPr>
+              <a:t> latitude, </a:t>
+            </a:r>
+            <a:r>
+              <a:rPr>
+                <a:solidFill>
+                  <a:srgbClr val="657422"/>
+                </a:solidFill>
+                <a:latin typeface="Courier"/>
+              </a:rPr>
+              <a:t>y =</a:t>
+            </a:r>
+            <a:r>
+              <a:rPr>
+                <a:solidFill>
+                  <a:srgbClr val="003B4F"/>
+                </a:solidFill>
+                <a:latin typeface="Courier"/>
+              </a:rPr>
+              <a:t> ant_spp)) </a:t>
+            </a:r>
+            <a:r>
+              <a:rPr>
+                <a:solidFill>
+                  <a:srgbClr val="5E5E5E"/>
+                </a:solidFill>
+                <a:latin typeface="Courier"/>
+              </a:rPr>
+              <a:t>+</a:t>
+            </a:r>
+            <a:br/>
+            <a:r>
+              <a:rPr>
+                <a:solidFill>
+                  <a:srgbClr val="003B4F"/>
+                </a:solidFill>
+                <a:latin typeface="Courier"/>
+              </a:rPr>
+              <a:t>  </a:t>
+            </a:r>
+            <a:r>
+              <a:rPr>
+                <a:solidFill>
+                  <a:srgbClr val="4758AB"/>
+                </a:solidFill>
+                <a:latin typeface="Courier"/>
+              </a:rPr>
+              <a:t>geom_point</a:t>
+            </a:r>
+            <a:r>
+              <a:rPr>
+                <a:solidFill>
+                  <a:srgbClr val="003B4F"/>
+                </a:solidFill>
+                <a:latin typeface="Courier"/>
+              </a:rPr>
+              <a:t>(</a:t>
+            </a:r>
+            <a:r>
+              <a:rPr>
+                <a:solidFill>
+                  <a:srgbClr val="657422"/>
+                </a:solidFill>
+                <a:latin typeface="Courier"/>
+              </a:rPr>
+              <a:t>size =</a:t>
+            </a:r>
+            <a:r>
+              <a:rPr>
+                <a:solidFill>
+                  <a:srgbClr val="003B4F"/>
+                </a:solidFill>
+                <a:latin typeface="Courier"/>
+              </a:rPr>
+              <a:t> </a:t>
+            </a:r>
+            <a:r>
+              <a:rPr>
+                <a:solidFill>
+                  <a:srgbClr val="AD0000"/>
+                </a:solidFill>
+                <a:latin typeface="Courier"/>
+              </a:rPr>
+              <a:t>3</a:t>
+            </a:r>
+            <a:r>
+              <a:rPr>
+                <a:solidFill>
+                  <a:srgbClr val="003B4F"/>
+                </a:solidFill>
+                <a:latin typeface="Courier"/>
+              </a:rPr>
+              <a:t>, </a:t>
+            </a:r>
+            <a:r>
+              <a:rPr>
+                <a:solidFill>
+                  <a:srgbClr val="657422"/>
+                </a:solidFill>
+                <a:latin typeface="Courier"/>
+              </a:rPr>
+              <a:t>color =</a:t>
+            </a:r>
+            <a:r>
+              <a:rPr>
+                <a:solidFill>
+                  <a:srgbClr val="003B4F"/>
+                </a:solidFill>
+                <a:latin typeface="Courier"/>
+              </a:rPr>
+              <a:t> </a:t>
+            </a:r>
+            <a:r>
+              <a:rPr>
+                <a:solidFill>
+                  <a:srgbClr val="20794D"/>
+                </a:solidFill>
+                <a:latin typeface="Courier"/>
+              </a:rPr>
+              <a:t>"steelblue"</a:t>
+            </a:r>
+            <a:r>
+              <a:rPr>
+                <a:solidFill>
+                  <a:srgbClr val="003B4F"/>
+                </a:solidFill>
+                <a:latin typeface="Courier"/>
+              </a:rPr>
+              <a:t>) </a:t>
+            </a:r>
+            <a:r>
+              <a:rPr>
+                <a:solidFill>
+                  <a:srgbClr val="5E5E5E"/>
+                </a:solidFill>
+                <a:latin typeface="Courier"/>
+              </a:rPr>
+              <a:t>+</a:t>
+            </a:r>
+            <a:br/>
+            <a:r>
+              <a:rPr>
+                <a:solidFill>
+                  <a:srgbClr val="003B4F"/>
+                </a:solidFill>
+                <a:latin typeface="Courier"/>
+              </a:rPr>
+              <a:t>  </a:t>
+            </a:r>
+            <a:r>
+              <a:rPr>
+                <a:solidFill>
+                  <a:srgbClr val="4758AB"/>
+                </a:solidFill>
+                <a:latin typeface="Courier"/>
+              </a:rPr>
+              <a:t>geom_smooth</a:t>
+            </a:r>
+            <a:r>
+              <a:rPr>
+                <a:solidFill>
+                  <a:srgbClr val="003B4F"/>
+                </a:solidFill>
+                <a:latin typeface="Courier"/>
+              </a:rPr>
+              <a:t>(</a:t>
+            </a:r>
+            <a:r>
+              <a:rPr>
+                <a:solidFill>
+                  <a:srgbClr val="657422"/>
+                </a:solidFill>
+                <a:latin typeface="Courier"/>
+              </a:rPr>
+              <a:t>method =</a:t>
+            </a:r>
+            <a:r>
+              <a:rPr>
+                <a:solidFill>
+                  <a:srgbClr val="003B4F"/>
+                </a:solidFill>
+                <a:latin typeface="Courier"/>
+              </a:rPr>
+              <a:t> </a:t>
+            </a:r>
+            <a:r>
+              <a:rPr>
+                <a:solidFill>
+                  <a:srgbClr val="20794D"/>
+                </a:solidFill>
+                <a:latin typeface="Courier"/>
+              </a:rPr>
+              <a:t>"lm"</a:t>
+            </a:r>
+            <a:r>
+              <a:rPr>
+                <a:solidFill>
+                  <a:srgbClr val="003B4F"/>
+                </a:solidFill>
+                <a:latin typeface="Courier"/>
+              </a:rPr>
+              <a:t>, </a:t>
+            </a:r>
+            <a:r>
+              <a:rPr>
+                <a:solidFill>
+                  <a:srgbClr val="657422"/>
+                </a:solidFill>
+                <a:latin typeface="Courier"/>
+              </a:rPr>
+              <a:t>se =</a:t>
+            </a:r>
+            <a:r>
+              <a:rPr>
+                <a:solidFill>
+                  <a:srgbClr val="003B4F"/>
+                </a:solidFill>
+                <a:latin typeface="Courier"/>
+              </a:rPr>
+              <a:t> </a:t>
+            </a:r>
+            <a:r>
+              <a:rPr>
+                <a:solidFill>
+                  <a:srgbClr val="8F5902"/>
+                </a:solidFill>
+                <a:latin typeface="Courier"/>
+              </a:rPr>
+              <a:t>TRUE</a:t>
+            </a:r>
+            <a:r>
+              <a:rPr>
+                <a:solidFill>
+                  <a:srgbClr val="003B4F"/>
+                </a:solidFill>
+                <a:latin typeface="Courier"/>
+              </a:rPr>
+              <a:t>, </a:t>
+            </a:r>
+            <a:r>
+              <a:rPr>
+                <a:solidFill>
+                  <a:srgbClr val="657422"/>
+                </a:solidFill>
+                <a:latin typeface="Courier"/>
+              </a:rPr>
+              <a:t>color =</a:t>
+            </a:r>
+            <a:r>
+              <a:rPr>
+                <a:solidFill>
+                  <a:srgbClr val="003B4F"/>
+                </a:solidFill>
+                <a:latin typeface="Courier"/>
+              </a:rPr>
+              <a:t> </a:t>
+            </a:r>
+            <a:r>
+              <a:rPr>
+                <a:solidFill>
+                  <a:srgbClr val="20794D"/>
+                </a:solidFill>
+                <a:latin typeface="Courier"/>
+              </a:rPr>
+              <a:t>"red"</a:t>
+            </a:r>
+            <a:r>
+              <a:rPr>
+                <a:solidFill>
+                  <a:srgbClr val="003B4F"/>
+                </a:solidFill>
+                <a:latin typeface="Courier"/>
+              </a:rPr>
+              <a:t>) </a:t>
+            </a:r>
+            <a:r>
+              <a:rPr>
+                <a:solidFill>
+                  <a:srgbClr val="5E5E5E"/>
+                </a:solidFill>
+                <a:latin typeface="Courier"/>
+              </a:rPr>
+              <a:t>+</a:t>
+            </a:r>
+            <a:br/>
+            <a:r>
+              <a:rPr>
+                <a:solidFill>
+                  <a:srgbClr val="003B4F"/>
+                </a:solidFill>
+                <a:latin typeface="Courier"/>
+              </a:rPr>
+              <a:t>  </a:t>
+            </a:r>
+            <a:r>
+              <a:rPr>
+                <a:solidFill>
+                  <a:srgbClr val="4758AB"/>
+                </a:solidFill>
+                <a:latin typeface="Courier"/>
+              </a:rPr>
+              <a:t>labs</a:t>
+            </a:r>
+            <a:r>
+              <a:rPr>
+                <a:solidFill>
+                  <a:srgbClr val="003B4F"/>
+                </a:solidFill>
+                <a:latin typeface="Courier"/>
+              </a:rPr>
+              <a:t>(</a:t>
+            </a:r>
+            <a:r>
+              <a:rPr>
+                <a:solidFill>
+                  <a:srgbClr val="657422"/>
+                </a:solidFill>
+                <a:latin typeface="Courier"/>
+              </a:rPr>
+              <a:t>x =</a:t>
+            </a:r>
+            <a:r>
+              <a:rPr>
+                <a:solidFill>
+                  <a:srgbClr val="003B4F"/>
+                </a:solidFill>
+                <a:latin typeface="Courier"/>
+              </a:rPr>
+              <a:t> </a:t>
+            </a:r>
+            <a:r>
+              <a:rPr>
+                <a:solidFill>
+                  <a:srgbClr val="20794D"/>
+                </a:solidFill>
+                <a:latin typeface="Courier"/>
+              </a:rPr>
+              <a:t>"Latitude (degrees)"</a:t>
+            </a:r>
+            <a:r>
+              <a:rPr>
+                <a:solidFill>
+                  <a:srgbClr val="003B4F"/>
+                </a:solidFill>
+                <a:latin typeface="Courier"/>
+              </a:rPr>
+              <a:t>, </a:t>
+            </a:r>
+            <a:br/>
+            <a:r>
+              <a:rPr>
+                <a:solidFill>
+                  <a:srgbClr val="003B4F"/>
+                </a:solidFill>
+                <a:latin typeface="Courier"/>
+              </a:rPr>
+              <a:t>       </a:t>
+            </a:r>
+            <a:r>
+              <a:rPr>
+                <a:solidFill>
+                  <a:srgbClr val="657422"/>
+                </a:solidFill>
+                <a:latin typeface="Courier"/>
+              </a:rPr>
+              <a:t>y =</a:t>
+            </a:r>
+            <a:r>
+              <a:rPr>
+                <a:solidFill>
+                  <a:srgbClr val="003B4F"/>
+                </a:solidFill>
+                <a:latin typeface="Courier"/>
+              </a:rPr>
+              <a:t> </a:t>
+            </a:r>
+            <a:r>
+              <a:rPr>
+                <a:solidFill>
+                  <a:srgbClr val="20794D"/>
+                </a:solidFill>
+                <a:latin typeface="Courier"/>
+              </a:rPr>
+              <a:t>"Ant Species Richness"</a:t>
+            </a:r>
+            <a:r>
+              <a:rPr>
+                <a:solidFill>
+                  <a:srgbClr val="003B4F"/>
+                </a:solidFill>
+                <a:latin typeface="Courier"/>
+              </a:rPr>
+              <a:t>) </a:t>
+            </a:r>
+            <a:r>
+              <a:rPr>
+                <a:solidFill>
+                  <a:srgbClr val="5E5E5E"/>
+                </a:solidFill>
+                <a:latin typeface="Courier"/>
+              </a:rPr>
+              <a:t>+</a:t>
+            </a:r>
+            <a:br/>
+            <a:r>
+              <a:rPr>
+                <a:solidFill>
+                  <a:srgbClr val="003B4F"/>
+                </a:solidFill>
+                <a:latin typeface="Courier"/>
+              </a:rPr>
+              <a:t>  </a:t>
+            </a:r>
+            <a:r>
+              <a:rPr>
+                <a:solidFill>
+                  <a:srgbClr val="4758AB"/>
+                </a:solidFill>
+                <a:latin typeface="Courier"/>
+              </a:rPr>
+              <a:t>theme_minimal</a:t>
+            </a:r>
+            <a:r>
+              <a:rPr>
+                <a:solidFill>
+                  <a:srgbClr val="003B4F"/>
+                </a:solidFill>
+                <a:latin typeface="Courier"/>
+              </a:rPr>
+              <a:t>()</a:t>
+            </a:r>
+            <a:br/>
+            <a:br/>
+            <a:r>
+              <a:rPr>
+                <a:solidFill>
+                  <a:srgbClr val="5E5E5E"/>
+                </a:solidFill>
+                <a:latin typeface="Courier"/>
+              </a:rPr>
+              <a:t># Display plots top bottom</a:t>
+            </a:r>
+            <a:br/>
+            <a:br/>
+            <a:r>
+              <a:rPr>
+                <a:solidFill>
+                  <a:srgbClr val="003B4F"/>
+                </a:solidFill>
+                <a:latin typeface="Courier"/>
+              </a:rPr>
+              <a:t>p1 </a:t>
+            </a:r>
+            <a:r>
+              <a:rPr>
+                <a:solidFill>
+                  <a:srgbClr val="5E5E5E"/>
+                </a:solidFill>
+                <a:latin typeface="Courier"/>
+              </a:rPr>
+              <a:t>/</a:t>
+            </a:r>
+            <a:r>
+              <a:rPr>
+                <a:solidFill>
+                  <a:srgbClr val="003B4F"/>
+                </a:solidFill>
+                <a:latin typeface="Courier"/>
+              </a:rPr>
+              <a:t> p2 </a:t>
             </a:r>
           </a:p>
         </p:txBody>
       </p:sp>
       <p:pic>
         <p:nvPicPr>
-          <p:cNvPr descr="images/clipboard-2854056083.png" id="0" name="Picture 1"/>
+          <p:cNvPr descr="10_01_lecture_powerpoint_files/figure-pptx/unnamed-chunk-5-1.png" id="0" name="Picture 1"/>
           <p:cNvPicPr>
             <a:picLocks noGrp="1" noChangeAspect="1"/>
           </p:cNvPicPr>
@@ -5523,8 +7483,8 @@
         </p:blipFill>
         <p:spPr bwMode="auto">
           <a:xfrm>
-            <a:off x="3657600" y="2362200"/>
-            <a:ext cx="5232400" cy="965200"/>
+            <a:off x="4749800" y="1689100"/>
+            <a:ext cx="4038600" cy="2489200"/>
           </a:xfrm>
           <a:prstGeom prst="rect">
             <a:avLst/>
@@ -5608,61 +7568,45 @@
           <a:bodyPr/>
           <a:lstStyle/>
           <a:p>
-            <a:pPr lvl="0" indent="0" marL="0">
+            <a:pPr lvl="0"/>
+            <a:r>
+              <a:rPr/>
+              <a:t>Potential predictor variables are often correlated (e.g., morphometrics, nutrients, climatic parameters)</a:t>
+            </a:r>
+          </a:p>
+          <a:p>
+            <a:pPr lvl="0"/>
+            <a:r>
+              <a:rPr/>
+              <a:t>Multicollinearity (strong correlation between predictors) causes problems for parameter estimates</a:t>
+            </a:r>
+          </a:p>
+          <a:p>
+            <a:pPr lvl="0"/>
+            <a:r>
+              <a:rPr/>
+              <a:t>Severe collinearity causes unstable parameter estimates: small change in a single value can result in large changes in βp - estimates</a:t>
+            </a:r>
+          </a:p>
+          <a:p>
+            <a:pPr lvl="0"/>
+            <a:r>
+              <a:rPr/>
+              <a:t>Inflates partial slope error estimates, loss of power</a:t>
+            </a:r>
+          </a:p>
+          <a:p>
+            <a:pPr lvl="0" indent="0">
               <a:buNone/>
             </a:pPr>
             <a:r>
-              <a:rPr/>
-              <a:t>Collinearity can be detected by:</a:t>
-            </a:r>
-          </a:p>
-          <a:p>
-            <a:pPr lvl="0"/>
-            <a:r>
-              <a:rPr/>
-              <a:t>Variance inflation Factors:</a:t>
-            </a:r>
-          </a:p>
-          <a:p>
-            <a:pPr lvl="1"/>
-            <a:r>
-              <a:rPr/>
-              <a:t>VIF for Xj=1/ (1-r2 )</a:t>
-            </a:r>
-          </a:p>
-          <a:p>
-            <a:pPr lvl="1"/>
-            <a:r>
-              <a:rPr/>
-              <a:t>VIF &gt; 10 = bad</a:t>
-            </a:r>
-          </a:p>
-          <a:p>
-            <a:pPr lvl="0"/>
-            <a:r>
-              <a:rPr/>
-              <a:t>Best/simplest solution:</a:t>
-            </a:r>
-          </a:p>
-          <a:p>
-            <a:pPr lvl="1"/>
-            <a:r>
-              <a:rPr/>
-              <a:t>exclude variables that are highly correlated with other variables</a:t>
-            </a:r>
-          </a:p>
-          <a:p>
-            <a:pPr lvl="1"/>
-            <a:r>
-              <a:rPr/>
-              <a:t>they are probably measuring similar</a:t>
-            </a:r>
-          </a:p>
-          <a:p>
-            <a:pPr lvl="1"/>
-            <a:r>
-              <a:rPr/>
-              <a:t>thing and are redundant</a:t>
+              <a:rPr>
+                <a:latin typeface="Courier"/>
+              </a:rPr>
+              <a:t>           elevation   latitude    ant_spp
+elevation  1.0000000  0.1787454 -0.5545244
+latitude   0.1787454  1.0000000 -0.5879407
+ant_spp   -0.5545244 -0.5879407  1.0000000</a:t>
             </a:r>
           </a:p>
         </p:txBody>
@@ -5718,365 +7662,105 @@
             </a:r>
             <a:r>
               <a:rPr/>
-              <a:t> Interactions</a:t>
-            </a:r>
-          </a:p>
-        </p:txBody>
-      </p:sp>
-      <mc:AlternateContent xmlns:mc="http://schemas.openxmlformats.org/markup-compatibility/2006">
-        <mc:Choice xmlns:a14="http://schemas.microsoft.com/office/drawing/2010/main" Requires="a14">
-          <p:sp>
-            <p:nvSpPr>
-              <p:cNvPr id="3" name="Content Placeholder 2"/>
-              <p:cNvSpPr>
-                <a:spLocks noGrp="1"/>
-              </p:cNvSpPr>
-              <p:nvPr>
-                <p:ph idx="1"/>
-              </p:nvPr>
-            </p:nvSpPr>
-            <p:spPr/>
-            <p:txBody>
-              <a:bodyPr/>
-              <a:lstStyle/>
-              <a:p>
-                <a:pPr lvl="0" indent="0" marL="0">
-                  <a:buNone/>
-                </a:pPr>
-                <a:r>
-                  <a:rPr/>
-                  <a:t>Predictors can be modeled as:</a:t>
-                </a:r>
-              </a:p>
-              <a:p>
-                <a:pPr lvl="0"/>
-                <a:r>
-                  <a:rPr/>
-                  <a:t>additive (effect of temp, plus precip, plus fertility) or</a:t>
-                </a:r>
-              </a:p>
-              <a:p>
-                <a:pPr lvl="0"/>
-                <a:r>
-                  <a:rPr/>
-                  <a:t>multiplicative (interactive)</a:t>
-                </a:r>
-              </a:p>
-              <a:p>
-                <a:pPr lvl="0"/>
-                <a:r>
-                  <a:rPr/>
-                  <a:t>Interaction: effect of Xi depends on levels of Xj</a:t>
-                </a:r>
-              </a:p>
-              <a:p>
-                <a:pPr lvl="0"/>
-                <a:r>
-                  <a:rPr/>
-                  <a:t>The partial slope of Y vs. X1 is different for different levels of X2 (and vice versa); measured by β3</a:t>
-                </a:r>
-              </a:p>
-              <a:p>
-                <a:pPr lvl="0" indent="0" marL="0">
-                  <a:buNone/>
-                </a:pPr>
-                <a14:m>
-                  <m:oMathPara xmlns:m="http://schemas.openxmlformats.org/officeDocument/2006/math">
-                    <m:oMathParaPr>
-                      <m:jc m:val="center"/>
-                    </m:oMathParaPr>
-                    <m:oMath>
-                      <m:sSub>
-                        <m:e>
-                          <m:r>
-                            <m:t>y</m:t>
-                          </m:r>
-                        </m:e>
-                        <m:sub>
-                          <m:r>
-                            <m:t>i</m:t>
-                          </m:r>
-                        </m:sub>
-                      </m:sSub>
-                      <m:r>
-                        <m:rPr>
-                          <m:sty m:val="p"/>
-                        </m:rPr>
-                        <m:t>=</m:t>
-                      </m:r>
-                      <m:sSub>
-                        <m:e>
-                          <m:r>
-                            <m:t>β</m:t>
-                          </m:r>
-                        </m:e>
-                        <m:sub>
-                          <m:r>
-                            <m:t>0</m:t>
-                          </m:r>
-                        </m:sub>
-                      </m:sSub>
-                      <m:r>
-                        <m:rPr>
-                          <m:sty m:val="p"/>
-                        </m:rPr>
-                        <m:t>+</m:t>
-                      </m:r>
-                      <m:sSub>
-                        <m:e>
-                          <m:r>
-                            <m:t>β</m:t>
-                          </m:r>
-                        </m:e>
-                        <m:sub>
-                          <m:r>
-                            <m:t>1</m:t>
-                          </m:r>
-                        </m:sub>
-                      </m:sSub>
-                      <m:sSub>
-                        <m:e>
-                          <m:r>
-                            <m:t>X</m:t>
-                          </m:r>
-                        </m:e>
-                        <m:sub>
-                          <m:r>
-                            <m:t>i</m:t>
-                          </m:r>
-                          <m:r>
-                            <m:t>1</m:t>
-                          </m:r>
-                        </m:sub>
-                      </m:sSub>
-                      <m:r>
-                        <m:rPr>
-                          <m:sty m:val="p"/>
-                        </m:rPr>
-                        <m:t>+</m:t>
-                      </m:r>
-                      <m:sSub>
-                        <m:e>
-                          <m:r>
-                            <m:t>β</m:t>
-                          </m:r>
-                        </m:e>
-                        <m:sub>
-                          <m:r>
-                            <m:t>2</m:t>
-                          </m:r>
-                        </m:sub>
-                      </m:sSub>
-                      <m:sSub>
-                        <m:e>
-                          <m:r>
-                            <m:t>X</m:t>
-                          </m:r>
-                        </m:e>
-                        <m:sub>
-                          <m:r>
-                            <m:t>i</m:t>
-                          </m:r>
-                          <m:r>
-                            <m:t>2</m:t>
-                          </m:r>
-                        </m:sub>
-                      </m:sSub>
-                      <m:r>
-                        <m:rPr>
-                          <m:sty m:val="p"/>
-                        </m:rPr>
-                        <m:t>+</m:t>
-                      </m:r>
-                      <m:sSub>
-                        <m:e>
-                          <m:r>
-                            <m:t>ϵ</m:t>
-                          </m:r>
-                        </m:e>
-                        <m:sub>
-                          <m:r>
-                            <m:t>i</m:t>
-                          </m:r>
-                        </m:sub>
-                      </m:sSub>
-                      <m:r>
-                        <m:t> </m:t>
-                      </m:r>
-                      <m:r>
-                        <m:rPr>
-                          <m:nor/>
-                          <m:sty m:val="p"/>
-                        </m:rPr>
-                        <m:t>vs.</m:t>
-                      </m:r>
-                      <m:r>
-                        <m:t> </m:t>
-                      </m:r>
-                      <m:sSub>
-                        <m:e>
-                          <m:r>
-                            <m:t>y</m:t>
-                          </m:r>
-                        </m:e>
-                        <m:sub>
-                          <m:r>
-                            <m:t>i</m:t>
-                          </m:r>
-                        </m:sub>
-                      </m:sSub>
-                      <m:r>
-                        <m:rPr>
-                          <m:sty m:val="p"/>
-                        </m:rPr>
-                        <m:t>=</m:t>
-                      </m:r>
-                      <m:sSub>
-                        <m:e>
-                          <m:r>
-                            <m:t>β</m:t>
-                          </m:r>
-                        </m:e>
-                        <m:sub>
-                          <m:r>
-                            <m:t>0</m:t>
-                          </m:r>
-                        </m:sub>
-                      </m:sSub>
-                      <m:r>
-                        <m:rPr>
-                          <m:sty m:val="p"/>
-                        </m:rPr>
-                        <m:t>+</m:t>
-                      </m:r>
-                      <m:sSub>
-                        <m:e>
-                          <m:r>
-                            <m:t>β</m:t>
-                          </m:r>
-                        </m:e>
-                        <m:sub>
-                          <m:r>
-                            <m:t>1</m:t>
-                          </m:r>
-                        </m:sub>
-                      </m:sSub>
-                      <m:sSub>
-                        <m:e>
-                          <m:r>
-                            <m:t>X</m:t>
-                          </m:r>
-                        </m:e>
-                        <m:sub>
-                          <m:r>
-                            <m:t>i</m:t>
-                          </m:r>
-                          <m:r>
-                            <m:t>1</m:t>
-                          </m:r>
-                        </m:sub>
-                      </m:sSub>
-                      <m:r>
-                        <m:rPr>
-                          <m:sty m:val="p"/>
-                        </m:rPr>
-                        <m:t>+</m:t>
-                      </m:r>
-                      <m:sSub>
-                        <m:e>
-                          <m:r>
-                            <m:t>β</m:t>
-                          </m:r>
-                        </m:e>
-                        <m:sub>
-                          <m:r>
-                            <m:t>2</m:t>
-                          </m:r>
-                        </m:sub>
-                      </m:sSub>
-                      <m:sSub>
-                        <m:e>
-                          <m:r>
-                            <m:t>X</m:t>
-                          </m:r>
-                        </m:e>
-                        <m:sub>
-                          <m:r>
-                            <m:t>i</m:t>
-                          </m:r>
-                          <m:r>
-                            <m:t>2</m:t>
-                          </m:r>
-                        </m:sub>
-                      </m:sSub>
-                      <m:r>
-                        <m:rPr>
-                          <m:sty m:val="p"/>
-                        </m:rPr>
-                        <m:t>+</m:t>
-                      </m:r>
-                      <m:r>
-                        <m:rPr>
-                          <m:sty m:val="p"/>
-                        </m:rPr>
-                        <m:t>+</m:t>
-                      </m:r>
-                      <m:sSub>
-                        <m:e>
-                          <m:r>
-                            <m:t>β</m:t>
-                          </m:r>
-                        </m:e>
-                        <m:sub>
-                          <m:r>
-                            <m:t>3</m:t>
-                          </m:r>
-                        </m:sub>
-                      </m:sSub>
-                      <m:sSub>
-                        <m:e>
-                          <m:r>
-                            <m:t>X</m:t>
-                          </m:r>
-                        </m:e>
-                        <m:sub>
-                          <m:r>
-                            <m:t>i</m:t>
-                          </m:r>
-                          <m:r>
-                            <m:t>3</m:t>
-                          </m:r>
-                        </m:sub>
-                      </m:sSub>
-                      <m:sSub>
-                        <m:e>
-                          <m:r>
-                            <m:t>ϵ</m:t>
-                          </m:r>
-                        </m:e>
-                        <m:sub>
-                          <m:r>
-                            <m:t>i</m:t>
-                          </m:r>
-                        </m:sub>
-                      </m:sSub>
-                    </m:oMath>
-                  </m:oMathPara>
-                </a14:m>
-              </a:p>
-              <a:p>
-                <a:pPr lvl="0" indent="0" marL="0">
-                  <a:buNone/>
-                </a:pPr>
-                <a:r>
-                  <a:rPr/>
-                  <a:t>“Curvature” of the regression (hyper)plane</a:t>
-                </a:r>
-              </a:p>
-            </p:txBody>
-          </p:sp>
-        </mc:Choice>
-      </mc:AlternateContent>
+              <a:t> Collinearity</a:t>
+            </a:r>
+          </a:p>
+        </p:txBody>
+      </p:sp>
+      <p:sp>
+        <p:nvSpPr>
+          <p:cNvPr id="3" name="Content Placeholder 2"/>
+          <p:cNvSpPr>
+            <a:spLocks noGrp="1"/>
+          </p:cNvSpPr>
+          <p:nvPr>
+            <p:ph idx="1"/>
+          </p:nvPr>
+        </p:nvSpPr>
+        <p:spPr/>
+        <p:txBody>
+          <a:bodyPr/>
+          <a:lstStyle/>
+          <a:p>
+            <a:pPr lvl="0" indent="0" marL="0">
+              <a:spcBef>
+                <a:spcPts val="3000"/>
+              </a:spcBef>
+              <a:buNone/>
+            </a:pPr>
+            <a:r>
+              <a:rPr b="1"/>
+              <a:t>Collinearity can be detected by:</a:t>
+            </a:r>
+          </a:p>
+          <a:p>
+            <a:pPr lvl="0"/>
+            <a:r>
+              <a:rPr/>
+              <a:t>Variance inflation Factors </a:t>
+            </a:r>
+            <a:r>
+              <a:rPr b="1"/>
+              <a:t>(VIF)</a:t>
+            </a:r>
+            <a:r>
+              <a:rPr/>
+              <a:t>:</a:t>
+            </a:r>
+          </a:p>
+          <a:p>
+            <a:pPr lvl="1"/>
+            <a:r>
+              <a:rPr/>
+              <a:t>VIF for X</a:t>
+            </a:r>
+            <a:r>
+              <a:rPr baseline="-25000"/>
+              <a:t>j</a:t>
+            </a:r>
+            <a:r>
+              <a:rPr/>
+              <a:t>=1/ (1-r</a:t>
+            </a:r>
+            <a:r>
+              <a:rPr baseline="30000"/>
+              <a:t>2</a:t>
+            </a:r>
+            <a:r>
+              <a:rPr/>
+              <a:t> )</a:t>
+            </a:r>
+          </a:p>
+          <a:p>
+            <a:pPr lvl="1"/>
+            <a:r>
+              <a:rPr/>
+              <a:t>VIF &gt; 10 = bad</a:t>
+            </a:r>
+          </a:p>
+          <a:p>
+            <a:pPr lvl="0"/>
+            <a:r>
+              <a:rPr/>
+              <a:t>Best/simplest solution:</a:t>
+            </a:r>
+          </a:p>
+          <a:p>
+            <a:pPr lvl="1"/>
+            <a:r>
+              <a:rPr/>
+              <a:t>exclude variables that are highly correlated with other variables</a:t>
+            </a:r>
+          </a:p>
+          <a:p>
+            <a:pPr lvl="1"/>
+            <a:r>
+              <a:rPr/>
+              <a:t>they are probably measuring similar things and are redundant</a:t>
+            </a:r>
+          </a:p>
+        </p:txBody>
+      </p:sp>
     </p:spTree>
   </p:cSld>
 </p:sld>
@@ -6128,41 +7812,403 @@
             </a:r>
             <a:r>
               <a:rPr/>
-              <a:t> Analyses</a:t>
-            </a:r>
-          </a:p>
-        </p:txBody>
-      </p:sp>
-      <p:pic>
-        <p:nvPicPr>
-          <p:cNvPr descr="images/clipboard-4241772680.png" id="0" name="Picture 1"/>
-          <p:cNvPicPr>
-            <a:picLocks noGrp="1" noChangeAspect="1"/>
-          </p:cNvPicPr>
-          <p:nvPr/>
-        </p:nvPicPr>
-        <p:blipFill>
-          <a:blip r:embed="rId2"/>
-          <a:stretch>
-            <a:fillRect/>
-          </a:stretch>
-        </p:blipFill>
-        <p:spPr bwMode="auto">
-          <a:xfrm>
-            <a:off x="2527300" y="609600"/>
-            <a:ext cx="4025900" cy="3911600"/>
-          </a:xfrm>
-          <a:prstGeom prst="rect">
-            <a:avLst/>
-          </a:prstGeom>
-          <a:noFill/>
-          <a:ln w="9525">
-            <a:noFill/>
-            <a:headEnd/>
-            <a:tailEnd/>
-          </a:ln>
-        </p:spPr>
-      </p:pic>
+              <a:t> Interactions</a:t>
+            </a:r>
+          </a:p>
+        </p:txBody>
+      </p:sp>
+      <mc:AlternateContent xmlns:mc="http://schemas.openxmlformats.org/markup-compatibility/2006">
+        <mc:Choice xmlns:a14="http://schemas.microsoft.com/office/drawing/2010/main" Requires="a14">
+          <p:sp>
+            <p:nvSpPr>
+              <p:cNvPr id="3" name="Content Placeholder 2"/>
+              <p:cNvSpPr>
+                <a:spLocks noGrp="1"/>
+              </p:cNvSpPr>
+              <p:nvPr>
+                <p:ph idx="1"/>
+              </p:nvPr>
+            </p:nvSpPr>
+            <p:spPr/>
+            <p:txBody>
+              <a:bodyPr/>
+              <a:lstStyle/>
+              <a:p>
+                <a:pPr lvl="0" indent="0" marL="0">
+                  <a:spcBef>
+                    <a:spcPts val="3000"/>
+                  </a:spcBef>
+                  <a:buNone/>
+                </a:pPr>
+                <a:r>
+                  <a:rPr b="1"/>
+                  <a:t>Predictors can be modeled as:</a:t>
+                </a:r>
+              </a:p>
+              <a:p>
+                <a:pPr lvl="0"/>
+                <a:r>
+                  <a:rPr b="1" u="sng"/>
+                  <a:t>additive (effect of temp, plus precip, plus fertility) or</a:t>
+                </a:r>
+              </a:p>
+              <a:p>
+                <a:pPr lvl="0"/>
+                <a:r>
+                  <a:rPr b="1" u="sng"/>
+                  <a:t>multiplicative (interactive)</a:t>
+                </a:r>
+              </a:p>
+              <a:p>
+                <a:pPr lvl="0"/>
+                <a:r>
+                  <a:rPr b="1"/>
+                  <a:t>Interaction: effect of Xi depends on levels of Xj</a:t>
+                </a:r>
+              </a:p>
+              <a:p>
+                <a:pPr lvl="0"/>
+                <a:r>
+                  <a:rPr/>
+                  <a:t>The partial slope of Y vs. X</a:t>
+                </a:r>
+                <a:r>
+                  <a:rPr baseline="-25000"/>
+                  <a:t>1</a:t>
+                </a:r>
+                <a:r>
+                  <a:rPr/>
+                  <a:t> is different for different levels of X</a:t>
+                </a:r>
+                <a:r>
+                  <a:rPr baseline="-25000"/>
+                  <a:t>2</a:t>
+                </a:r>
+                <a:r>
+                  <a:rPr/>
+                  <a:t> (and vice versa); measured by β</a:t>
+                </a:r>
+                <a:r>
+                  <a:rPr baseline="-25000"/>
+                  <a:t>3</a:t>
+                </a:r>
+              </a:p>
+              <a:p>
+                <a:pPr lvl="0" indent="0" marL="0">
+                  <a:buNone/>
+                </a:pPr>
+                <a14:m>
+                  <m:oMathPara xmlns:m="http://schemas.openxmlformats.org/officeDocument/2006/math">
+                    <m:oMathParaPr>
+                      <m:jc m:val="center"/>
+                    </m:oMathParaPr>
+                    <m:oMath>
+                      <m:sSub>
+                        <m:e>
+                          <m:r>
+                            <m:t>y</m:t>
+                          </m:r>
+                        </m:e>
+                        <m:sub>
+                          <m:r>
+                            <m:t>i</m:t>
+                          </m:r>
+                        </m:sub>
+                      </m:sSub>
+                      <m:r>
+                        <m:rPr>
+                          <m:sty m:val="p"/>
+                        </m:rPr>
+                        <m:t>=</m:t>
+                      </m:r>
+                      <m:sSub>
+                        <m:e>
+                          <m:r>
+                            <m:t>β</m:t>
+                          </m:r>
+                        </m:e>
+                        <m:sub>
+                          <m:r>
+                            <m:t>0</m:t>
+                          </m:r>
+                        </m:sub>
+                      </m:sSub>
+                      <m:r>
+                        <m:rPr>
+                          <m:sty m:val="p"/>
+                        </m:rPr>
+                        <m:t>+</m:t>
+                      </m:r>
+                      <m:sSub>
+                        <m:e>
+                          <m:r>
+                            <m:t>β</m:t>
+                          </m:r>
+                        </m:e>
+                        <m:sub>
+                          <m:r>
+                            <m:t>1</m:t>
+                          </m:r>
+                        </m:sub>
+                      </m:sSub>
+                      <m:sSub>
+                        <m:e>
+                          <m:r>
+                            <m:t>X</m:t>
+                          </m:r>
+                        </m:e>
+                        <m:sub>
+                          <m:r>
+                            <m:t>i</m:t>
+                          </m:r>
+                          <m:r>
+                            <m:t>1</m:t>
+                          </m:r>
+                        </m:sub>
+                      </m:sSub>
+                      <m:r>
+                        <m:rPr>
+                          <m:sty m:val="p"/>
+                        </m:rPr>
+                        <m:t>+</m:t>
+                      </m:r>
+                      <m:sSub>
+                        <m:e>
+                          <m:r>
+                            <m:t>β</m:t>
+                          </m:r>
+                        </m:e>
+                        <m:sub>
+                          <m:r>
+                            <m:t>2</m:t>
+                          </m:r>
+                        </m:sub>
+                      </m:sSub>
+                      <m:sSub>
+                        <m:e>
+                          <m:r>
+                            <m:t>X</m:t>
+                          </m:r>
+                        </m:e>
+                        <m:sub>
+                          <m:r>
+                            <m:t>i</m:t>
+                          </m:r>
+                          <m:r>
+                            <m:t>2</m:t>
+                          </m:r>
+                        </m:sub>
+                      </m:sSub>
+                      <m:r>
+                        <m:rPr>
+                          <m:sty m:val="p"/>
+                        </m:rPr>
+                        <m:t>+</m:t>
+                      </m:r>
+                      <m:sSub>
+                        <m:e>
+                          <m:r>
+                            <m:t>ϵ</m:t>
+                          </m:r>
+                        </m:e>
+                        <m:sub>
+                          <m:r>
+                            <m:t>i</m:t>
+                          </m:r>
+                        </m:sub>
+                      </m:sSub>
+                      <m:r>
+                        <m:t> </m:t>
+                      </m:r>
+                      <m:r>
+                        <m:rPr>
+                          <m:nor/>
+                          <m:sty m:val="p"/>
+                        </m:rPr>
+                        <m:t>vs.</m:t>
+                      </m:r>
+                      <m:r>
+                        <m:t> </m:t>
+                      </m:r>
+                      <m:sSub>
+                        <m:e>
+                          <m:r>
+                            <m:t>y</m:t>
+                          </m:r>
+                        </m:e>
+                        <m:sub>
+                          <m:r>
+                            <m:t>i</m:t>
+                          </m:r>
+                        </m:sub>
+                      </m:sSub>
+                      <m:r>
+                        <m:rPr>
+                          <m:sty m:val="p"/>
+                        </m:rPr>
+                        <m:t>=</m:t>
+                      </m:r>
+                      <m:sSub>
+                        <m:e>
+                          <m:r>
+                            <m:t>β</m:t>
+                          </m:r>
+                        </m:e>
+                        <m:sub>
+                          <m:r>
+                            <m:t>0</m:t>
+                          </m:r>
+                        </m:sub>
+                      </m:sSub>
+                      <m:r>
+                        <m:rPr>
+                          <m:sty m:val="p"/>
+                        </m:rPr>
+                        <m:t>+</m:t>
+                      </m:r>
+                      <m:sSub>
+                        <m:e>
+                          <m:r>
+                            <m:t>β</m:t>
+                          </m:r>
+                        </m:e>
+                        <m:sub>
+                          <m:r>
+                            <m:t>1</m:t>
+                          </m:r>
+                        </m:sub>
+                      </m:sSub>
+                      <m:sSub>
+                        <m:e>
+                          <m:r>
+                            <m:t>X</m:t>
+                          </m:r>
+                        </m:e>
+                        <m:sub>
+                          <m:r>
+                            <m:t>i</m:t>
+                          </m:r>
+                          <m:r>
+                            <m:t>1</m:t>
+                          </m:r>
+                        </m:sub>
+                      </m:sSub>
+                      <m:r>
+                        <m:rPr>
+                          <m:sty m:val="p"/>
+                        </m:rPr>
+                        <m:t>+</m:t>
+                      </m:r>
+                      <m:sSub>
+                        <m:e>
+                          <m:r>
+                            <m:t>β</m:t>
+                          </m:r>
+                        </m:e>
+                        <m:sub>
+                          <m:r>
+                            <m:t>2</m:t>
+                          </m:r>
+                        </m:sub>
+                      </m:sSub>
+                      <m:sSub>
+                        <m:e>
+                          <m:r>
+                            <m:t>X</m:t>
+                          </m:r>
+                        </m:e>
+                        <m:sub>
+                          <m:r>
+                            <m:t>i</m:t>
+                          </m:r>
+                          <m:r>
+                            <m:t>2</m:t>
+                          </m:r>
+                        </m:sub>
+                      </m:sSub>
+                      <m:r>
+                        <m:rPr>
+                          <m:sty m:val="p"/>
+                        </m:rPr>
+                        <m:t>+</m:t>
+                      </m:r>
+                      <m:sSub>
+                        <m:e>
+                          <m:r>
+                            <m:t>β</m:t>
+                          </m:r>
+                        </m:e>
+                        <m:sub>
+                          <m:r>
+                            <m:t>3</m:t>
+                          </m:r>
+                        </m:sub>
+                      </m:sSub>
+                      <m:sSub>
+                        <m:e>
+                          <m:r>
+                            <m:t>X</m:t>
+                          </m:r>
+                        </m:e>
+                        <m:sub>
+                          <m:r>
+                            <m:t>i</m:t>
+                          </m:r>
+                          <m:r>
+                            <m:t>1</m:t>
+                          </m:r>
+                        </m:sub>
+                      </m:sSub>
+                      <m:r>
+                        <m:rPr>
+                          <m:sty m:val="p"/>
+                        </m:rPr>
+                        <m:t>*</m:t>
+                      </m:r>
+                      <m:sSub>
+                        <m:e>
+                          <m:r>
+                            <m:t>X</m:t>
+                          </m:r>
+                        </m:e>
+                        <m:sub>
+                          <m:r>
+                            <m:t>i</m:t>
+                          </m:r>
+                          <m:r>
+                            <m:t>2</m:t>
+                          </m:r>
+                        </m:sub>
+                      </m:sSub>
+                      <m:sSub>
+                        <m:e>
+                          <m:r>
+                            <m:t>ϵ</m:t>
+                          </m:r>
+                        </m:e>
+                        <m:sub>
+                          <m:r>
+                            <m:t>i</m:t>
+                          </m:r>
+                        </m:sub>
+                      </m:sSub>
+                    </m:oMath>
+                  </m:oMathPara>
+                </a14:m>
+              </a:p>
+              <a:p>
+                <a:pPr lvl="0" indent="0" marL="0">
+                  <a:buNone/>
+                </a:pPr>
+                <a:r>
+                  <a:rPr/>
+                  <a:t>This leads to “Curvature” of the regression (hyper)plane</a:t>
+                </a:r>
+              </a:p>
+            </p:txBody>
+          </p:sp>
+        </mc:Choice>
+      </mc:AlternateContent>
     </p:spTree>
   </p:cSld>
 </p:sld>
@@ -6219,59 +8265,36 @@
           </a:p>
         </p:txBody>
       </p:sp>
-      <p:sp>
-        <p:nvSpPr>
-          <p:cNvPr id="3" name="Content Placeholder 2"/>
-          <p:cNvSpPr>
-            <a:spLocks noGrp="1"/>
-          </p:cNvSpPr>
-          <p:nvPr>
-            <p:ph idx="1"/>
-          </p:nvPr>
-        </p:nvSpPr>
-        <p:spPr/>
-        <p:txBody>
-          <a:bodyPr/>
-          <a:lstStyle/>
-          <a:p>
-            <a:pPr lvl="0" indent="0" marL="0">
-              <a:buNone/>
-            </a:pPr>
-            <a:r>
-              <a:rPr/>
-              <a:t>Adding interactions:</a:t>
-            </a:r>
-          </a:p>
-          <a:p>
-            <a:pPr lvl="0"/>
-            <a:r>
-              <a:rPr/>
-              <a:t>many more predictors (“parameter proliferation”):</a:t>
-            </a:r>
-          </a:p>
-          <a:p>
-            <a:pPr lvl="0"/>
-            <a:r>
-              <a:rPr/>
-              <a:t>2n; 6 params= 64 terms; 7 params= 128</a:t>
-            </a:r>
-          </a:p>
-          <a:p>
-            <a:pPr lvl="0"/>
-            <a:r>
-              <a:rPr/>
-              <a:t>interpretation more complex</a:t>
-            </a:r>
-          </a:p>
-          <a:p>
-            <a:pPr lvl="0"/>
-            <a:r>
-              <a:rPr/>
-              <a:t>When to include interactions? When they make biological sense</a:t>
-            </a:r>
-          </a:p>
-        </p:txBody>
-      </p:sp>
+      <p:pic>
+        <p:nvPicPr>
+          <p:cNvPr descr="10_01_lecture_powerpoint_files/figure-pptx/unnamed-chunk-7-1.png" id="0" name="Picture 1"/>
+          <p:cNvPicPr>
+            <a:picLocks noGrp="1" noChangeAspect="1"/>
+          </p:cNvPicPr>
+          <p:nvPr/>
+        </p:nvPicPr>
+        <p:blipFill>
+          <a:blip r:embed="rId2"/>
+          <a:stretch>
+            <a:fillRect/>
+          </a:stretch>
+        </p:blipFill>
+        <p:spPr bwMode="auto">
+          <a:xfrm>
+            <a:off x="1358900" y="609600"/>
+            <a:ext cx="6350000" cy="3911600"/>
+          </a:xfrm>
+          <a:prstGeom prst="rect">
+            <a:avLst/>
+          </a:prstGeom>
+          <a:noFill/>
+          <a:ln w="9525">
+            <a:noFill/>
+            <a:headEnd/>
+            <a:tailEnd/>
+          </a:ln>
+        </p:spPr>
+      </p:pic>
     </p:spTree>
   </p:cSld>
 </p:sld>
@@ -6307,6 +8330,115 @@
         <p:spPr>
           <a:xfrm>
             <a:off x="0" y="0"/>
+            <a:ext cx="9144000" cy="582780"/>
+          </a:xfrm>
+        </p:spPr>
+        <p:txBody>
+          <a:bodyPr/>
+          <a:lstStyle/>
+          <a:p>
+            <a:pPr lvl="0" indent="0" marL="0">
+              <a:buNone/>
+            </a:pPr>
+            <a:r>
+              <a:rPr b="1"/>
+              <a:t>Lecture 10:</a:t>
+            </a:r>
+            <a:r>
+              <a:rPr/>
+              <a:t> Analyses</a:t>
+            </a:r>
+          </a:p>
+        </p:txBody>
+      </p:sp>
+      <p:sp>
+        <p:nvSpPr>
+          <p:cNvPr id="3" name="Content Placeholder 2"/>
+          <p:cNvSpPr>
+            <a:spLocks noGrp="1"/>
+          </p:cNvSpPr>
+          <p:nvPr>
+            <p:ph idx="1"/>
+          </p:nvPr>
+        </p:nvSpPr>
+        <p:spPr/>
+        <p:txBody>
+          <a:bodyPr/>
+          <a:lstStyle/>
+          <a:p>
+            <a:pPr lvl="0" indent="0" marL="0">
+              <a:buNone/>
+            </a:pPr>
+            <a:r>
+              <a:rPr/>
+              <a:t>Adding interactions:</a:t>
+            </a:r>
+          </a:p>
+          <a:p>
+            <a:pPr lvl="0"/>
+            <a:r>
+              <a:rPr/>
+              <a:t>many more predictors (“parameter proliferation”):</a:t>
+            </a:r>
+          </a:p>
+          <a:p>
+            <a:pPr lvl="0"/>
+            <a:r>
+              <a:rPr/>
+              <a:t>2n is required; 6 parameters= 64 terms; 7 parameters= 128</a:t>
+            </a:r>
+          </a:p>
+          <a:p>
+            <a:pPr lvl="0"/>
+            <a:r>
+              <a:rPr/>
+              <a:t>interpretation more complex</a:t>
+            </a:r>
+          </a:p>
+          <a:p>
+            <a:pPr lvl="0"/>
+            <a:r>
+              <a:rPr/>
+              <a:t>When to include interactions? When they make biological sense!!!</a:t>
+            </a:r>
+          </a:p>
+        </p:txBody>
+      </p:sp>
+    </p:spTree>
+  </p:cSld>
+</p:sld>
+</file>
+
+<file path=ppt/slides/slide29.xml><?xml version="1.0" encoding="utf-8"?>
+<p:sld xmlns:a="http://schemas.openxmlformats.org/drawingml/2006/main" xmlns:r="http://schemas.openxmlformats.org/officeDocument/2006/relationships" xmlns:p="http://schemas.openxmlformats.org/presentationml/2006/main">
+  <p:cSld>
+    <p:spTree>
+      <p:nvGrpSpPr>
+        <p:cNvPr id="1" name=""/>
+        <p:cNvGrpSpPr/>
+        <p:nvPr/>
+      </p:nvGrpSpPr>
+      <p:grpSpPr>
+        <a:xfrm>
+          <a:off x="0" y="0"/>
+          <a:ext cx="0" cy="0"/>
+          <a:chOff x="0" y="0"/>
+          <a:chExt cx="0" cy="0"/>
+        </a:xfrm>
+      </p:grpSpPr>
+      <p:sp>
+        <p:nvSpPr>
+          <p:cNvPr id="2" name="Title 1"/>
+          <p:cNvSpPr>
+            <a:spLocks noGrp="1"/>
+          </p:cNvSpPr>
+          <p:nvPr>
+            <p:ph type="title"/>
+          </p:nvPr>
+        </p:nvSpPr>
+        <p:spPr>
+          <a:xfrm>
+            <a:off x="0" y="0"/>
             <a:ext cx="9144000" cy="871538"/>
           </a:xfrm>
         </p:spPr>
@@ -6347,37 +8479,37 @@
               <a:buNone/>
             </a:pPr>
             <a:r>
-              <a:rPr/>
-              <a:t>Multiple Linear Regression accommodates continuous and categorical variables (gender, vegetation type, etc.) Categorical vars as “dummy vars”, n of dummy variables = n-1 categories</a:t>
-            </a:r>
-          </a:p>
-          <a:p>
-            <a:pPr lvl="0" indent="0" marL="0">
-              <a:buNone/>
-            </a:pPr>
+              <a:rPr b="1"/>
+              <a:t>Multiple Linear Regression accommodates continuous and categorical variables</a:t>
+            </a:r>
+            <a:r>
+              <a:rPr/>
+              <a:t> (gender, vegetation type, etc.) Categorical vars as “dummy vars”, n of dummy variables = n-1 categories</a:t>
+            </a:r>
+          </a:p>
+          <a:p>
+            <a:pPr lvl="0"/>
             <a:r>
               <a:rPr b="1"/>
               <a:t>Sex M/F:</a:t>
             </a:r>
           </a:p>
           <a:p>
+            <a:pPr lvl="1"/>
+            <a:r>
+              <a:rPr/>
+              <a:t>Need 1 dummy var with two values (0, 1)</a:t>
+            </a:r>
+          </a:p>
+          <a:p>
             <a:pPr lvl="0"/>
-            <a:r>
-              <a:rPr/>
-              <a:t>Need 1 dummy var with two values (0, 1)</a:t>
-            </a:r>
-          </a:p>
-          <a:p>
-            <a:pPr lvl="0" indent="0" marL="0">
-              <a:buNone/>
-            </a:pPr>
             <a:r>
               <a:rPr b="1"/>
               <a:t>Fertility L/M/H:</a:t>
             </a:r>
           </a:p>
           <a:p>
-            <a:pPr lvl="0"/>
+            <a:pPr lvl="1"/>
             <a:r>
               <a:rPr/>
               <a:t>Need 2 dummy var, each with two values (0, 1): fert1 (0 if L or H, 1 if M), fert2 (1 if H, 0 if L or M)</a:t>
@@ -6610,7 +8742,7 @@
 </p:sld>
 </file>
 
-<file path=ppt/slides/slide29.xml><?xml version="1.0" encoding="utf-8"?>
+<file path=ppt/slides/slide3.xml><?xml version="1.0" encoding="utf-8"?>
 <p:sld xmlns:a="http://schemas.openxmlformats.org/drawingml/2006/main" xmlns:r="http://schemas.openxmlformats.org/officeDocument/2006/relationships" xmlns:p="http://schemas.openxmlformats.org/presentationml/2006/main">
   <p:cSld>
     <p:spTree>
@@ -6640,6 +8772,153 @@
         <p:spPr>
           <a:xfrm>
             <a:off x="0" y="0"/>
+            <a:ext cx="9144000" cy="582780"/>
+          </a:xfrm>
+        </p:spPr>
+        <p:txBody>
+          <a:bodyPr/>
+          <a:lstStyle/>
+          <a:p>
+            <a:pPr lvl="0" indent="0" marL="0">
+              <a:buNone/>
+            </a:pPr>
+            <a:r>
+              <a:rPr/>
+              <a:t>Lecture 10: Overview</a:t>
+            </a:r>
+          </a:p>
+        </p:txBody>
+      </p:sp>
+      <p:sp>
+        <p:nvSpPr>
+          <p:cNvPr id="3" name="Content Placeholder 2"/>
+          <p:cNvSpPr>
+            <a:spLocks noGrp="1"/>
+          </p:cNvSpPr>
+          <p:nvPr>
+            <p:ph idx="1"/>
+          </p:nvPr>
+        </p:nvSpPr>
+        <p:spPr/>
+        <p:txBody>
+          <a:bodyPr/>
+          <a:lstStyle/>
+          <a:p>
+            <a:pPr lvl="0" indent="0" marL="0">
+              <a:buNone/>
+            </a:pPr>
+            <a:r>
+              <a:rPr/>
+              <a:t>Multiple Linear Regression model</a:t>
+            </a:r>
+          </a:p>
+          <a:p>
+            <a:pPr lvl="0"/>
+            <a:r>
+              <a:rPr/>
+              <a:t>Regression parameters</a:t>
+            </a:r>
+          </a:p>
+          <a:p>
+            <a:pPr lvl="0"/>
+            <a:r>
+              <a:rPr/>
+              <a:t>Analysis of variance</a:t>
+            </a:r>
+          </a:p>
+          <a:p>
+            <a:pPr lvl="0"/>
+            <a:r>
+              <a:rPr/>
+              <a:t>Null hypotheses</a:t>
+            </a:r>
+          </a:p>
+          <a:p>
+            <a:pPr lvl="0"/>
+            <a:r>
+              <a:rPr/>
+              <a:t>Explained variance</a:t>
+            </a:r>
+          </a:p>
+          <a:p>
+            <a:pPr lvl="0"/>
+            <a:r>
+              <a:rPr/>
+              <a:t>Assumptions and diagnostics</a:t>
+            </a:r>
+          </a:p>
+          <a:p>
+            <a:pPr lvl="0"/>
+            <a:r>
+              <a:rPr/>
+              <a:t>Collinearity</a:t>
+            </a:r>
+          </a:p>
+          <a:p>
+            <a:pPr lvl="0"/>
+            <a:r>
+              <a:rPr/>
+              <a:t>Interactions</a:t>
+            </a:r>
+          </a:p>
+          <a:p>
+            <a:pPr lvl="0"/>
+            <a:r>
+              <a:rPr/>
+              <a:t>Dummy variables</a:t>
+            </a:r>
+          </a:p>
+          <a:p>
+            <a:pPr lvl="0"/>
+            <a:r>
+              <a:rPr/>
+              <a:t>Model selection</a:t>
+            </a:r>
+          </a:p>
+          <a:p>
+            <a:pPr lvl="0"/>
+            <a:r>
+              <a:rPr/>
+              <a:t>Importance of predictors</a:t>
+            </a:r>
+          </a:p>
+        </p:txBody>
+      </p:sp>
+    </p:spTree>
+  </p:cSld>
+</p:sld>
+</file>
+
+<file path=ppt/slides/slide30.xml><?xml version="1.0" encoding="utf-8"?>
+<p:sld xmlns:a="http://schemas.openxmlformats.org/drawingml/2006/main" xmlns:r="http://schemas.openxmlformats.org/officeDocument/2006/relationships" xmlns:p="http://schemas.openxmlformats.org/presentationml/2006/main">
+  <p:cSld>
+    <p:spTree>
+      <p:nvGrpSpPr>
+        <p:cNvPr id="1" name=""/>
+        <p:cNvGrpSpPr/>
+        <p:nvPr/>
+      </p:nvGrpSpPr>
+      <p:grpSpPr>
+        <a:xfrm>
+          <a:off x="0" y="0"/>
+          <a:ext cx="0" cy="0"/>
+          <a:chOff x="0" y="0"/>
+          <a:chExt cx="0" cy="0"/>
+        </a:xfrm>
+      </p:grpSpPr>
+      <p:sp>
+        <p:nvSpPr>
+          <p:cNvPr id="2" name="Title 1"/>
+          <p:cNvSpPr>
+            <a:spLocks noGrp="1"/>
+          </p:cNvSpPr>
+          <p:nvPr>
+            <p:ph type="title"/>
+          </p:nvPr>
+        </p:nvSpPr>
+        <p:spPr>
+          <a:xfrm>
+            <a:off x="0" y="0"/>
             <a:ext cx="9144000" cy="871538"/>
           </a:xfrm>
         </p:spPr>
@@ -6677,10 +8956,13 @@
           <a:lstStyle/>
           <a:p>
             <a:pPr lvl="0" indent="0" marL="0">
+              <a:spcBef>
+                <a:spcPts val="3000"/>
+              </a:spcBef>
               <a:buNone/>
             </a:pPr>
             <a:r>
-              <a:rPr/>
+              <a:rPr b="1"/>
               <a:t>Coefficients interpreted relative to reference condition</a:t>
             </a:r>
           </a:p>
@@ -6932,154 +9214,7 @@
 </p:sld>
 </file>
 
-<file path=ppt/slides/slide3.xml><?xml version="1.0" encoding="utf-8"?>
-<p:sld xmlns:a="http://schemas.openxmlformats.org/drawingml/2006/main" xmlns:r="http://schemas.openxmlformats.org/officeDocument/2006/relationships" xmlns:p="http://schemas.openxmlformats.org/presentationml/2006/main">
-  <p:cSld>
-    <p:spTree>
-      <p:nvGrpSpPr>
-        <p:cNvPr id="1" name=""/>
-        <p:cNvGrpSpPr/>
-        <p:nvPr/>
-      </p:nvGrpSpPr>
-      <p:grpSpPr>
-        <a:xfrm>
-          <a:off x="0" y="0"/>
-          <a:ext cx="0" cy="0"/>
-          <a:chOff x="0" y="0"/>
-          <a:chExt cx="0" cy="0"/>
-        </a:xfrm>
-      </p:grpSpPr>
-      <p:sp>
-        <p:nvSpPr>
-          <p:cNvPr id="2" name="Title 1"/>
-          <p:cNvSpPr>
-            <a:spLocks noGrp="1"/>
-          </p:cNvSpPr>
-          <p:nvPr>
-            <p:ph type="title"/>
-          </p:nvPr>
-        </p:nvSpPr>
-        <p:spPr>
-          <a:xfrm>
-            <a:off x="0" y="0"/>
-            <a:ext cx="9144000" cy="582780"/>
-          </a:xfrm>
-        </p:spPr>
-        <p:txBody>
-          <a:bodyPr/>
-          <a:lstStyle/>
-          <a:p>
-            <a:pPr lvl="0" indent="0" marL="0">
-              <a:buNone/>
-            </a:pPr>
-            <a:r>
-              <a:rPr/>
-              <a:t>Lecture 10: Overview</a:t>
-            </a:r>
-          </a:p>
-        </p:txBody>
-      </p:sp>
-      <p:sp>
-        <p:nvSpPr>
-          <p:cNvPr id="3" name="Content Placeholder 2"/>
-          <p:cNvSpPr>
-            <a:spLocks noGrp="1"/>
-          </p:cNvSpPr>
-          <p:nvPr>
-            <p:ph idx="1"/>
-          </p:nvPr>
-        </p:nvSpPr>
-        <p:spPr/>
-        <p:txBody>
-          <a:bodyPr/>
-          <a:lstStyle/>
-          <a:p>
-            <a:pPr lvl="0" indent="0" marL="0">
-              <a:buNone/>
-            </a:pPr>
-            <a:r>
-              <a:rPr/>
-              <a:t>Multiple Linear Regression model</a:t>
-            </a:r>
-          </a:p>
-          <a:p>
-            <a:pPr lvl="0"/>
-            <a:r>
-              <a:rPr/>
-              <a:t>Regression parameters</a:t>
-            </a:r>
-          </a:p>
-          <a:p>
-            <a:pPr lvl="0"/>
-            <a:r>
-              <a:rPr/>
-              <a:t>Analysis of variance</a:t>
-            </a:r>
-          </a:p>
-          <a:p>
-            <a:pPr lvl="0"/>
-            <a:r>
-              <a:rPr/>
-              <a:t>Null hypotheses</a:t>
-            </a:r>
-          </a:p>
-          <a:p>
-            <a:pPr lvl="0"/>
-            <a:r>
-              <a:rPr/>
-              <a:t>Explained variance</a:t>
-            </a:r>
-          </a:p>
-          <a:p>
-            <a:pPr lvl="0"/>
-            <a:r>
-              <a:rPr/>
-              <a:t>Assumptions and diagnostics</a:t>
-            </a:r>
-          </a:p>
-          <a:p>
-            <a:pPr lvl="0"/>
-            <a:r>
-              <a:rPr/>
-              <a:t>Collinearity</a:t>
-            </a:r>
-          </a:p>
-          <a:p>
-            <a:pPr lvl="0"/>
-            <a:r>
-              <a:rPr/>
-              <a:t>Interactions</a:t>
-            </a:r>
-          </a:p>
-          <a:p>
-            <a:pPr lvl="0"/>
-            <a:r>
-              <a:rPr/>
-              <a:t>Dummy variables</a:t>
-            </a:r>
-          </a:p>
-          <a:p>
-            <a:pPr lvl="0"/>
-            <a:r>
-              <a:rPr/>
-              <a:t>Model selection</a:t>
-            </a:r>
-          </a:p>
-          <a:p>
-            <a:pPr lvl="0"/>
-            <a:r>
-              <a:rPr/>
-              <a:t>Importance of predictors</a:t>
-            </a:r>
-          </a:p>
-        </p:txBody>
-      </p:sp>
-    </p:spTree>
-  </p:cSld>
-</p:sld>
-</file>
-
-<file path=ppt/slides/slide30.xml><?xml version="1.0" encoding="utf-8"?>
+<file path=ppt/slides/slide31.xml><?xml version="1.0" encoding="utf-8"?>
 <p:sld xmlns:a="http://schemas.openxmlformats.org/drawingml/2006/main" xmlns:r="http://schemas.openxmlformats.org/officeDocument/2006/relationships" xmlns:p="http://schemas.openxmlformats.org/presentationml/2006/main">
   <p:cSld>
     <p:spTree>
@@ -7163,172 +9298,36 @@
           </a:ln>
         </p:spPr>
       </p:pic>
-      <p:sp>
-        <p:nvSpPr>
-          <p:cNvPr id="4" name="Content Placeholder 3"/>
-          <p:cNvSpPr>
-            <a:spLocks noGrp="1"/>
-          </p:cNvSpPr>
-          <p:nvPr>
-            <p:ph idx="2" sz="half"/>
-          </p:nvPr>
-        </p:nvSpPr>
-        <p:spPr/>
-        <p:txBody>
-          <a:bodyPr/>
-          <a:lstStyle/>
-          <a:p>
-            <a:pPr lvl="0" indent="0" marL="0">
-              <a:buNone/>
-            </a:pPr>
-            <a:r>
-              <a:rPr/>
-              <a:t>S</a:t>
-            </a:r>
-          </a:p>
-        </p:txBody>
-      </p:sp>
-    </p:spTree>
-  </p:cSld>
-</p:sld>
-</file>
-
-<file path=ppt/slides/slide31.xml><?xml version="1.0" encoding="utf-8"?>
-<p:sld xmlns:a="http://schemas.openxmlformats.org/drawingml/2006/main" xmlns:r="http://schemas.openxmlformats.org/officeDocument/2006/relationships" xmlns:p="http://schemas.openxmlformats.org/presentationml/2006/main">
-  <p:cSld>
-    <p:spTree>
-      <p:nvGrpSpPr>
-        <p:cNvPr id="1" name=""/>
-        <p:cNvGrpSpPr/>
-        <p:nvPr/>
-      </p:nvGrpSpPr>
-      <p:grpSpPr>
-        <a:xfrm>
-          <a:off x="0" y="0"/>
-          <a:ext cx="0" cy="0"/>
-          <a:chOff x="0" y="0"/>
-          <a:chExt cx="0" cy="0"/>
-        </a:xfrm>
-      </p:grpSpPr>
-      <p:sp>
-        <p:nvSpPr>
-          <p:cNvPr id="2" name="Title 1"/>
-          <p:cNvSpPr>
-            <a:spLocks noGrp="1"/>
-          </p:cNvSpPr>
-          <p:nvPr>
-            <p:ph type="title"/>
-          </p:nvPr>
-        </p:nvSpPr>
-        <p:spPr>
+      <p:pic>
+        <p:nvPicPr>
+          <p:cNvPr descr="images/clipboard-3285444079.png" id="0" name="Picture 1"/>
+          <p:cNvPicPr>
+            <a:picLocks noGrp="1" noChangeAspect="1"/>
+          </p:cNvPicPr>
+          <p:nvPr/>
+        </p:nvPicPr>
+        <p:blipFill>
+          <a:blip r:embed="rId3"/>
+          <a:stretch>
+            <a:fillRect/>
+          </a:stretch>
+        </p:blipFill>
+        <p:spPr bwMode="auto">
           <a:xfrm>
-            <a:off x="0" y="0"/>
-            <a:ext cx="9144000" cy="582780"/>
+            <a:off x="6121400" y="1422400"/>
+            <a:ext cx="2781300" cy="2933700"/>
           </a:xfrm>
+          <a:prstGeom prst="rect">
+            <a:avLst/>
+          </a:prstGeom>
+          <a:noFill/>
+          <a:ln w="9525">
+            <a:noFill/>
+            <a:headEnd/>
+            <a:tailEnd/>
+          </a:ln>
         </p:spPr>
-        <p:txBody>
-          <a:bodyPr/>
-          <a:lstStyle/>
-          <a:p>
-            <a:pPr lvl="0" indent="0" marL="0">
-              <a:buNone/>
-            </a:pPr>
-            <a:r>
-              <a:rPr b="1"/>
-              <a:t>Lecture 10:</a:t>
-            </a:r>
-            <a:r>
-              <a:rPr/>
-              <a:t> Comparing models</a:t>
-            </a:r>
-          </a:p>
-        </p:txBody>
-      </p:sp>
-      <p:sp>
-        <p:nvSpPr>
-          <p:cNvPr id="3" name="Content Placeholder 2"/>
-          <p:cNvSpPr>
-            <a:spLocks noGrp="1"/>
-          </p:cNvSpPr>
-          <p:nvPr>
-            <p:ph idx="1"/>
-          </p:nvPr>
-        </p:nvSpPr>
-        <p:spPr/>
-        <p:txBody>
-          <a:bodyPr/>
-          <a:lstStyle/>
-          <a:p>
-            <a:pPr lvl="0" indent="0" marL="0">
-              <a:buNone/>
-            </a:pPr>
-            <a:r>
-              <a:rPr/>
-              <a:t>When have multiple predictors (and interactions!)</a:t>
-            </a:r>
-          </a:p>
-          <a:p>
-            <a:pPr lvl="0"/>
-            <a:r>
-              <a:rPr/>
-              <a:t>how to choose “best” model?</a:t>
-            </a:r>
-          </a:p>
-          <a:p>
-            <a:pPr lvl="0"/>
-            <a:r>
-              <a:rPr/>
-              <a:t>Which predictors to include?</a:t>
-            </a:r>
-          </a:p>
-          <a:p>
-            <a:pPr lvl="0"/>
-            <a:r>
-              <a:rPr/>
-              <a:t>Occam’s razor: “best” model balances complexity with fit to data</a:t>
-            </a:r>
-          </a:p>
-          <a:p>
-            <a:pPr lvl="0" indent="0" marL="0">
-              <a:buNone/>
-            </a:pPr>
-            <a:r>
-              <a:rPr/>
-              <a:t>To chose:</a:t>
-            </a:r>
-          </a:p>
-          <a:p>
-            <a:pPr lvl="0"/>
-            <a:r>
-              <a:rPr/>
-              <a:t>compare “nested” models</a:t>
-            </a:r>
-          </a:p>
-          <a:p>
-            <a:pPr lvl="0" indent="0" marL="0">
-              <a:buNone/>
-            </a:pPr>
-            <a:r>
-              <a:rPr/>
-              <a:t>Overfitting</a:t>
-            </a:r>
-          </a:p>
-          <a:p>
-            <a:pPr lvl="0"/>
-            <a:r>
-              <a:rPr/>
-              <a:t>getting high r2 just by having more (useless predictors)</a:t>
-            </a:r>
-          </a:p>
-          <a:p>
-            <a:pPr lvl="0"/>
-            <a:r>
-              <a:rPr/>
-              <a:t>so r2 is not a good way of choosing between nested models</a:t>
-            </a:r>
-          </a:p>
-        </p:txBody>
-      </p:sp>
+      </p:pic>
     </p:spTree>
   </p:cSld>
 </p:sld>
@@ -7385,6 +9384,141 @@
           </a:p>
         </p:txBody>
       </p:sp>
+      <p:sp>
+        <p:nvSpPr>
+          <p:cNvPr id="3" name="Content Placeholder 2"/>
+          <p:cNvSpPr>
+            <a:spLocks noGrp="1"/>
+          </p:cNvSpPr>
+          <p:nvPr>
+            <p:ph idx="1"/>
+          </p:nvPr>
+        </p:nvSpPr>
+        <p:spPr/>
+        <p:txBody>
+          <a:bodyPr/>
+          <a:lstStyle/>
+          <a:p>
+            <a:pPr lvl="0"/>
+            <a:r>
+              <a:rPr/>
+              <a:t>When have multiple predictors (and interactions!)</a:t>
+            </a:r>
+          </a:p>
+          <a:p>
+            <a:pPr lvl="1"/>
+            <a:r>
+              <a:rPr/>
+              <a:t>how to choose “best” model?</a:t>
+            </a:r>
+          </a:p>
+          <a:p>
+            <a:pPr lvl="1"/>
+            <a:r>
+              <a:rPr/>
+              <a:t>Which predictors to include?</a:t>
+            </a:r>
+          </a:p>
+          <a:p>
+            <a:pPr lvl="1"/>
+            <a:r>
+              <a:rPr/>
+              <a:t>Occam’s razor: “best” model balances complexity with fit to data</a:t>
+            </a:r>
+          </a:p>
+          <a:p>
+            <a:pPr lvl="0"/>
+            <a:r>
+              <a:rPr/>
+              <a:t>To chose:</a:t>
+            </a:r>
+          </a:p>
+          <a:p>
+            <a:pPr lvl="1"/>
+            <a:r>
+              <a:rPr/>
+              <a:t>compare “nested” models</a:t>
+            </a:r>
+          </a:p>
+          <a:p>
+            <a:pPr lvl="0"/>
+            <a:r>
+              <a:rPr/>
+              <a:t>Overfitting</a:t>
+            </a:r>
+          </a:p>
+          <a:p>
+            <a:pPr lvl="1"/>
+            <a:r>
+              <a:rPr/>
+              <a:t>getting high r2 just by having more (useless predictors)</a:t>
+            </a:r>
+          </a:p>
+          <a:p>
+            <a:pPr lvl="1"/>
+            <a:r>
+              <a:rPr/>
+              <a:t>so r2 is not a good way of choosing between nested models</a:t>
+            </a:r>
+          </a:p>
+        </p:txBody>
+      </p:sp>
+    </p:spTree>
+  </p:cSld>
+</p:sld>
+</file>
+
+<file path=ppt/slides/slide33.xml><?xml version="1.0" encoding="utf-8"?>
+<p:sld xmlns:a="http://schemas.openxmlformats.org/drawingml/2006/main" xmlns:r="http://schemas.openxmlformats.org/officeDocument/2006/relationships" xmlns:p="http://schemas.openxmlformats.org/presentationml/2006/main">
+  <p:cSld>
+    <p:spTree>
+      <p:nvGrpSpPr>
+        <p:cNvPr id="1" name=""/>
+        <p:cNvGrpSpPr/>
+        <p:nvPr/>
+      </p:nvGrpSpPr>
+      <p:grpSpPr>
+        <a:xfrm>
+          <a:off x="0" y="0"/>
+          <a:ext cx="0" cy="0"/>
+          <a:chOff x="0" y="0"/>
+          <a:chExt cx="0" cy="0"/>
+        </a:xfrm>
+      </p:grpSpPr>
+      <p:sp>
+        <p:nvSpPr>
+          <p:cNvPr id="2" name="Title 1"/>
+          <p:cNvSpPr>
+            <a:spLocks noGrp="1"/>
+          </p:cNvSpPr>
+          <p:nvPr>
+            <p:ph type="title"/>
+          </p:nvPr>
+        </p:nvSpPr>
+        <p:spPr>
+          <a:xfrm>
+            <a:off x="0" y="0"/>
+            <a:ext cx="9144000" cy="582780"/>
+          </a:xfrm>
+        </p:spPr>
+        <p:txBody>
+          <a:bodyPr/>
+          <a:lstStyle/>
+          <a:p>
+            <a:pPr lvl="0" indent="0" marL="0">
+              <a:buNone/>
+            </a:pPr>
+            <a:r>
+              <a:rPr b="1"/>
+              <a:t>Lecture 10:</a:t>
+            </a:r>
+            <a:r>
+              <a:rPr/>
+              <a:t> Comparing models</a:t>
+            </a:r>
+          </a:p>
+        </p:txBody>
+      </p:sp>
       <mc:AlternateContent xmlns:mc="http://schemas.openxmlformats.org/markup-compatibility/2006">
         <mc:Choice xmlns:a14="http://schemas.microsoft.com/office/drawing/2010/main" Requires="a14">
           <p:sp>
@@ -7403,10 +9537,13 @@
               <a:lstStyle/>
               <a:p>
                 <a:pPr lvl="0" indent="0" marL="0">
+                  <a:spcBef>
+                    <a:spcPts val="3000"/>
+                  </a:spcBef>
                   <a:buNone/>
                 </a:pPr>
                 <a:r>
-                  <a:rPr/>
+                  <a:rPr b="1"/>
                   <a:t>Need to account for increase in fit with added predictors:</a:t>
                 </a:r>
               </a:p>
@@ -7436,6 +9573,20 @@
                 <a:r>
                   <a:rPr/>
                   <a:t>Higher adjusted r2 and lower AIC are better when comparing models</a:t>
+                </a:r>
+              </a:p>
+              <a:p>
+                <a:pPr lvl="1"/>
+                <a:r>
+                  <a:rPr/>
+                  <a:t>p = predictors</a:t>
+                </a:r>
+              </a:p>
+              <a:p>
+                <a:pPr lvl="1"/>
+                <a:r>
+                  <a:rPr/>
+                  <a:t>n = #</a:t>
                 </a:r>
               </a:p>
               <a:p>
@@ -7751,131 +9902,6 @@
 </p:sld>
 </file>
 
-<file path=ppt/slides/slide33.xml><?xml version="1.0" encoding="utf-8"?>
-<p:sld xmlns:a="http://schemas.openxmlformats.org/drawingml/2006/main" xmlns:r="http://schemas.openxmlformats.org/officeDocument/2006/relationships" xmlns:p="http://schemas.openxmlformats.org/presentationml/2006/main">
-  <p:cSld>
-    <p:spTree>
-      <p:nvGrpSpPr>
-        <p:cNvPr id="1" name=""/>
-        <p:cNvGrpSpPr/>
-        <p:nvPr/>
-      </p:nvGrpSpPr>
-      <p:grpSpPr>
-        <a:xfrm>
-          <a:off x="0" y="0"/>
-          <a:ext cx="0" cy="0"/>
-          <a:chOff x="0" y="0"/>
-          <a:chExt cx="0" cy="0"/>
-        </a:xfrm>
-      </p:grpSpPr>
-      <p:sp>
-        <p:nvSpPr>
-          <p:cNvPr id="2" name="Title 1"/>
-          <p:cNvSpPr>
-            <a:spLocks noGrp="1"/>
-          </p:cNvSpPr>
-          <p:nvPr>
-            <p:ph type="title"/>
-          </p:nvPr>
-        </p:nvSpPr>
-        <p:spPr>
-          <a:xfrm>
-            <a:off x="0" y="0"/>
-            <a:ext cx="9144000" cy="582780"/>
-          </a:xfrm>
-        </p:spPr>
-        <p:txBody>
-          <a:bodyPr/>
-          <a:lstStyle/>
-          <a:p>
-            <a:pPr lvl="0" indent="0" marL="0">
-              <a:buNone/>
-            </a:pPr>
-            <a:r>
-              <a:rPr b="1"/>
-              <a:t>Lecture 10:</a:t>
-            </a:r>
-            <a:r>
-              <a:rPr/>
-              <a:t> Comparing models</a:t>
-            </a:r>
-          </a:p>
-        </p:txBody>
-      </p:sp>
-      <p:sp>
-        <p:nvSpPr>
-          <p:cNvPr id="3" name="Content Placeholder 2"/>
-          <p:cNvSpPr>
-            <a:spLocks noGrp="1"/>
-          </p:cNvSpPr>
-          <p:nvPr>
-            <p:ph idx="1"/>
-          </p:nvPr>
-        </p:nvSpPr>
-        <p:spPr/>
-        <p:txBody>
-          <a:bodyPr/>
-          <a:lstStyle/>
-          <a:p>
-            <a:pPr lvl="0" indent="0" marL="0">
-              <a:buNone/>
-            </a:pPr>
-            <a:r>
-              <a:rPr/>
-              <a:t>But how to compare models?</a:t>
-            </a:r>
-          </a:p>
-          <a:p>
-            <a:pPr lvl="0"/>
-            <a:r>
-              <a:rPr/>
-              <a:t>Can fit all possible models</a:t>
-            </a:r>
-          </a:p>
-          <a:p>
-            <a:pPr lvl="1"/>
-            <a:r>
-              <a:rPr/>
-              <a:t>compare AICs or adj- r2,</a:t>
-            </a:r>
-          </a:p>
-          <a:p>
-            <a:pPr lvl="1"/>
-            <a:r>
-              <a:rPr/>
-              <a:t>tedious w lots of predictors</a:t>
-            </a:r>
-          </a:p>
-          <a:p>
-            <a:pPr lvl="0"/>
-            <a:r>
-              <a:rPr/>
-              <a:t>Automated forward (and backward) stepwise procedures: start w no terms (all terms), add (remove) terms w largest (smallest)</a:t>
-            </a:r>
-          </a:p>
-          <a:p>
-            <a:pPr lvl="1"/>
-            <a:r>
-              <a:rPr/>
-              <a:t>partial F statistic</a:t>
-            </a:r>
-          </a:p>
-          <a:p>
-            <a:pPr lvl="0" indent="0" marL="0">
-              <a:buNone/>
-            </a:pPr>
-            <a:r>
-              <a:rPr/>
-              <a:t>We will use manual form of backward selection</a:t>
-            </a:r>
-          </a:p>
-        </p:txBody>
-      </p:sp>
-    </p:spTree>
-  </p:cSld>
-</p:sld>
-</file>
-
 <file path=ppt/slides/slide34.xml><?xml version="1.0" encoding="utf-8"?>
 <p:sld xmlns:a="http://schemas.openxmlformats.org/drawingml/2006/main" xmlns:r="http://schemas.openxmlformats.org/officeDocument/2006/relationships" xmlns:p="http://schemas.openxmlformats.org/presentationml/2006/main">
   <p:cSld>
@@ -7922,7 +9948,72 @@
             </a:r>
             <a:r>
               <a:rPr/>
-              <a:t> Analyses</a:t>
+              <a:t> Comparing models</a:t>
+            </a:r>
+          </a:p>
+        </p:txBody>
+      </p:sp>
+      <p:sp>
+        <p:nvSpPr>
+          <p:cNvPr id="3" name="Content Placeholder 2"/>
+          <p:cNvSpPr>
+            <a:spLocks noGrp="1"/>
+          </p:cNvSpPr>
+          <p:nvPr>
+            <p:ph idx="1"/>
+          </p:nvPr>
+        </p:nvSpPr>
+        <p:spPr/>
+        <p:txBody>
+          <a:bodyPr/>
+          <a:lstStyle/>
+          <a:p>
+            <a:pPr lvl="0"/>
+            <a:r>
+              <a:rPr/>
+              <a:t>But how to compare models?</a:t>
+            </a:r>
+          </a:p>
+          <a:p>
+            <a:pPr lvl="1"/>
+            <a:r>
+              <a:rPr/>
+              <a:t>Can fit all possible models</a:t>
+            </a:r>
+          </a:p>
+          <a:p>
+            <a:pPr lvl="2"/>
+            <a:r>
+              <a:rPr/>
+              <a:t>compare AICs or adj- r2,</a:t>
+            </a:r>
+          </a:p>
+          <a:p>
+            <a:pPr lvl="2"/>
+            <a:r>
+              <a:rPr/>
+              <a:t>tedious w lots of predictors</a:t>
+            </a:r>
+          </a:p>
+          <a:p>
+            <a:pPr lvl="1"/>
+            <a:r>
+              <a:rPr/>
+              <a:t>Automated forward (and backward) stepwise procedures: start w no terms (all terms), add (remove) terms w largest (smallest)</a:t>
+            </a:r>
+          </a:p>
+          <a:p>
+            <a:pPr lvl="2"/>
+            <a:r>
+              <a:rPr/>
+              <a:t>partial F statistic</a:t>
+            </a:r>
+          </a:p>
+          <a:p>
+            <a:pPr lvl="0"/>
+            <a:r>
+              <a:rPr/>
+              <a:t>We will use manual form of backward selection</a:t>
             </a:r>
           </a:p>
         </p:txBody>
@@ -7978,7 +10069,7 @@
             </a:r>
             <a:r>
               <a:rPr/>
-              <a:t> Predictors</a:t>
+              <a:t> Analyses</a:t>
             </a:r>
           </a:p>
         </p:txBody>
@@ -7998,40 +10089,41 @@
           <a:bodyPr/>
           <a:lstStyle/>
           <a:p>
-            <a:pPr lvl="0" indent="0" marL="0">
+            <a:pPr lvl="0" indent="0">
               <a:buNone/>
             </a:pPr>
             <a:r>
-              <a:rPr/>
-              <a:t>Usually want to know relative importance of predictors to explaining Y</a:t>
-            </a:r>
-          </a:p>
-          <a:p>
-            <a:pPr lvl="0"/>
-            <a:r>
-              <a:rPr/>
-              <a:t>Three general approaches:</a:t>
-            </a:r>
-          </a:p>
-          <a:p>
-            <a:pPr lvl="0"/>
-            <a:r>
-              <a:rPr/>
-              <a:t>Using F-tests (or t-tests) on partial regression slopes</a:t>
-            </a:r>
-          </a:p>
-          <a:p>
-            <a:pPr lvl="0"/>
-            <a:r>
-              <a:rPr/>
-              <a:t>Using coefficient of partial determination</a:t>
-            </a:r>
-          </a:p>
-          <a:p>
-            <a:pPr lvl="0"/>
-            <a:r>
-              <a:rPr/>
-              <a:t>Using standardized partial regression slopes</a:t>
+              <a:rPr>
+                <a:latin typeface="Courier"/>
+              </a:rPr>
+              <a:t>
+========== FULL MODEL (Both Variables) ==========</a:t>
+            </a:r>
+          </a:p>
+          <a:p>
+            <a:pPr lvl="0" indent="0">
+              <a:buNone/>
+            </a:pPr>
+            <a:r>
+              <a:rPr>
+                <a:latin typeface="Courier"/>
+              </a:rPr>
+              <a:t>
+Call:
+lm(formula = ant_spp ~ elevation + latitude, data = ant_df)
+Residuals:
+    Min      1Q  Median      3Q     Max 
+-6.1180 -2.3759  0.3218  1.9070  5.8369 
+Coefficients:
+            Estimate Std. Error t value Pr(&gt;|t|)   
+(Intercept) 98.49651   26.50701   3.716  0.00147 **
+elevation   -0.01226    0.00411  -2.983  0.00765 **
+latitude    -2.00981    0.61956  -3.244  0.00427 **
+---
+Signif. codes:  0 '***' 0.001 '**' 0.01 '*' 0.05 '.' 0.1 ' ' 1
+Residual standard error: 3.022 on 19 degrees of freedom
+Multiple R-squared:  0.5543,    Adjusted R-squared:  0.5074 
+F-statistic: 11.82 on 2 and 19 DF,  p-value: 0.000463</a:t>
             </a:r>
           </a:p>
         </p:txBody>
@@ -8087,7 +10179,7 @@
             </a:r>
             <a:r>
               <a:rPr/>
-              <a:t> Predictors</a:t>
+              <a:t> Analyses</a:t>
             </a:r>
           </a:p>
         </p:txBody>
@@ -8107,40 +10199,40 @@
           <a:bodyPr/>
           <a:lstStyle/>
           <a:p>
-            <a:pPr lvl="0" indent="0" marL="0">
+            <a:pPr lvl="0" indent="0">
               <a:buNone/>
             </a:pPr>
             <a:r>
-              <a:rPr/>
-              <a:t>Using F-tests (or t-tests) on partial regression slopes:</a:t>
-            </a:r>
-          </a:p>
-          <a:p>
-            <a:pPr lvl="0"/>
-            <a:r>
-              <a:rPr/>
-              <a:t>Conduct F tests of Ho that each partial regression slope = 0</a:t>
-            </a:r>
-          </a:p>
-          <a:p>
-            <a:pPr lvl="0"/>
-            <a:r>
-              <a:rPr/>
-              <a:t>If cannot reject Ho, discard predictor</a:t>
-            </a:r>
-          </a:p>
-          <a:p>
-            <a:pPr lvl="0"/>
-            <a:r>
-              <a:rPr/>
-              <a:t>Can get additional clues from relative size of F-values</a:t>
-            </a:r>
-          </a:p>
-          <a:p>
-            <a:pPr lvl="0"/>
-            <a:r>
-              <a:rPr/>
-              <a:t>Does not tell us absolute importance of predictor (usually can not directly compare slope parameters)</a:t>
+              <a:rPr>
+                <a:latin typeface="Courier"/>
+              </a:rPr>
+              <a:t>
+========== ELEVATION ONLY MODEL ==========</a:t>
+            </a:r>
+          </a:p>
+          <a:p>
+            <a:pPr lvl="0" indent="0">
+              <a:buNone/>
+            </a:pPr>
+            <a:r>
+              <a:rPr>
+                <a:latin typeface="Courier"/>
+              </a:rPr>
+              <a:t>
+Call:
+lm(formula = ant_spp ~ elevation, data = ant_df)
+Residuals:
+    Min      1Q  Median      3Q     Max 
+-4.9010 -2.6947 -0.9502  2.9657  7.6363 
+Coefficients:
+             Estimate Std. Error t value Pr(&gt;|t|)    
+(Intercept) 12.589088   1.385615   9.086 1.55e-08 ***
+elevation   -0.014641   0.004913  -2.980   0.0074 ** 
+---
+Signif. codes:  0 '***' 0.001 '**' 0.01 '*' 0.05 '.' 0.1 ' ' 1
+Residual standard error: 3.671 on 20 degrees of freedom
+Multiple R-squared:  0.3075,    Adjusted R-squared:  0.2729 
+F-statistic: 8.881 on 1 and 20 DF,  p-value: 0.0074</a:t>
             </a:r>
           </a:p>
         </p:txBody>
@@ -8196,170 +10288,64 @@
             </a:r>
             <a:r>
               <a:rPr/>
-              <a:t> Predictors</a:t>
-            </a:r>
-          </a:p>
-        </p:txBody>
-      </p:sp>
-      <mc:AlternateContent xmlns:mc="http://schemas.openxmlformats.org/markup-compatibility/2006">
-        <mc:Choice xmlns:a14="http://schemas.microsoft.com/office/drawing/2010/main" Requires="a14">
-          <p:sp>
-            <p:nvSpPr>
-              <p:cNvPr id="3" name="Content Placeholder 2"/>
-              <p:cNvSpPr>
-                <a:spLocks noGrp="1"/>
-              </p:cNvSpPr>
-              <p:nvPr>
-                <p:ph idx="1"/>
-              </p:nvPr>
-            </p:nvSpPr>
-            <p:spPr/>
-            <p:txBody>
-              <a:bodyPr/>
-              <a:lstStyle/>
-              <a:p>
-                <a:pPr lvl="0" indent="0" marL="0">
-                  <a:buNone/>
-                </a:pPr>
-                <a:r>
-                  <a:rPr/>
-                  <a:t>Using coefficient of partial determination:</a:t>
-                </a:r>
-              </a:p>
-              <a:p>
-                <a:pPr lvl="0"/>
-                <a:r>
-                  <a:rPr/>
-                  <a:t>the reduction in variation of Y due to addition of predictor (Xj)</a:t>
-                </a:r>
-              </a:p>
-              <a:p>
-                <a:pPr lvl="0" indent="0" marL="0">
-                  <a:buNone/>
-                </a:pPr>
-                <a14:m>
-                  <m:oMathPara xmlns:m="http://schemas.openxmlformats.org/officeDocument/2006/math">
-                    <m:oMathParaPr>
-                      <m:jc m:val="center"/>
-                    </m:oMathParaPr>
-                    <m:oMath>
-                      <m:sSubSup>
-                        <m:e>
-                          <m:r>
-                            <m:t>r</m:t>
-                          </m:r>
-                        </m:e>
-                        <m:sub>
-                          <m:sSub>
-                            <m:e>
-                              <m:r>
-                                <m:t>X</m:t>
-                              </m:r>
-                            </m:e>
-                            <m:sub>
-                              <m:r>
-                                <m:t>j</m:t>
-                              </m:r>
-                            </m:sub>
-                          </m:sSub>
-                        </m:sub>
-                        <m:sup>
-                          <m:r>
-                            <m:t>2</m:t>
-                          </m:r>
-                        </m:sup>
-                      </m:sSubSup>
-                      <m:r>
-                        <m:rPr>
-                          <m:sty m:val="p"/>
-                        </m:rPr>
-                        <m:t>=</m:t>
-                      </m:r>
-                      <m:f>
-                        <m:fPr>
-                          <m:type m:val="bar"/>
-                        </m:fPr>
-                        <m:num>
-                          <m:r>
-                            <m:t>S</m:t>
-                          </m:r>
-                          <m:sSub>
-                            <m:e>
-                              <m:r>
-                                <m:t>S</m:t>
-                              </m:r>
-                            </m:e>
-                            <m:sub>
-                              <m:r>
-                                <m:rPr>
-                                  <m:nor/>
-                                  <m:sty m:val="p"/>
-                                </m:rPr>
-                                <m:t>Extra</m:t>
-                              </m:r>
-                            </m:sub>
-                          </m:sSub>
-                        </m:num>
-                        <m:den>
-                          <m:r>
-                            <m:rPr>
-                              <m:nor/>
-                              <m:sty m:val="p"/>
-                            </m:rPr>
-                            <m:t>Reduced </m:t>
-                          </m:r>
-                          <m:r>
-                            <m:t>S</m:t>
-                          </m:r>
-                          <m:sSub>
-                            <m:e>
-                              <m:r>
-                                <m:t>S</m:t>
-                              </m:r>
-                            </m:e>
-                            <m:sub>
-                              <m:r>
-                                <m:rPr>
-                                  <m:nor/>
-                                  <m:sty m:val="p"/>
-                                </m:rPr>
-                                <m:t>Residual</m:t>
-                              </m:r>
-                            </m:sub>
-                          </m:sSub>
-                        </m:den>
-                      </m:f>
-                    </m:oMath>
-                  </m:oMathPara>
-                </a14:m>
-              </a:p>
-              <a:p>
-                <a:pPr lvl="0" indent="0" marL="0">
-                  <a:buNone/>
-                </a:pPr>
-                <a:r>
-                  <a:rPr/>
-                  <a:t>SSextra</a:t>
-                </a:r>
-              </a:p>
-              <a:p>
-                <a:pPr lvl="0"/>
-                <a:r>
-                  <a:rPr/>
-                  <a:t>Increased in SSregression when Xj is added to model</a:t>
-                </a:r>
-              </a:p>
-              <a:p>
-                <a:pPr lvl="0"/>
-                <a:r>
-                  <a:rPr/>
-                  <a:t>Reduced SSresidual is the unexplained SS from model without Xj</a:t>
-                </a:r>
-              </a:p>
-            </p:txBody>
-          </p:sp>
-        </mc:Choice>
-      </mc:AlternateContent>
+              <a:t> Analyses</a:t>
+            </a:r>
+          </a:p>
+        </p:txBody>
+      </p:sp>
+      <p:sp>
+        <p:nvSpPr>
+          <p:cNvPr id="3" name="Content Placeholder 2"/>
+          <p:cNvSpPr>
+            <a:spLocks noGrp="1"/>
+          </p:cNvSpPr>
+          <p:nvPr>
+            <p:ph idx="1"/>
+          </p:nvPr>
+        </p:nvSpPr>
+        <p:spPr/>
+        <p:txBody>
+          <a:bodyPr/>
+          <a:lstStyle/>
+          <a:p>
+            <a:pPr lvl="0" indent="0">
+              <a:buNone/>
+            </a:pPr>
+            <a:r>
+              <a:rPr>
+                <a:latin typeface="Courier"/>
+              </a:rPr>
+              <a:t>
+========== LATITUDE ONLY MODEL ==========</a:t>
+            </a:r>
+          </a:p>
+          <a:p>
+            <a:pPr lvl="0" indent="0">
+              <a:buNone/>
+            </a:pPr>
+            <a:r>
+              <a:rPr>
+                <a:latin typeface="Courier"/>
+              </a:rPr>
+              <a:t>
+Call:
+lm(formula = ant_spp ~ latitude, data = ant_df)
+Residuals:
+    Min      1Q  Median      3Q     Max 
+-6.2223 -2.1188  0.0599  2.1267  6.4990 
+Coefficients:
+            Estimate Std. Error t value Pr(&gt;|t|)   
+(Intercept) 109.8532    30.9803   3.546  0.00203 **
+latitude     -2.3401     0.7199  -3.251  0.00401 **
+---
+Signif. codes:  0 '***' 0.001 '**' 0.01 '*' 0.05 '.' 0.1 ' ' 1
+Residual standard error: 3.569 on 20 degrees of freedom
+Multiple R-squared:  0.3457,    Adjusted R-squared:  0.313 
+F-statistic: 10.57 on 1 and 20 DF,  p-value: 0.004006</a:t>
+            </a:r>
+          </a:p>
+        </p:txBody>
+      </p:sp>
     </p:spTree>
   </p:cSld>
 </p:sld>
@@ -8411,7 +10397,7 @@
             </a:r>
             <a:r>
               <a:rPr/>
-              <a:t> Predictors</a:t>
+              <a:t> Analyses</a:t>
             </a:r>
           </a:p>
         </p:txBody>
@@ -8431,40 +10417,165 @@
           <a:bodyPr/>
           <a:lstStyle/>
           <a:p>
-            <a:pPr lvl="0" indent="0" marL="0">
+            <a:pPr lvl="0" indent="0">
               <a:buNone/>
             </a:pPr>
             <a:r>
-              <a:rPr/>
-              <a:t>Using standardized partial regression slopes:</a:t>
-            </a:r>
-          </a:p>
-          <a:p>
-            <a:pPr lvl="0"/>
-            <a:r>
-              <a:rPr/>
-              <a:t>predictors of predictor variables can not be directly compared</a:t>
-            </a:r>
-          </a:p>
-          <a:p>
-            <a:pPr lvl="0"/>
-            <a:r>
-              <a:rPr/>
-              <a:t>Why?</a:t>
-            </a:r>
-          </a:p>
-          <a:p>
-            <a:pPr lvl="0"/>
-            <a:r>
-              <a:rPr/>
-              <a:t>Standardize all vars (mean = 0, sd= 1)</a:t>
-            </a:r>
-          </a:p>
-          <a:p>
-            <a:pPr lvl="0"/>
-            <a:r>
-              <a:rPr/>
-              <a:t>Scales are identical and larger PRS mean more important variable</a:t>
+              <a:rPr>
+                <a:latin typeface="Courier"/>
+              </a:rPr>
+              <a:t>
+========== MODEL COMPARISON TABLE ==========</a:t>
+            </a:r>
+          </a:p>
+          <a:p>
+            <a:pPr lvl="0" indent="0">
+              <a:buNone/>
+            </a:pPr>
+            <a:r>
+              <a:rPr>
+                <a:latin typeface="Courier"/>
+              </a:rPr>
+              <a:t>           Model Adjusted_R2      AIC R2_vs_Full AIC_vs_Full
+1 Both Variables   0.5074180 115.8646  0.0000000    0.000000
+2 Elevation Only   0.2728722 123.5608 -0.2345459    7.696164
+3  Latitude Only   0.3129580 122.3132 -0.1944600    6.448613</a:t>
+            </a:r>
+          </a:p>
+          <a:p>
+            <a:pPr lvl="0" indent="0">
+              <a:buNone/>
+            </a:pPr>
+            <a:r>
+              <a:rPr>
+                <a:latin typeface="Courier"/>
+              </a:rPr>
+              <a:t>
+========== KEY FINDINGS ==========</a:t>
+            </a:r>
+          </a:p>
+          <a:p>
+            <a:pPr lvl="0" indent="0">
+              <a:buNone/>
+            </a:pPr>
+            <a:r>
+              <a:rPr>
+                <a:latin typeface="Courier"/>
+              </a:rPr>
+              <a:t>Full Model AIC: 115.86 (Adjusted R²: 0.5074)</a:t>
+            </a:r>
+          </a:p>
+          <a:p>
+            <a:pPr lvl="0" indent="0">
+              <a:buNone/>
+            </a:pPr>
+            <a:r>
+              <a:rPr>
+                <a:latin typeface="Courier"/>
+              </a:rPr>
+              <a:t>Elevation Only AIC: 123.56 (Adjusted R²: 0.2729)</a:t>
+            </a:r>
+          </a:p>
+          <a:p>
+            <a:pPr lvl="0" indent="0">
+              <a:buNone/>
+            </a:pPr>
+            <a:r>
+              <a:rPr>
+                <a:latin typeface="Courier"/>
+              </a:rPr>
+              <a:t>Latitude Only AIC: 122.31 (Adjusted R²: 0.3130)</a:t>
+            </a:r>
+          </a:p>
+          <a:p>
+            <a:pPr lvl="0" indent="0">
+              <a:buNone/>
+            </a:pPr>
+            <a:r>
+              <a:rPr>
+                <a:latin typeface="Courier"/>
+              </a:rPr>
+              <a:t>
+--- Differences from Full Model ---</a:t>
+            </a:r>
+          </a:p>
+          <a:p>
+            <a:pPr lvl="0" indent="0">
+              <a:buNone/>
+            </a:pPr>
+            <a:r>
+              <a:rPr>
+                <a:latin typeface="Courier"/>
+              </a:rPr>
+              <a:t>Removing latitude: AIC increases by 7.70, Adj R² decreases by -0.2345</a:t>
+            </a:r>
+          </a:p>
+          <a:p>
+            <a:pPr lvl="0" indent="0">
+              <a:buNone/>
+            </a:pPr>
+            <a:r>
+              <a:rPr>
+                <a:latin typeface="Courier"/>
+              </a:rPr>
+              <a:t>Removing elevation: AIC increases by 6.45, Adj R² decreases by -0.1945</a:t>
+            </a:r>
+          </a:p>
+          <a:p>
+            <a:pPr lvl="0" indent="0">
+              <a:buNone/>
+            </a:pPr>
+            <a:r>
+              <a:rPr>
+                <a:latin typeface="Courier"/>
+              </a:rPr>
+              <a:t>
+========== CONCLUSION ==========</a:t>
+            </a:r>
+          </a:p>
+          <a:p>
+            <a:pPr lvl="0" indent="0">
+              <a:buNone/>
+            </a:pPr>
+            <a:r>
+              <a:rPr>
+                <a:latin typeface="Courier"/>
+              </a:rPr>
+              <a:t>✓ Full model has LOWEST AIC (best fit)</a:t>
+            </a:r>
+          </a:p>
+          <a:p>
+            <a:pPr lvl="0" indent="0">
+              <a:buNone/>
+            </a:pPr>
+            <a:r>
+              <a:rPr>
+                <a:latin typeface="Courier"/>
+              </a:rPr>
+              <a:t>✓ Full model has HIGHEST Adjusted R² (explains most variance)</a:t>
+            </a:r>
+          </a:p>
+          <a:p>
+            <a:pPr lvl="0" indent="0">
+              <a:buNone/>
+            </a:pPr>
+            <a:r>
+              <a:rPr>
+                <a:latin typeface="Courier"/>
+              </a:rPr>
+              <a:t>✗ Removing either variable worsens model performance</a:t>
+            </a:r>
+          </a:p>
+          <a:p>
+            <a:pPr lvl="0" indent="0">
+              <a:buNone/>
+            </a:pPr>
+            <a:r>
+              <a:rPr>
+                <a:latin typeface="Courier"/>
+              </a:rPr>
+              <a:t>
+Both elevation and latitude are important predictors of ant species diversity!</a:t>
             </a:r>
           </a:p>
         </p:txBody>
@@ -8504,11 +10615,8 @@
         <p:spPr>
           <a:xfrm>
             <a:off x="0" y="0"/>
-            <a:ext cx="9144000" cy="602780"/>
+            <a:ext cx="9144000" cy="582780"/>
           </a:xfrm>
-          <a:solidFill>
-            <a:srgbClr val="70121D"/>
-          </a:solidFill>
         </p:spPr>
         <p:txBody>
           <a:bodyPr/>
@@ -8535,7 +10643,7 @@
             <a:spLocks noGrp="1"/>
           </p:cNvSpPr>
           <p:nvPr>
-            <p:ph idx="1" sz="half"/>
+            <p:ph idx="1"/>
           </p:nvPr>
         </p:nvSpPr>
         <p:spPr/>
@@ -8548,41 +10656,39 @@
             </a:pPr>
             <a:r>
               <a:rPr/>
-              <a:t>Using partial r2 values:</a:t>
-            </a:r>
-          </a:p>
-        </p:txBody>
-      </p:sp>
-      <p:pic>
-        <p:nvPicPr>
-          <p:cNvPr descr="images/clipboard-2521916586.png" id="0" name="Picture 1"/>
-          <p:cNvPicPr>
-            <a:picLocks noGrp="1" noChangeAspect="1"/>
-          </p:cNvPicPr>
-          <p:nvPr/>
-        </p:nvPicPr>
-        <p:blipFill>
-          <a:blip r:embed="rId2"/>
-          <a:stretch>
-            <a:fillRect/>
-          </a:stretch>
-        </p:blipFill>
-        <p:spPr bwMode="auto">
-          <a:xfrm>
-            <a:off x="6121400" y="2362200"/>
-            <a:ext cx="2781300" cy="1066800"/>
-          </a:xfrm>
-          <a:prstGeom prst="rect">
-            <a:avLst/>
-          </a:prstGeom>
-          <a:noFill/>
-          <a:ln w="9525">
-            <a:noFill/>
-            <a:headEnd/>
-            <a:tailEnd/>
-          </a:ln>
-        </p:spPr>
-      </p:pic>
+              <a:t>Usually want to know relative importance of predictors to explaining Y</a:t>
+            </a:r>
+          </a:p>
+          <a:p>
+            <a:pPr lvl="0"/>
+            <a:r>
+              <a:rPr/>
+              <a:t>Three general approaches:</a:t>
+            </a:r>
+          </a:p>
+          <a:p>
+            <a:pPr lvl="0"/>
+            <a:r>
+              <a:rPr/>
+              <a:t>Using F-tests (or t-tests) on partial regression slopes</a:t>
+            </a:r>
+          </a:p>
+          <a:p>
+            <a:pPr lvl="0"/>
+            <a:r>
+              <a:rPr/>
+              <a:t>Using coefficient of partial determination</a:t>
+            </a:r>
+          </a:p>
+          <a:p>
+            <a:pPr lvl="0"/>
+            <a:r>
+              <a:rPr/>
+              <a:t>Using standardized partial regression slopes</a:t>
+            </a:r>
+          </a:p>
+        </p:txBody>
+      </p:sp>
     </p:spTree>
   </p:cSld>
 </p:sld>
@@ -8881,13 +10987,7 @@
                     <a:bodyPr/>
                     <a:lstStyle/>
                     <a:p>
-                      <a:pPr lvl="0" indent="0" marL="0" algn="l">
-                        <a:buNone/>
-                      </a:pPr>
-                      <a:r>
-                        <a:rPr/>
-                        <a:t>Tabular</a:t>
-                      </a:r>
+                      <a:endParaRPr/>
                     </a:p>
                   </a:txBody>
                 </a:tc>
@@ -8931,11 +11031,8 @@
         <p:spPr>
           <a:xfrm>
             <a:off x="0" y="0"/>
-            <a:ext cx="9144000" cy="602780"/>
+            <a:ext cx="9144000" cy="582780"/>
           </a:xfrm>
-          <a:solidFill>
-            <a:srgbClr val="70121D"/>
-          </a:solidFill>
         </p:spPr>
         <p:txBody>
           <a:bodyPr/>
@@ -8950,7 +11047,7 @@
             </a:r>
             <a:r>
               <a:rPr/>
-              <a:t> Reporting results</a:t>
+              <a:t> Predictors</a:t>
             </a:r>
           </a:p>
         </p:txBody>
@@ -8962,7 +11059,7 @@
             <a:spLocks noGrp="1"/>
           </p:cNvSpPr>
           <p:nvPr>
-            <p:ph idx="1" sz="half"/>
+            <p:ph idx="1"/>
           </p:nvPr>
         </p:nvSpPr>
         <p:spPr/>
@@ -8975,41 +11072,39 @@
             </a:pPr>
             <a:r>
               <a:rPr/>
-              <a:t>Results are easiest to report in tabular format</a:t>
-            </a:r>
-          </a:p>
-        </p:txBody>
-      </p:sp>
-      <p:pic>
-        <p:nvPicPr>
-          <p:cNvPr descr="images/clipboard-829166687.png" id="0" name="Picture 1"/>
-          <p:cNvPicPr>
-            <a:picLocks noGrp="1" noChangeAspect="1"/>
-          </p:cNvPicPr>
-          <p:nvPr/>
-        </p:nvPicPr>
-        <p:blipFill>
-          <a:blip r:embed="rId2"/>
-          <a:stretch>
-            <a:fillRect/>
-          </a:stretch>
-        </p:blipFill>
-        <p:spPr bwMode="auto">
-          <a:xfrm>
-            <a:off x="6121400" y="1701800"/>
-            <a:ext cx="2781300" cy="2387600"/>
-          </a:xfrm>
-          <a:prstGeom prst="rect">
-            <a:avLst/>
-          </a:prstGeom>
-          <a:noFill/>
-          <a:ln w="9525">
-            <a:noFill/>
-            <a:headEnd/>
-            <a:tailEnd/>
-          </a:ln>
-        </p:spPr>
-      </p:pic>
+              <a:t>Using F-tests (or t-tests) on partial regression slopes:</a:t>
+            </a:r>
+          </a:p>
+          <a:p>
+            <a:pPr lvl="0"/>
+            <a:r>
+              <a:rPr/>
+              <a:t>Conduct F tests of Ho that each partial regression slope = 0</a:t>
+            </a:r>
+          </a:p>
+          <a:p>
+            <a:pPr lvl="0"/>
+            <a:r>
+              <a:rPr/>
+              <a:t>If cannot reject Ho, discard predictor</a:t>
+            </a:r>
+          </a:p>
+          <a:p>
+            <a:pPr lvl="0"/>
+            <a:r>
+              <a:rPr/>
+              <a:t>Can get additional clues from relative size of F-values</a:t>
+            </a:r>
+          </a:p>
+          <a:p>
+            <a:pPr lvl="0"/>
+            <a:r>
+              <a:rPr/>
+              <a:t>Does not tell us absolute importance of predictor (usually can not directly compare slope parameters)</a:t>
+            </a:r>
+          </a:p>
+        </p:txBody>
+      </p:sp>
     </p:spTree>
   </p:cSld>
 </p:sld>
@@ -9045,11 +11140,8 @@
         <p:spPr>
           <a:xfrm>
             <a:off x="0" y="0"/>
-            <a:ext cx="9144000" cy="602780"/>
+            <a:ext cx="9144000" cy="582780"/>
           </a:xfrm>
-          <a:solidFill>
-            <a:srgbClr val="70121D"/>
-          </a:solidFill>
         </p:spPr>
         <p:txBody>
           <a:bodyPr/>
@@ -9064,22 +11156,208 @@
             </a:r>
             <a:r>
               <a:rPr/>
-              <a:t> Reporting results</a:t>
-            </a:r>
-          </a:p>
-        </p:txBody>
-      </p:sp>
-      <p:sp>
-        <p:nvSpPr>
-          <p:cNvPr id="3" name="Content Placeholder 2"/>
-          <p:cNvSpPr>
-            <a:spLocks noGrp="1"/>
-          </p:cNvSpPr>
-          <p:nvPr>
-            <p:ph idx="1" sz="half"/>
-          </p:nvPr>
-        </p:nvSpPr>
-        <p:spPr/>
+              <a:t> Predictors</a:t>
+            </a:r>
+          </a:p>
+        </p:txBody>
+      </p:sp>
+      <mc:AlternateContent xmlns:mc="http://schemas.openxmlformats.org/markup-compatibility/2006">
+        <mc:Choice xmlns:a14="http://schemas.microsoft.com/office/drawing/2010/main" Requires="a14">
+          <p:sp>
+            <p:nvSpPr>
+              <p:cNvPr id="3" name="Content Placeholder 2"/>
+              <p:cNvSpPr>
+                <a:spLocks noGrp="1"/>
+              </p:cNvSpPr>
+              <p:nvPr>
+                <p:ph idx="1"/>
+              </p:nvPr>
+            </p:nvSpPr>
+            <p:spPr/>
+            <p:txBody>
+              <a:bodyPr/>
+              <a:lstStyle/>
+              <a:p>
+                <a:pPr lvl="0" indent="0" marL="0">
+                  <a:buNone/>
+                </a:pPr>
+                <a:r>
+                  <a:rPr/>
+                  <a:t>Using coefficient of partial determination:</a:t>
+                </a:r>
+              </a:p>
+              <a:p>
+                <a:pPr lvl="0"/>
+                <a:r>
+                  <a:rPr/>
+                  <a:t>the reduction in variation of Y due to addition of predictor (Xj)</a:t>
+                </a:r>
+              </a:p>
+              <a:p>
+                <a:pPr lvl="0" indent="0" marL="0">
+                  <a:buNone/>
+                </a:pPr>
+                <a14:m>
+                  <m:oMathPara xmlns:m="http://schemas.openxmlformats.org/officeDocument/2006/math">
+                    <m:oMathParaPr>
+                      <m:jc m:val="center"/>
+                    </m:oMathParaPr>
+                    <m:oMath>
+                      <m:sSubSup>
+                        <m:e>
+                          <m:r>
+                            <m:t>r</m:t>
+                          </m:r>
+                        </m:e>
+                        <m:sub>
+                          <m:sSub>
+                            <m:e>
+                              <m:r>
+                                <m:t>X</m:t>
+                              </m:r>
+                            </m:e>
+                            <m:sub>
+                              <m:r>
+                                <m:t>j</m:t>
+                              </m:r>
+                            </m:sub>
+                          </m:sSub>
+                        </m:sub>
+                        <m:sup>
+                          <m:r>
+                            <m:t>2</m:t>
+                          </m:r>
+                        </m:sup>
+                      </m:sSubSup>
+                      <m:r>
+                        <m:rPr>
+                          <m:sty m:val="p"/>
+                        </m:rPr>
+                        <m:t>=</m:t>
+                      </m:r>
+                      <m:f>
+                        <m:fPr>
+                          <m:type m:val="bar"/>
+                        </m:fPr>
+                        <m:num>
+                          <m:r>
+                            <m:t>S</m:t>
+                          </m:r>
+                          <m:sSub>
+                            <m:e>
+                              <m:r>
+                                <m:t>S</m:t>
+                              </m:r>
+                            </m:e>
+                            <m:sub>
+                              <m:r>
+                                <m:rPr>
+                                  <m:nor/>
+                                  <m:sty m:val="p"/>
+                                </m:rPr>
+                                <m:t>Extra</m:t>
+                              </m:r>
+                            </m:sub>
+                          </m:sSub>
+                        </m:num>
+                        <m:den>
+                          <m:r>
+                            <m:rPr>
+                              <m:nor/>
+                              <m:sty m:val="p"/>
+                            </m:rPr>
+                            <m:t>Reduced </m:t>
+                          </m:r>
+                          <m:r>
+                            <m:t>S</m:t>
+                          </m:r>
+                          <m:sSub>
+                            <m:e>
+                              <m:r>
+                                <m:t>S</m:t>
+                              </m:r>
+                            </m:e>
+                            <m:sub>
+                              <m:r>
+                                <m:rPr>
+                                  <m:nor/>
+                                  <m:sty m:val="p"/>
+                                </m:rPr>
+                                <m:t>Residual</m:t>
+                              </m:r>
+                            </m:sub>
+                          </m:sSub>
+                        </m:den>
+                      </m:f>
+                    </m:oMath>
+                  </m:oMathPara>
+                </a14:m>
+              </a:p>
+              <a:p>
+                <a:pPr lvl="0" indent="0" marL="0">
+                  <a:buNone/>
+                </a:pPr>
+                <a:r>
+                  <a:rPr/>
+                  <a:t>SSextra</a:t>
+                </a:r>
+              </a:p>
+              <a:p>
+                <a:pPr lvl="0"/>
+                <a:r>
+                  <a:rPr/>
+                  <a:t>Increased in SSregression when Xj is added to model</a:t>
+                </a:r>
+              </a:p>
+              <a:p>
+                <a:pPr lvl="0"/>
+                <a:r>
+                  <a:rPr/>
+                  <a:t>Reduced SSresidual is the unexplained SS from model without Xj</a:t>
+                </a:r>
+              </a:p>
+            </p:txBody>
+          </p:sp>
+        </mc:Choice>
+      </mc:AlternateContent>
+    </p:spTree>
+  </p:cSld>
+</p:sld>
+</file>
+
+<file path=ppt/slides/slide42.xml><?xml version="1.0" encoding="utf-8"?>
+<p:sld xmlns:a="http://schemas.openxmlformats.org/drawingml/2006/main" xmlns:r="http://schemas.openxmlformats.org/officeDocument/2006/relationships" xmlns:p="http://schemas.openxmlformats.org/presentationml/2006/main">
+  <p:cSld>
+    <p:spTree>
+      <p:nvGrpSpPr>
+        <p:cNvPr id="1" name=""/>
+        <p:cNvGrpSpPr/>
+        <p:nvPr/>
+      </p:nvGrpSpPr>
+      <p:grpSpPr>
+        <a:xfrm>
+          <a:off x="0" y="0"/>
+          <a:ext cx="0" cy="0"/>
+          <a:chOff x="0" y="0"/>
+          <a:chExt cx="0" cy="0"/>
+        </a:xfrm>
+      </p:grpSpPr>
+      <p:sp>
+        <p:nvSpPr>
+          <p:cNvPr id="2" name="Title 1"/>
+          <p:cNvSpPr>
+            <a:spLocks noGrp="1"/>
+          </p:cNvSpPr>
+          <p:nvPr>
+            <p:ph type="title"/>
+          </p:nvPr>
+        </p:nvSpPr>
+        <p:spPr>
+          <a:xfrm>
+            <a:off x="0" y="0"/>
+            <a:ext cx="9144000" cy="582780"/>
+          </a:xfrm>
+        </p:spPr>
         <p:txBody>
           <a:bodyPr/>
           <a:lstStyle/>
@@ -9088,42 +11366,345 @@
               <a:buNone/>
             </a:pPr>
             <a:r>
-              <a:rPr/>
-              <a:t>Results are easiest to report in tabular format</a:t>
-            </a:r>
-          </a:p>
-        </p:txBody>
-      </p:sp>
-      <p:pic>
-        <p:nvPicPr>
-          <p:cNvPr descr="images/clipboard-2807428674.png" id="0" name="Picture 1"/>
-          <p:cNvPicPr>
-            <a:picLocks noGrp="1" noChangeAspect="1"/>
-          </p:cNvPicPr>
-          <p:nvPr/>
-        </p:nvPicPr>
-        <p:blipFill>
-          <a:blip r:embed="rId2"/>
-          <a:stretch>
-            <a:fillRect/>
-          </a:stretch>
-        </p:blipFill>
-        <p:spPr bwMode="auto">
+              <a:rPr b="1"/>
+              <a:t>Lecture 10:</a:t>
+            </a:r>
+            <a:r>
+              <a:rPr/>
+              <a:t> Predictors</a:t>
+            </a:r>
+          </a:p>
+        </p:txBody>
+      </p:sp>
+      <p:sp>
+        <p:nvSpPr>
+          <p:cNvPr id="3" name="Content Placeholder 2"/>
+          <p:cNvSpPr>
+            <a:spLocks noGrp="1"/>
+          </p:cNvSpPr>
+          <p:nvPr>
+            <p:ph idx="1"/>
+          </p:nvPr>
+        </p:nvSpPr>
+        <p:spPr/>
+        <p:txBody>
+          <a:bodyPr/>
+          <a:lstStyle/>
+          <a:p>
+            <a:pPr lvl="0" indent="0" marL="0">
+              <a:spcBef>
+                <a:spcPts val="3000"/>
+              </a:spcBef>
+              <a:buNone/>
+            </a:pPr>
+            <a:r>
+              <a:rPr b="1"/>
+              <a:t>Using standardized partial regression slopes:</a:t>
+            </a:r>
+          </a:p>
+          <a:p>
+            <a:pPr lvl="0"/>
+            <a:r>
+              <a:rPr/>
+              <a:t>predictors of predictor variables can not be directly compared</a:t>
+            </a:r>
+          </a:p>
+          <a:p>
+            <a:pPr lvl="0"/>
+            <a:r>
+              <a:rPr/>
+              <a:t>Why?</a:t>
+            </a:r>
+          </a:p>
+          <a:p>
+            <a:pPr lvl="1"/>
+            <a:r>
+              <a:rPr/>
+              <a:t>Standardize all vars (mean = 0, sd= 1)</a:t>
+            </a:r>
+          </a:p>
+          <a:p>
+            <a:pPr lvl="1"/>
+            <a:r>
+              <a:rPr/>
+              <a:t>Scales are identical and larger PRS mean more important variable</a:t>
+            </a:r>
+          </a:p>
+        </p:txBody>
+      </p:sp>
+    </p:spTree>
+  </p:cSld>
+</p:sld>
+</file>
+
+<file path=ppt/slides/slide43.xml><?xml version="1.0" encoding="utf-8"?>
+<p:sld xmlns:a="http://schemas.openxmlformats.org/drawingml/2006/main" xmlns:r="http://schemas.openxmlformats.org/officeDocument/2006/relationships" xmlns:p="http://schemas.openxmlformats.org/presentationml/2006/main">
+  <p:cSld>
+    <p:spTree>
+      <p:nvGrpSpPr>
+        <p:cNvPr id="1" name=""/>
+        <p:cNvGrpSpPr/>
+        <p:nvPr/>
+      </p:nvGrpSpPr>
+      <p:grpSpPr>
+        <a:xfrm>
+          <a:off x="0" y="0"/>
+          <a:ext cx="0" cy="0"/>
+          <a:chOff x="0" y="0"/>
+          <a:chExt cx="0" cy="0"/>
+        </a:xfrm>
+      </p:grpSpPr>
+      <p:sp>
+        <p:nvSpPr>
+          <p:cNvPr id="2" name="Title 1"/>
+          <p:cNvSpPr>
+            <a:spLocks noGrp="1"/>
+          </p:cNvSpPr>
+          <p:nvPr>
+            <p:ph type="title"/>
+          </p:nvPr>
+        </p:nvSpPr>
+        <p:spPr>
           <a:xfrm>
-            <a:off x="6121400" y="2324100"/>
-            <a:ext cx="2781300" cy="1155700"/>
+            <a:off x="0" y="0"/>
+            <a:ext cx="9144000" cy="582780"/>
           </a:xfrm>
-          <a:prstGeom prst="rect">
-            <a:avLst/>
-          </a:prstGeom>
-          <a:noFill/>
-          <a:ln w="9525">
-            <a:noFill/>
-            <a:headEnd/>
-            <a:tailEnd/>
-          </a:ln>
         </p:spPr>
-      </p:pic>
+        <p:txBody>
+          <a:bodyPr/>
+          <a:lstStyle/>
+          <a:p>
+            <a:pPr lvl="0" indent="0" marL="0">
+              <a:buNone/>
+            </a:pPr>
+            <a:r>
+              <a:rPr b="1"/>
+              <a:t>Lecture 10:</a:t>
+            </a:r>
+            <a:r>
+              <a:rPr/>
+              <a:t> Predictors</a:t>
+            </a:r>
+          </a:p>
+        </p:txBody>
+      </p:sp>
+      <p:sp>
+        <p:nvSpPr>
+          <p:cNvPr id="3" name="Content Placeholder 2"/>
+          <p:cNvSpPr>
+            <a:spLocks noGrp="1"/>
+          </p:cNvSpPr>
+          <p:nvPr>
+            <p:ph idx="1"/>
+          </p:nvPr>
+        </p:nvSpPr>
+        <p:spPr/>
+        <p:txBody>
+          <a:bodyPr/>
+          <a:lstStyle/>
+          <a:p>
+            <a:pPr lvl="0"/>
+            <a:r>
+              <a:rPr/>
+              <a:t>Using partial r</a:t>
+            </a:r>
+            <a:r>
+              <a:rPr baseline="30000"/>
+              <a:t>2</a:t>
+            </a:r>
+            <a:r>
+              <a:rPr/>
+              <a:t> values</a:t>
+            </a:r>
+          </a:p>
+          <a:p>
+            <a:pPr lvl="1"/>
+            <a:r>
+              <a:rPr b="1"/>
+              <a:t>pEta_sqr (Partial Eta Squared):</a:t>
+            </a:r>
+          </a:p>
+          <a:p>
+            <a:pPr lvl="2"/>
+            <a:r>
+              <a:rPr b="1"/>
+              <a:t>Elevation: 0.3189 (31.9%)</a:t>
+            </a:r>
+            <a:r>
+              <a:rPr/>
+              <a:t> - Elevation explains 31.9% of the variance </a:t>
+            </a:r>
+            <a:r>
+              <a:rPr i="1"/>
+              <a:t>after controlling for latitude</a:t>
+            </a:r>
+          </a:p>
+          <a:p>
+            <a:pPr lvl="2"/>
+            <a:r>
+              <a:rPr b="1"/>
+              <a:t>Latitude: 0.3564 (35.6%)</a:t>
+            </a:r>
+            <a:r>
+              <a:rPr/>
+              <a:t> - Latitude explains 35.6% of the variance </a:t>
+            </a:r>
+            <a:r>
+              <a:rPr i="1"/>
+              <a:t>after controlling for elevation</a:t>
+            </a:r>
+          </a:p>
+          <a:p>
+            <a:pPr lvl="2"/>
+            <a:r>
+              <a:rPr/>
+              <a:t>Both are important predictors! Latitude is slightly stronger</a:t>
+            </a:r>
+          </a:p>
+          <a:p>
+            <a:pPr lvl="0"/>
+            <a:r>
+              <a:rPr/>
+              <a:t>dR_sqr (Delta R Squared / Semi-partial R²):</a:t>
+            </a:r>
+          </a:p>
+          <a:p>
+            <a:pPr lvl="1"/>
+            <a:r>
+              <a:rPr/>
+              <a:t>Elevation: 0.2087 (20.9%)</a:t>
+            </a:r>
+          </a:p>
+          <a:p>
+            <a:pPr lvl="2"/>
+            <a:r>
+              <a:rPr/>
+              <a:t>If you removed elevation from the model, R² would drop by 20.9%</a:t>
+            </a:r>
+          </a:p>
+          <a:p>
+            <a:pPr lvl="1"/>
+            <a:r>
+              <a:rPr/>
+              <a:t>Latitude: 0.2468 (24.7%)</a:t>
+            </a:r>
+          </a:p>
+          <a:p>
+            <a:pPr lvl="1"/>
+            <a:r>
+              <a:rPr/>
+              <a:t>If you removed latitude from the model, R² would drop by 24.7%</a:t>
+            </a:r>
+          </a:p>
+          <a:p>
+            <a:pPr lvl="0"/>
+            <a:r>
+              <a:rPr/>
+              <a:t>Shows the unique contribution of each predictor to the total variance explained</a:t>
+            </a:r>
+          </a:p>
+          <a:p>
+            <a:pPr lvl="0" indent="0">
+              <a:buNone/>
+            </a:pPr>
+            <a:r>
+              <a:rPr>
+                <a:latin typeface="Courier"/>
+              </a:rPr>
+              <a:t>
+== Method 2: Type II ANOVA (car package) ==</a:t>
+            </a:r>
+          </a:p>
+          <a:p>
+            <a:pPr lvl="0" indent="0">
+              <a:buNone/>
+            </a:pPr>
+            <a:r>
+              <a:rPr>
+                <a:latin typeface="Courier"/>
+              </a:rPr>
+              <a:t>Anova Table (Type II tests)
+Response: ant_spp
+           Sum Sq Df F value   Pr(&gt;F)   
+elevation  81.224  1  8.8955 0.007652 **
+latitude   96.085  1 10.5231 0.004272 **
+Residuals 173.487 19                    
+---
+Signif. codes:  0 '***' 0.001 '**' 0.01 '*' 0.05 '.' 0.1 ' ' 1</a:t>
+            </a:r>
+          </a:p>
+          <a:p>
+            <a:pPr lvl="0" indent="0">
+              <a:buNone/>
+            </a:pPr>
+            <a:r>
+              <a:rPr>
+                <a:latin typeface="Courier"/>
+              </a:rPr>
+              <a:t>== Coefficients Table ==</a:t>
+            </a:r>
+          </a:p>
+          <a:p>
+            <a:pPr lvl="0" indent="0">
+              <a:buNone/>
+            </a:pPr>
+            <a:r>
+              <a:rPr>
+                <a:latin typeface="Courier"/>
+              </a:rPr>
+              <a:t> Coefficients    SSR df pEta_sqr dR_sqr
+    elevation  81.22  1   0.3189 0.2087
+     latitude  96.09  1   0.3564 0.2468
+    Residuals 173.49 19   0.5000 0.4457</a:t>
+            </a:r>
+          </a:p>
+          <a:p>
+            <a:pPr lvl="0" indent="0">
+              <a:buNone/>
+            </a:pPr>
+            <a:r>
+              <a:rPr>
+                <a:latin typeface="Courier"/>
+              </a:rPr>
+              <a:t>
+== Summary Statistics ==</a:t>
+            </a:r>
+          </a:p>
+          <a:p>
+            <a:pPr lvl="0" indent="0">
+              <a:buNone/>
+            </a:pPr>
+            <a:r>
+              <a:rPr>
+                <a:latin typeface="Courier"/>
+              </a:rPr>
+              <a:t>Sum of squared errors (SSE): 173.5</a:t>
+            </a:r>
+          </a:p>
+          <a:p>
+            <a:pPr lvl="0" indent="0">
+              <a:buNone/>
+            </a:pPr>
+            <a:r>
+              <a:rPr>
+                <a:latin typeface="Courier"/>
+              </a:rPr>
+              <a:t>Sum of squared total (SST): 389.3</a:t>
+            </a:r>
+          </a:p>
+          <a:p>
+            <a:pPr lvl="0" indent="0">
+              <a:buNone/>
+            </a:pPr>
+            <a:r>
+              <a:rPr>
+                <a:latin typeface="Courier"/>
+              </a:rPr>
+              <a:t>Model R²: 0.5543</a:t>
+            </a:r>
+          </a:p>
+        </p:txBody>
+      </p:sp>
     </p:spTree>
   </p:cSld>
 </p:sld>
@@ -9203,7 +11784,7 @@
             </a:pPr>
             <a:r>
               <a:rPr/>
-              <a:t>Abundance of C3 grasses can be modeled as function of</a:t>
+              <a:t>Abundance of ants can be modeled as function of</a:t>
             </a:r>
           </a:p>
           <a:p>
@@ -9240,7 +11821,7 @@
       </p:sp>
       <p:pic>
         <p:nvPicPr>
-          <p:cNvPr descr="images/clipboard-716004937.png" id="0" name="Picture 1"/>
+          <p:cNvPr descr="10_01_lecture_powerpoint_files/figure-pptx/unnamed-chunk-1-1.png" id="0" name="Picture 1"/>
           <p:cNvPicPr>
             <a:picLocks noGrp="1" noChangeAspect="1"/>
           </p:cNvPicPr>
@@ -9254,8 +11835,8 @@
         </p:blipFill>
         <p:spPr bwMode="auto">
           <a:xfrm>
-            <a:off x="6121400" y="1714500"/>
-            <a:ext cx="2781300" cy="2374900"/>
+            <a:off x="6121400" y="2044700"/>
+            <a:ext cx="2781300" cy="1714500"/>
           </a:xfrm>
           <a:prstGeom prst="rect">
             <a:avLst/>
@@ -9380,31 +11961,36 @@
           </a:p>
         </p:txBody>
       </p:sp>
-      <p:sp>
-        <p:nvSpPr>
-          <p:cNvPr id="4" name="Content Placeholder 3"/>
-          <p:cNvSpPr>
-            <a:spLocks noGrp="1"/>
-          </p:cNvSpPr>
-          <p:nvPr>
-            <p:ph idx="2" sz="half"/>
-          </p:nvPr>
-        </p:nvSpPr>
-        <p:spPr/>
-        <p:txBody>
-          <a:bodyPr/>
-          <a:lstStyle/>
-          <a:p>
-            <a:pPr lvl="0" indent="0" marL="0">
-              <a:buNone/>
-            </a:pPr>
-            <a:r>
-              <a:rPr/>
-              <a:t>S</a:t>
-            </a:r>
-          </a:p>
-        </p:txBody>
-      </p:sp>
+      <p:pic>
+        <p:nvPicPr>
+          <p:cNvPr descr="10_01_lecture_powerpoint_files/figure-pptx/unnamed-chunk-2-1.png" id="0" name="Picture 1"/>
+          <p:cNvPicPr>
+            <a:picLocks noGrp="1" noChangeAspect="1"/>
+          </p:cNvPicPr>
+          <p:nvPr/>
+        </p:nvPicPr>
+        <p:blipFill>
+          <a:blip r:embed="rId2"/>
+          <a:stretch>
+            <a:fillRect/>
+          </a:stretch>
+        </p:blipFill>
+        <p:spPr bwMode="auto">
+          <a:xfrm>
+            <a:off x="6121400" y="2044700"/>
+            <a:ext cx="2781300" cy="1714500"/>
+          </a:xfrm>
+          <a:prstGeom prst="rect">
+            <a:avLst/>
+          </a:prstGeom>
+          <a:noFill/>
+          <a:ln w="9525">
+            <a:noFill/>
+            <a:headEnd/>
+            <a:tailEnd/>
+          </a:ln>
+        </p:spPr>
+      </p:pic>
     </p:spTree>
   </p:cSld>
 </p:sld>
@@ -9838,14 +12424,106 @@
                 <a:pPr lvl="0"/>
                 <a:r>
                   <a:rPr/>
-                  <a:t>yi: value of Y for ith observation X1 = xi1, X2 = xi2,…, Xp = xip</a:t>
+                  <a:t>y</a:t>
+                </a:r>
+                <a:r>
+                  <a:rPr baseline="-25000"/>
+                  <a:t>i</a:t>
+                </a:r>
+                <a:r>
+                  <a:rPr/>
+                  <a:t>: value of Y for i</a:t>
+                </a:r>
+                <a:r>
+                  <a:rPr baseline="30000"/>
+                  <a:t>th</a:t>
+                </a:r>
+                <a:r>
+                  <a:rPr/>
+                  <a:t> observation X</a:t>
+                </a:r>
+                <a:r>
+                  <a:rPr baseline="-25000"/>
+                  <a:t>1</a:t>
+                </a:r>
+                <a:r>
+                  <a:rPr/>
+                  <a:t> = x</a:t>
+                </a:r>
+                <a:r>
+                  <a:rPr baseline="-25000"/>
+                  <a:t>i1</a:t>
+                </a:r>
+                <a:r>
+                  <a:rPr/>
+                  <a:t>, X</a:t>
+                </a:r>
+                <a:r>
+                  <a:rPr baseline="-25000"/>
+                  <a:t>2</a:t>
+                </a:r>
+                <a:r>
+                  <a:rPr/>
+                  <a:t> = x</a:t>
+                </a:r>
+                <a:r>
+                  <a:rPr baseline="-25000"/>
+                  <a:t>i2</a:t>
+                </a:r>
+                <a:r>
+                  <a:rPr/>
+                  <a:t>,…, x</a:t>
+                </a:r>
+                <a:r>
+                  <a:rPr baseline="-25000"/>
+                  <a:t>p</a:t>
+                </a:r>
+                <a:r>
+                  <a:rPr/>
+                  <a:t> = x</a:t>
+                </a:r>
+                <a:r>
+                  <a:rPr baseline="-25000"/>
+                  <a:t>ip</a:t>
                 </a:r>
               </a:p>
               <a:p>
                 <a:pPr lvl="0"/>
                 <a:r>
                   <a:rPr/>
-                  <a:t>β0: population intercept, the mean value of Y when X1 = 0, X2 = 0,…, Xp = 0</a:t>
+                  <a:t>β</a:t>
+                </a:r>
+                <a:r>
+                  <a:rPr baseline="-25000"/>
+                  <a:t>0</a:t>
+                </a:r>
+                <a:r>
+                  <a:rPr/>
+                  <a:t>: population intercept, the mean value of Y when X</a:t>
+                </a:r>
+                <a:r>
+                  <a:rPr baseline="-25000"/>
+                  <a:t>1</a:t>
+                </a:r>
+                <a:r>
+                  <a:rPr/>
+                  <a:t>= 0, X</a:t>
+                </a:r>
+                <a:r>
+                  <a:rPr baseline="-25000"/>
+                  <a:t>2</a:t>
+                </a:r>
+                <a:r>
+                  <a:rPr/>
+                  <a:t> = 0,…, X</a:t>
+                </a:r>
+                <a:r>
+                  <a:rPr baseline="-25000"/>
+                  <a:t>p</a:t>
+                </a:r>
+                <a:r>
+                  <a:rPr/>
+                  <a:t> = 0</a:t>
                 </a:r>
               </a:p>
             </p:txBody>
@@ -10122,21 +12800,86 @@
                 <a:pPr lvl="0"/>
                 <a:r>
                   <a:rPr/>
-                  <a:t>β1: partial population slope, change in Y per unit change in X1 holding other X-vars constant</a:t>
+                  <a:t>β</a:t>
+                </a:r>
+                <a:r>
+                  <a:rPr baseline="-25000"/>
+                  <a:t>1</a:t>
+                </a:r>
+                <a:r>
+                  <a:rPr/>
+                  <a:t>: partial regression slope, change in Y per unit change in X</a:t>
+                </a:r>
+                <a:r>
+                  <a:rPr baseline="-25000"/>
+                  <a:t>1</a:t>
+                </a:r>
+                <a:r>
+                  <a:rPr/>
+                  <a:t> holding other X-vars constant</a:t>
                 </a:r>
               </a:p>
               <a:p>
                 <a:pPr lvl="0"/>
                 <a:r>
                   <a:rPr/>
-                  <a:t>β2: partial population slope, change in Y per unit change in X2 holding other X-vars constant</a:t>
+                  <a:t>β</a:t>
+                </a:r>
+                <a:r>
+                  <a:rPr baseline="-25000"/>
+                  <a:t>2</a:t>
+                </a:r>
+                <a:r>
+                  <a:rPr/>
+                  <a:t>: partial regression slope, change in Y per unit change in X</a:t>
+                </a:r>
+                <a:r>
+                  <a:rPr baseline="-25000"/>
+                  <a:t>2</a:t>
+                </a:r>
+                <a:r>
+                  <a:rPr/>
+                  <a:t> holding other X-vars constant</a:t>
                 </a:r>
               </a:p>
               <a:p>
                 <a:pPr lvl="0"/>
                 <a:r>
                   <a:rPr/>
-                  <a:t>βp: partial population slope, change in Y per unit change in Xp holding other X-vars constant</a:t>
+                  <a:t>β</a:t>
+                </a:r>
+                <a:r>
+                  <a:rPr baseline="-25000"/>
+                  <a:t>p</a:t>
+                </a:r>
+                <a:r>
+                  <a:rPr/>
+                  <a:t>: partial regression slope, change in Y per unit change in X</a:t>
+                </a:r>
+                <a:r>
+                  <a:rPr baseline="-25000"/>
+                  <a:t>p</a:t>
+                </a:r>
+                <a:r>
+                  <a:rPr/>
+                  <a:t> holding other X-vars constant</a:t>
+                </a:r>
+              </a:p>
+              <a:p>
+                <a:pPr lvl="0" indent="0" marL="0">
+                  <a:buNone/>
+                </a:pPr>
+                <a:r>
+                  <a:rPr/>
+                  <a:t>What is partial - the relationship between a predictor variable and the response variable </a:t>
+                </a:r>
+                <a:r>
+                  <a:rPr b="1"/>
+                  <a:t>while holding all other predictor variables constant</a:t>
+                </a:r>
+                <a:r>
+                  <a:rPr/>
+                  <a:t>. It tells you the isolated effect of one variable, controlling for the influence of others.</a:t>
                 </a:r>
               </a:p>
             </p:txBody>

--- a/docs/ecostats_lectures/lecture_10/10_01_lecture_powerpoint.pptx
+++ b/docs/ecostats_lectures/lecture_10/10_01_lecture_powerpoint.pptx
@@ -6306,9 +6306,12 @@
         </p:nvSpPr>
         <p:spPr>
           <a:xfrm>
-            <a:off x="139485" y="78119"/>
-            <a:ext cx="8229600" cy="607682"/>
+            <a:off x="0" y="0"/>
+            <a:ext cx="9144000" cy="602780"/>
           </a:xfrm>
+          <a:solidFill>
+            <a:srgbClr val="70121D"/>
+          </a:solidFill>
         </p:spPr>
         <p:txBody>
           <a:bodyPr/>
@@ -6330,12 +6333,12 @@
       </p:sp>
       <p:sp>
         <p:nvSpPr>
-          <p:cNvPr id="3" name="Text Placeholder 2"/>
-          <p:cNvSpPr>
-            <a:spLocks noGrp="1"/>
-          </p:cNvSpPr>
-          <p:nvPr>
-            <p:ph idx="1" type="body"/>
+          <p:cNvPr id="3" name="Content Placeholder 2"/>
+          <p:cNvSpPr>
+            <a:spLocks noGrp="1"/>
+          </p:cNvSpPr>
+          <p:nvPr>
+            <p:ph idx="1" sz="half"/>
           </p:nvPr>
         </p:nvSpPr>
         <p:spPr/>
@@ -6358,1111 +6361,6 @@
             <a:r>
               <a:rPr/>
               <a:t>want to know shape of relationship while holding other predictors constant</a:t>
-            </a:r>
-          </a:p>
-        </p:txBody>
-      </p:sp>
-      <p:sp>
-        <p:nvSpPr>
-          <p:cNvPr id="5" name="Text Placeholder 4"/>
-          <p:cNvSpPr>
-            <a:spLocks noGrp="1"/>
-          </p:cNvSpPr>
-          <p:nvPr>
-            <p:ph idx="3" sz="quarter" type="body"/>
-          </p:nvPr>
-        </p:nvSpPr>
-        <p:spPr/>
-        <p:txBody>
-          <a:bodyPr/>
-          <a:lstStyle/>
-          <a:p>
-            <a:pPr lvl="0" indent="0">
-              <a:buNone/>
-            </a:pPr>
-            <a:r>
-              <a:rPr>
-                <a:solidFill>
-                  <a:srgbClr val="5E5E5E"/>
-                </a:solidFill>
-                <a:latin typeface="Courier"/>
-              </a:rPr>
-              <a:t>#| echo: false</a:t>
-            </a:r>
-            <a:br/>
-            <a:r>
-              <a:rPr>
-                <a:solidFill>
-                  <a:srgbClr val="5E5E5E"/>
-                </a:solidFill>
-                <a:latin typeface="Courier"/>
-              </a:rPr>
-              <a:t>#| message: false</a:t>
-            </a:r>
-            <a:br/>
-            <a:r>
-              <a:rPr>
-                <a:solidFill>
-                  <a:srgbClr val="5E5E5E"/>
-                </a:solidFill>
-                <a:latin typeface="Courier"/>
-              </a:rPr>
-              <a:t>#| warning: false</a:t>
-            </a:r>
-            <a:br/>
-            <a:r>
-              <a:rPr>
-                <a:solidFill>
-                  <a:srgbClr val="5E5E5E"/>
-                </a:solidFill>
-                <a:latin typeface="Courier"/>
-              </a:rPr>
-              <a:t>#| paged-print: false</a:t>
-            </a:r>
-            <a:br/>
-            <a:r>
-              <a:rPr>
-                <a:solidFill>
-                  <a:srgbClr val="5E5E5E"/>
-                </a:solidFill>
-                <a:latin typeface="Courier"/>
-              </a:rPr>
-              <a:t># Plot 1: Ant species vs Elevation</a:t>
-            </a:r>
-            <a:br/>
-            <a:r>
-              <a:rPr>
-                <a:solidFill>
-                  <a:srgbClr val="003B4F"/>
-                </a:solidFill>
-                <a:latin typeface="Courier"/>
-              </a:rPr>
-              <a:t>p1 &lt;- </a:t>
-            </a:r>
-            <a:r>
-              <a:rPr>
-                <a:solidFill>
-                  <a:srgbClr val="4758AB"/>
-                </a:solidFill>
-                <a:latin typeface="Courier"/>
-              </a:rPr>
-              <a:t>ggplot</a:t>
-            </a:r>
-            <a:r>
-              <a:rPr>
-                <a:solidFill>
-                  <a:srgbClr val="003B4F"/>
-                </a:solidFill>
-                <a:latin typeface="Courier"/>
-              </a:rPr>
-              <a:t>(ant_df, </a:t>
-            </a:r>
-            <a:r>
-              <a:rPr>
-                <a:solidFill>
-                  <a:srgbClr val="4758AB"/>
-                </a:solidFill>
-                <a:latin typeface="Courier"/>
-              </a:rPr>
-              <a:t>aes</a:t>
-            </a:r>
-            <a:r>
-              <a:rPr>
-                <a:solidFill>
-                  <a:srgbClr val="003B4F"/>
-                </a:solidFill>
-                <a:latin typeface="Courier"/>
-              </a:rPr>
-              <a:t>(</a:t>
-            </a:r>
-            <a:r>
-              <a:rPr>
-                <a:solidFill>
-                  <a:srgbClr val="657422"/>
-                </a:solidFill>
-                <a:latin typeface="Courier"/>
-              </a:rPr>
-              <a:t>x =</a:t>
-            </a:r>
-            <a:r>
-              <a:rPr>
-                <a:solidFill>
-                  <a:srgbClr val="003B4F"/>
-                </a:solidFill>
-                <a:latin typeface="Courier"/>
-              </a:rPr>
-              <a:t> elevation, </a:t>
-            </a:r>
-            <a:r>
-              <a:rPr>
-                <a:solidFill>
-                  <a:srgbClr val="657422"/>
-                </a:solidFill>
-                <a:latin typeface="Courier"/>
-              </a:rPr>
-              <a:t>y =</a:t>
-            </a:r>
-            <a:r>
-              <a:rPr>
-                <a:solidFill>
-                  <a:srgbClr val="003B4F"/>
-                </a:solidFill>
-                <a:latin typeface="Courier"/>
-              </a:rPr>
-              <a:t> ant_spp)) </a:t>
-            </a:r>
-            <a:r>
-              <a:rPr>
-                <a:solidFill>
-                  <a:srgbClr val="5E5E5E"/>
-                </a:solidFill>
-                <a:latin typeface="Courier"/>
-              </a:rPr>
-              <a:t>+</a:t>
-            </a:r>
-            <a:br/>
-            <a:r>
-              <a:rPr>
-                <a:solidFill>
-                  <a:srgbClr val="003B4F"/>
-                </a:solidFill>
-                <a:latin typeface="Courier"/>
-              </a:rPr>
-              <a:t>  </a:t>
-            </a:r>
-            <a:r>
-              <a:rPr>
-                <a:solidFill>
-                  <a:srgbClr val="4758AB"/>
-                </a:solidFill>
-                <a:latin typeface="Courier"/>
-              </a:rPr>
-              <a:t>geom_point</a:t>
-            </a:r>
-            <a:r>
-              <a:rPr>
-                <a:solidFill>
-                  <a:srgbClr val="003B4F"/>
-                </a:solidFill>
-                <a:latin typeface="Courier"/>
-              </a:rPr>
-              <a:t>(</a:t>
-            </a:r>
-            <a:r>
-              <a:rPr>
-                <a:solidFill>
-                  <a:srgbClr val="657422"/>
-                </a:solidFill>
-                <a:latin typeface="Courier"/>
-              </a:rPr>
-              <a:t>size =</a:t>
-            </a:r>
-            <a:r>
-              <a:rPr>
-                <a:solidFill>
-                  <a:srgbClr val="003B4F"/>
-                </a:solidFill>
-                <a:latin typeface="Courier"/>
-              </a:rPr>
-              <a:t> </a:t>
-            </a:r>
-            <a:r>
-              <a:rPr>
-                <a:solidFill>
-                  <a:srgbClr val="AD0000"/>
-                </a:solidFill>
-                <a:latin typeface="Courier"/>
-              </a:rPr>
-              <a:t>3</a:t>
-            </a:r>
-            <a:r>
-              <a:rPr>
-                <a:solidFill>
-                  <a:srgbClr val="003B4F"/>
-                </a:solidFill>
-                <a:latin typeface="Courier"/>
-              </a:rPr>
-              <a:t>, </a:t>
-            </a:r>
-            <a:r>
-              <a:rPr>
-                <a:solidFill>
-                  <a:srgbClr val="657422"/>
-                </a:solidFill>
-                <a:latin typeface="Courier"/>
-              </a:rPr>
-              <a:t>color =</a:t>
-            </a:r>
-            <a:r>
-              <a:rPr>
-                <a:solidFill>
-                  <a:srgbClr val="003B4F"/>
-                </a:solidFill>
-                <a:latin typeface="Courier"/>
-              </a:rPr>
-              <a:t> </a:t>
-            </a:r>
-            <a:r>
-              <a:rPr>
-                <a:solidFill>
-                  <a:srgbClr val="20794D"/>
-                </a:solidFill>
-                <a:latin typeface="Courier"/>
-              </a:rPr>
-              <a:t>"steelblue"</a:t>
-            </a:r>
-            <a:r>
-              <a:rPr>
-                <a:solidFill>
-                  <a:srgbClr val="003B4F"/>
-                </a:solidFill>
-                <a:latin typeface="Courier"/>
-              </a:rPr>
-              <a:t>) </a:t>
-            </a:r>
-            <a:r>
-              <a:rPr>
-                <a:solidFill>
-                  <a:srgbClr val="5E5E5E"/>
-                </a:solidFill>
-                <a:latin typeface="Courier"/>
-              </a:rPr>
-              <a:t>+</a:t>
-            </a:r>
-            <a:br/>
-            <a:r>
-              <a:rPr>
-                <a:solidFill>
-                  <a:srgbClr val="003B4F"/>
-                </a:solidFill>
-                <a:latin typeface="Courier"/>
-              </a:rPr>
-              <a:t>  </a:t>
-            </a:r>
-            <a:r>
-              <a:rPr>
-                <a:solidFill>
-                  <a:srgbClr val="4758AB"/>
-                </a:solidFill>
-                <a:latin typeface="Courier"/>
-              </a:rPr>
-              <a:t>geom_smooth</a:t>
-            </a:r>
-            <a:r>
-              <a:rPr>
-                <a:solidFill>
-                  <a:srgbClr val="003B4F"/>
-                </a:solidFill>
-                <a:latin typeface="Courier"/>
-              </a:rPr>
-              <a:t>(</a:t>
-            </a:r>
-            <a:r>
-              <a:rPr>
-                <a:solidFill>
-                  <a:srgbClr val="657422"/>
-                </a:solidFill>
-                <a:latin typeface="Courier"/>
-              </a:rPr>
-              <a:t>method =</a:t>
-            </a:r>
-            <a:r>
-              <a:rPr>
-                <a:solidFill>
-                  <a:srgbClr val="003B4F"/>
-                </a:solidFill>
-                <a:latin typeface="Courier"/>
-              </a:rPr>
-              <a:t> </a:t>
-            </a:r>
-            <a:r>
-              <a:rPr>
-                <a:solidFill>
-                  <a:srgbClr val="20794D"/>
-                </a:solidFill>
-                <a:latin typeface="Courier"/>
-              </a:rPr>
-              <a:t>"lm"</a:t>
-            </a:r>
-            <a:r>
-              <a:rPr>
-                <a:solidFill>
-                  <a:srgbClr val="003B4F"/>
-                </a:solidFill>
-                <a:latin typeface="Courier"/>
-              </a:rPr>
-              <a:t>, </a:t>
-            </a:r>
-            <a:r>
-              <a:rPr>
-                <a:solidFill>
-                  <a:srgbClr val="657422"/>
-                </a:solidFill>
-                <a:latin typeface="Courier"/>
-              </a:rPr>
-              <a:t>se =</a:t>
-            </a:r>
-            <a:r>
-              <a:rPr>
-                <a:solidFill>
-                  <a:srgbClr val="003B4F"/>
-                </a:solidFill>
-                <a:latin typeface="Courier"/>
-              </a:rPr>
-              <a:t> </a:t>
-            </a:r>
-            <a:r>
-              <a:rPr>
-                <a:solidFill>
-                  <a:srgbClr val="8F5902"/>
-                </a:solidFill>
-                <a:latin typeface="Courier"/>
-              </a:rPr>
-              <a:t>TRUE</a:t>
-            </a:r>
-            <a:r>
-              <a:rPr>
-                <a:solidFill>
-                  <a:srgbClr val="003B4F"/>
-                </a:solidFill>
-                <a:latin typeface="Courier"/>
-              </a:rPr>
-              <a:t>, </a:t>
-            </a:r>
-            <a:r>
-              <a:rPr>
-                <a:solidFill>
-                  <a:srgbClr val="657422"/>
-                </a:solidFill>
-                <a:latin typeface="Courier"/>
-              </a:rPr>
-              <a:t>color =</a:t>
-            </a:r>
-            <a:r>
-              <a:rPr>
-                <a:solidFill>
-                  <a:srgbClr val="003B4F"/>
-                </a:solidFill>
-                <a:latin typeface="Courier"/>
-              </a:rPr>
-              <a:t> </a:t>
-            </a:r>
-            <a:r>
-              <a:rPr>
-                <a:solidFill>
-                  <a:srgbClr val="20794D"/>
-                </a:solidFill>
-                <a:latin typeface="Courier"/>
-              </a:rPr>
-              <a:t>"red"</a:t>
-            </a:r>
-            <a:r>
-              <a:rPr>
-                <a:solidFill>
-                  <a:srgbClr val="003B4F"/>
-                </a:solidFill>
-                <a:latin typeface="Courier"/>
-              </a:rPr>
-              <a:t>) </a:t>
-            </a:r>
-            <a:r>
-              <a:rPr>
-                <a:solidFill>
-                  <a:srgbClr val="5E5E5E"/>
-                </a:solidFill>
-                <a:latin typeface="Courier"/>
-              </a:rPr>
-              <a:t>+</a:t>
-            </a:r>
-            <a:br/>
-            <a:r>
-              <a:rPr>
-                <a:solidFill>
-                  <a:srgbClr val="003B4F"/>
-                </a:solidFill>
-                <a:latin typeface="Courier"/>
-              </a:rPr>
-              <a:t>  </a:t>
-            </a:r>
-            <a:r>
-              <a:rPr>
-                <a:solidFill>
-                  <a:srgbClr val="4758AB"/>
-                </a:solidFill>
-                <a:latin typeface="Courier"/>
-              </a:rPr>
-              <a:t>labs</a:t>
-            </a:r>
-            <a:r>
-              <a:rPr>
-                <a:solidFill>
-                  <a:srgbClr val="003B4F"/>
-                </a:solidFill>
-                <a:latin typeface="Courier"/>
-              </a:rPr>
-              <a:t>(</a:t>
-            </a:r>
-            <a:r>
-              <a:rPr>
-                <a:solidFill>
-                  <a:srgbClr val="657422"/>
-                </a:solidFill>
-                <a:latin typeface="Courier"/>
-              </a:rPr>
-              <a:t>x =</a:t>
-            </a:r>
-            <a:r>
-              <a:rPr>
-                <a:solidFill>
-                  <a:srgbClr val="003B4F"/>
-                </a:solidFill>
-                <a:latin typeface="Courier"/>
-              </a:rPr>
-              <a:t> </a:t>
-            </a:r>
-            <a:r>
-              <a:rPr>
-                <a:solidFill>
-                  <a:srgbClr val="20794D"/>
-                </a:solidFill>
-                <a:latin typeface="Courier"/>
-              </a:rPr>
-              <a:t>"Elevation (m)"</a:t>
-            </a:r>
-            <a:r>
-              <a:rPr>
-                <a:solidFill>
-                  <a:srgbClr val="003B4F"/>
-                </a:solidFill>
-                <a:latin typeface="Courier"/>
-              </a:rPr>
-              <a:t>, </a:t>
-            </a:r>
-            <a:br/>
-            <a:r>
-              <a:rPr>
-                <a:solidFill>
-                  <a:srgbClr val="003B4F"/>
-                </a:solidFill>
-                <a:latin typeface="Courier"/>
-              </a:rPr>
-              <a:t>       </a:t>
-            </a:r>
-            <a:r>
-              <a:rPr>
-                <a:solidFill>
-                  <a:srgbClr val="657422"/>
-                </a:solidFill>
-                <a:latin typeface="Courier"/>
-              </a:rPr>
-              <a:t>y =</a:t>
-            </a:r>
-            <a:r>
-              <a:rPr>
-                <a:solidFill>
-                  <a:srgbClr val="003B4F"/>
-                </a:solidFill>
-                <a:latin typeface="Courier"/>
-              </a:rPr>
-              <a:t> </a:t>
-            </a:r>
-            <a:r>
-              <a:rPr>
-                <a:solidFill>
-                  <a:srgbClr val="20794D"/>
-                </a:solidFill>
-                <a:latin typeface="Courier"/>
-              </a:rPr>
-              <a:t>"Ant Species Richness"</a:t>
-            </a:r>
-            <a:r>
-              <a:rPr>
-                <a:solidFill>
-                  <a:srgbClr val="003B4F"/>
-                </a:solidFill>
-                <a:latin typeface="Courier"/>
-              </a:rPr>
-              <a:t>) </a:t>
-            </a:r>
-            <a:r>
-              <a:rPr>
-                <a:solidFill>
-                  <a:srgbClr val="5E5E5E"/>
-                </a:solidFill>
-                <a:latin typeface="Courier"/>
-              </a:rPr>
-              <a:t>+</a:t>
-            </a:r>
-            <a:br/>
-            <a:r>
-              <a:rPr>
-                <a:solidFill>
-                  <a:srgbClr val="003B4F"/>
-                </a:solidFill>
-                <a:latin typeface="Courier"/>
-              </a:rPr>
-              <a:t>  </a:t>
-            </a:r>
-            <a:r>
-              <a:rPr>
-                <a:solidFill>
-                  <a:srgbClr val="4758AB"/>
-                </a:solidFill>
-                <a:latin typeface="Courier"/>
-              </a:rPr>
-              <a:t>theme_minimal</a:t>
-            </a:r>
-            <a:r>
-              <a:rPr>
-                <a:solidFill>
-                  <a:srgbClr val="003B4F"/>
-                </a:solidFill>
-                <a:latin typeface="Courier"/>
-              </a:rPr>
-              <a:t>()</a:t>
-            </a:r>
-            <a:br/>
-            <a:br/>
-            <a:r>
-              <a:rPr>
-                <a:solidFill>
-                  <a:srgbClr val="5E5E5E"/>
-                </a:solidFill>
-                <a:latin typeface="Courier"/>
-              </a:rPr>
-              <a:t># Plot 2: Ant species vs Latitude</a:t>
-            </a:r>
-            <a:br/>
-            <a:r>
-              <a:rPr>
-                <a:solidFill>
-                  <a:srgbClr val="003B4F"/>
-                </a:solidFill>
-                <a:latin typeface="Courier"/>
-              </a:rPr>
-              <a:t>p2 &lt;- </a:t>
-            </a:r>
-            <a:r>
-              <a:rPr>
-                <a:solidFill>
-                  <a:srgbClr val="4758AB"/>
-                </a:solidFill>
-                <a:latin typeface="Courier"/>
-              </a:rPr>
-              <a:t>ggplot</a:t>
-            </a:r>
-            <a:r>
-              <a:rPr>
-                <a:solidFill>
-                  <a:srgbClr val="003B4F"/>
-                </a:solidFill>
-                <a:latin typeface="Courier"/>
-              </a:rPr>
-              <a:t>(ant_df, </a:t>
-            </a:r>
-            <a:r>
-              <a:rPr>
-                <a:solidFill>
-                  <a:srgbClr val="4758AB"/>
-                </a:solidFill>
-                <a:latin typeface="Courier"/>
-              </a:rPr>
-              <a:t>aes</a:t>
-            </a:r>
-            <a:r>
-              <a:rPr>
-                <a:solidFill>
-                  <a:srgbClr val="003B4F"/>
-                </a:solidFill>
-                <a:latin typeface="Courier"/>
-              </a:rPr>
-              <a:t>(</a:t>
-            </a:r>
-            <a:r>
-              <a:rPr>
-                <a:solidFill>
-                  <a:srgbClr val="657422"/>
-                </a:solidFill>
-                <a:latin typeface="Courier"/>
-              </a:rPr>
-              <a:t>x =</a:t>
-            </a:r>
-            <a:r>
-              <a:rPr>
-                <a:solidFill>
-                  <a:srgbClr val="003B4F"/>
-                </a:solidFill>
-                <a:latin typeface="Courier"/>
-              </a:rPr>
-              <a:t> latitude, </a:t>
-            </a:r>
-            <a:r>
-              <a:rPr>
-                <a:solidFill>
-                  <a:srgbClr val="657422"/>
-                </a:solidFill>
-                <a:latin typeface="Courier"/>
-              </a:rPr>
-              <a:t>y =</a:t>
-            </a:r>
-            <a:r>
-              <a:rPr>
-                <a:solidFill>
-                  <a:srgbClr val="003B4F"/>
-                </a:solidFill>
-                <a:latin typeface="Courier"/>
-              </a:rPr>
-              <a:t> ant_spp)) </a:t>
-            </a:r>
-            <a:r>
-              <a:rPr>
-                <a:solidFill>
-                  <a:srgbClr val="5E5E5E"/>
-                </a:solidFill>
-                <a:latin typeface="Courier"/>
-              </a:rPr>
-              <a:t>+</a:t>
-            </a:r>
-            <a:br/>
-            <a:r>
-              <a:rPr>
-                <a:solidFill>
-                  <a:srgbClr val="003B4F"/>
-                </a:solidFill>
-                <a:latin typeface="Courier"/>
-              </a:rPr>
-              <a:t>  </a:t>
-            </a:r>
-            <a:r>
-              <a:rPr>
-                <a:solidFill>
-                  <a:srgbClr val="4758AB"/>
-                </a:solidFill>
-                <a:latin typeface="Courier"/>
-              </a:rPr>
-              <a:t>geom_point</a:t>
-            </a:r>
-            <a:r>
-              <a:rPr>
-                <a:solidFill>
-                  <a:srgbClr val="003B4F"/>
-                </a:solidFill>
-                <a:latin typeface="Courier"/>
-              </a:rPr>
-              <a:t>(</a:t>
-            </a:r>
-            <a:r>
-              <a:rPr>
-                <a:solidFill>
-                  <a:srgbClr val="657422"/>
-                </a:solidFill>
-                <a:latin typeface="Courier"/>
-              </a:rPr>
-              <a:t>size =</a:t>
-            </a:r>
-            <a:r>
-              <a:rPr>
-                <a:solidFill>
-                  <a:srgbClr val="003B4F"/>
-                </a:solidFill>
-                <a:latin typeface="Courier"/>
-              </a:rPr>
-              <a:t> </a:t>
-            </a:r>
-            <a:r>
-              <a:rPr>
-                <a:solidFill>
-                  <a:srgbClr val="AD0000"/>
-                </a:solidFill>
-                <a:latin typeface="Courier"/>
-              </a:rPr>
-              <a:t>3</a:t>
-            </a:r>
-            <a:r>
-              <a:rPr>
-                <a:solidFill>
-                  <a:srgbClr val="003B4F"/>
-                </a:solidFill>
-                <a:latin typeface="Courier"/>
-              </a:rPr>
-              <a:t>, </a:t>
-            </a:r>
-            <a:r>
-              <a:rPr>
-                <a:solidFill>
-                  <a:srgbClr val="657422"/>
-                </a:solidFill>
-                <a:latin typeface="Courier"/>
-              </a:rPr>
-              <a:t>color =</a:t>
-            </a:r>
-            <a:r>
-              <a:rPr>
-                <a:solidFill>
-                  <a:srgbClr val="003B4F"/>
-                </a:solidFill>
-                <a:latin typeface="Courier"/>
-              </a:rPr>
-              <a:t> </a:t>
-            </a:r>
-            <a:r>
-              <a:rPr>
-                <a:solidFill>
-                  <a:srgbClr val="20794D"/>
-                </a:solidFill>
-                <a:latin typeface="Courier"/>
-              </a:rPr>
-              <a:t>"steelblue"</a:t>
-            </a:r>
-            <a:r>
-              <a:rPr>
-                <a:solidFill>
-                  <a:srgbClr val="003B4F"/>
-                </a:solidFill>
-                <a:latin typeface="Courier"/>
-              </a:rPr>
-              <a:t>) </a:t>
-            </a:r>
-            <a:r>
-              <a:rPr>
-                <a:solidFill>
-                  <a:srgbClr val="5E5E5E"/>
-                </a:solidFill>
-                <a:latin typeface="Courier"/>
-              </a:rPr>
-              <a:t>+</a:t>
-            </a:r>
-            <a:br/>
-            <a:r>
-              <a:rPr>
-                <a:solidFill>
-                  <a:srgbClr val="003B4F"/>
-                </a:solidFill>
-                <a:latin typeface="Courier"/>
-              </a:rPr>
-              <a:t>  </a:t>
-            </a:r>
-            <a:r>
-              <a:rPr>
-                <a:solidFill>
-                  <a:srgbClr val="4758AB"/>
-                </a:solidFill>
-                <a:latin typeface="Courier"/>
-              </a:rPr>
-              <a:t>geom_smooth</a:t>
-            </a:r>
-            <a:r>
-              <a:rPr>
-                <a:solidFill>
-                  <a:srgbClr val="003B4F"/>
-                </a:solidFill>
-                <a:latin typeface="Courier"/>
-              </a:rPr>
-              <a:t>(</a:t>
-            </a:r>
-            <a:r>
-              <a:rPr>
-                <a:solidFill>
-                  <a:srgbClr val="657422"/>
-                </a:solidFill>
-                <a:latin typeface="Courier"/>
-              </a:rPr>
-              <a:t>method =</a:t>
-            </a:r>
-            <a:r>
-              <a:rPr>
-                <a:solidFill>
-                  <a:srgbClr val="003B4F"/>
-                </a:solidFill>
-                <a:latin typeface="Courier"/>
-              </a:rPr>
-              <a:t> </a:t>
-            </a:r>
-            <a:r>
-              <a:rPr>
-                <a:solidFill>
-                  <a:srgbClr val="20794D"/>
-                </a:solidFill>
-                <a:latin typeface="Courier"/>
-              </a:rPr>
-              <a:t>"lm"</a:t>
-            </a:r>
-            <a:r>
-              <a:rPr>
-                <a:solidFill>
-                  <a:srgbClr val="003B4F"/>
-                </a:solidFill>
-                <a:latin typeface="Courier"/>
-              </a:rPr>
-              <a:t>, </a:t>
-            </a:r>
-            <a:r>
-              <a:rPr>
-                <a:solidFill>
-                  <a:srgbClr val="657422"/>
-                </a:solidFill>
-                <a:latin typeface="Courier"/>
-              </a:rPr>
-              <a:t>se =</a:t>
-            </a:r>
-            <a:r>
-              <a:rPr>
-                <a:solidFill>
-                  <a:srgbClr val="003B4F"/>
-                </a:solidFill>
-                <a:latin typeface="Courier"/>
-              </a:rPr>
-              <a:t> </a:t>
-            </a:r>
-            <a:r>
-              <a:rPr>
-                <a:solidFill>
-                  <a:srgbClr val="8F5902"/>
-                </a:solidFill>
-                <a:latin typeface="Courier"/>
-              </a:rPr>
-              <a:t>TRUE</a:t>
-            </a:r>
-            <a:r>
-              <a:rPr>
-                <a:solidFill>
-                  <a:srgbClr val="003B4F"/>
-                </a:solidFill>
-                <a:latin typeface="Courier"/>
-              </a:rPr>
-              <a:t>, </a:t>
-            </a:r>
-            <a:r>
-              <a:rPr>
-                <a:solidFill>
-                  <a:srgbClr val="657422"/>
-                </a:solidFill>
-                <a:latin typeface="Courier"/>
-              </a:rPr>
-              <a:t>color =</a:t>
-            </a:r>
-            <a:r>
-              <a:rPr>
-                <a:solidFill>
-                  <a:srgbClr val="003B4F"/>
-                </a:solidFill>
-                <a:latin typeface="Courier"/>
-              </a:rPr>
-              <a:t> </a:t>
-            </a:r>
-            <a:r>
-              <a:rPr>
-                <a:solidFill>
-                  <a:srgbClr val="20794D"/>
-                </a:solidFill>
-                <a:latin typeface="Courier"/>
-              </a:rPr>
-              <a:t>"red"</a:t>
-            </a:r>
-            <a:r>
-              <a:rPr>
-                <a:solidFill>
-                  <a:srgbClr val="003B4F"/>
-                </a:solidFill>
-                <a:latin typeface="Courier"/>
-              </a:rPr>
-              <a:t>) </a:t>
-            </a:r>
-            <a:r>
-              <a:rPr>
-                <a:solidFill>
-                  <a:srgbClr val="5E5E5E"/>
-                </a:solidFill>
-                <a:latin typeface="Courier"/>
-              </a:rPr>
-              <a:t>+</a:t>
-            </a:r>
-            <a:br/>
-            <a:r>
-              <a:rPr>
-                <a:solidFill>
-                  <a:srgbClr val="003B4F"/>
-                </a:solidFill>
-                <a:latin typeface="Courier"/>
-              </a:rPr>
-              <a:t>  </a:t>
-            </a:r>
-            <a:r>
-              <a:rPr>
-                <a:solidFill>
-                  <a:srgbClr val="4758AB"/>
-                </a:solidFill>
-                <a:latin typeface="Courier"/>
-              </a:rPr>
-              <a:t>labs</a:t>
-            </a:r>
-            <a:r>
-              <a:rPr>
-                <a:solidFill>
-                  <a:srgbClr val="003B4F"/>
-                </a:solidFill>
-                <a:latin typeface="Courier"/>
-              </a:rPr>
-              <a:t>(</a:t>
-            </a:r>
-            <a:r>
-              <a:rPr>
-                <a:solidFill>
-                  <a:srgbClr val="657422"/>
-                </a:solidFill>
-                <a:latin typeface="Courier"/>
-              </a:rPr>
-              <a:t>x =</a:t>
-            </a:r>
-            <a:r>
-              <a:rPr>
-                <a:solidFill>
-                  <a:srgbClr val="003B4F"/>
-                </a:solidFill>
-                <a:latin typeface="Courier"/>
-              </a:rPr>
-              <a:t> </a:t>
-            </a:r>
-            <a:r>
-              <a:rPr>
-                <a:solidFill>
-                  <a:srgbClr val="20794D"/>
-                </a:solidFill>
-                <a:latin typeface="Courier"/>
-              </a:rPr>
-              <a:t>"Latitude (degrees)"</a:t>
-            </a:r>
-            <a:r>
-              <a:rPr>
-                <a:solidFill>
-                  <a:srgbClr val="003B4F"/>
-                </a:solidFill>
-                <a:latin typeface="Courier"/>
-              </a:rPr>
-              <a:t>, </a:t>
-            </a:r>
-            <a:br/>
-            <a:r>
-              <a:rPr>
-                <a:solidFill>
-                  <a:srgbClr val="003B4F"/>
-                </a:solidFill>
-                <a:latin typeface="Courier"/>
-              </a:rPr>
-              <a:t>       </a:t>
-            </a:r>
-            <a:r>
-              <a:rPr>
-                <a:solidFill>
-                  <a:srgbClr val="657422"/>
-                </a:solidFill>
-                <a:latin typeface="Courier"/>
-              </a:rPr>
-              <a:t>y =</a:t>
-            </a:r>
-            <a:r>
-              <a:rPr>
-                <a:solidFill>
-                  <a:srgbClr val="003B4F"/>
-                </a:solidFill>
-                <a:latin typeface="Courier"/>
-              </a:rPr>
-              <a:t> </a:t>
-            </a:r>
-            <a:r>
-              <a:rPr>
-                <a:solidFill>
-                  <a:srgbClr val="20794D"/>
-                </a:solidFill>
-                <a:latin typeface="Courier"/>
-              </a:rPr>
-              <a:t>"Ant Species Richness"</a:t>
-            </a:r>
-            <a:r>
-              <a:rPr>
-                <a:solidFill>
-                  <a:srgbClr val="003B4F"/>
-                </a:solidFill>
-                <a:latin typeface="Courier"/>
-              </a:rPr>
-              <a:t>) </a:t>
-            </a:r>
-            <a:r>
-              <a:rPr>
-                <a:solidFill>
-                  <a:srgbClr val="5E5E5E"/>
-                </a:solidFill>
-                <a:latin typeface="Courier"/>
-              </a:rPr>
-              <a:t>+</a:t>
-            </a:r>
-            <a:br/>
-            <a:r>
-              <a:rPr>
-                <a:solidFill>
-                  <a:srgbClr val="003B4F"/>
-                </a:solidFill>
-                <a:latin typeface="Courier"/>
-              </a:rPr>
-              <a:t>  </a:t>
-            </a:r>
-            <a:r>
-              <a:rPr>
-                <a:solidFill>
-                  <a:srgbClr val="4758AB"/>
-                </a:solidFill>
-                <a:latin typeface="Courier"/>
-              </a:rPr>
-              <a:t>theme_minimal</a:t>
-            </a:r>
-            <a:r>
-              <a:rPr>
-                <a:solidFill>
-                  <a:srgbClr val="003B4F"/>
-                </a:solidFill>
-                <a:latin typeface="Courier"/>
-              </a:rPr>
-              <a:t>()</a:t>
-            </a:r>
-            <a:br/>
-            <a:br/>
-            <a:r>
-              <a:rPr>
-                <a:solidFill>
-                  <a:srgbClr val="5E5E5E"/>
-                </a:solidFill>
-                <a:latin typeface="Courier"/>
-              </a:rPr>
-              <a:t># Display plots top bottom</a:t>
-            </a:r>
-            <a:br/>
-            <a:br/>
-            <a:r>
-              <a:rPr>
-                <a:solidFill>
-                  <a:srgbClr val="003B4F"/>
-                </a:solidFill>
-                <a:latin typeface="Courier"/>
-              </a:rPr>
-              <a:t>p1 </a:t>
-            </a:r>
-            <a:r>
-              <a:rPr>
-                <a:solidFill>
-                  <a:srgbClr val="5E5E5E"/>
-                </a:solidFill>
-                <a:latin typeface="Courier"/>
-              </a:rPr>
-              <a:t>/</a:t>
-            </a:r>
-            <a:r>
-              <a:rPr>
-                <a:solidFill>
-                  <a:srgbClr val="003B4F"/>
-                </a:solidFill>
-                <a:latin typeface="Courier"/>
-              </a:rPr>
-              <a:t> p2 </a:t>
             </a:r>
           </a:p>
         </p:txBody>
@@ -7483,8 +6381,8 @@
         </p:blipFill>
         <p:spPr bwMode="auto">
           <a:xfrm>
-            <a:off x="4749800" y="1689100"/>
-            <a:ext cx="4038600" cy="2489200"/>
+            <a:off x="6121400" y="2044700"/>
+            <a:ext cx="2781300" cy="1714500"/>
           </a:xfrm>
           <a:prstGeom prst="rect">
             <a:avLst/>

--- a/docs/ecostats_lectures/lecture_10/10_01_lecture_powerpoint.pptx
+++ b/docs/ecostats_lectures/lecture_10/10_01_lecture_powerpoint.pptx
@@ -7142,8 +7142,11 @@
         <p:spPr>
           <a:xfrm>
             <a:off x="0" y="0"/>
-            <a:ext cx="9144000" cy="582780"/>
+            <a:ext cx="9144000" cy="602780"/>
           </a:xfrm>
+          <a:solidFill>
+            <a:srgbClr val="70121D"/>
+          </a:solidFill>
         </p:spPr>
         <p:txBody>
           <a:bodyPr/>
@@ -7159,6 +7162,31 @@
             <a:r>
               <a:rPr/>
               <a:t> Analyses</a:t>
+            </a:r>
+          </a:p>
+        </p:txBody>
+      </p:sp>
+      <p:sp>
+        <p:nvSpPr>
+          <p:cNvPr id="3" name="Content Placeholder 2"/>
+          <p:cNvSpPr>
+            <a:spLocks noGrp="1"/>
+          </p:cNvSpPr>
+          <p:nvPr>
+            <p:ph idx="1" sz="half"/>
+          </p:nvPr>
+        </p:nvSpPr>
+        <p:spPr/>
+        <p:txBody>
+          <a:bodyPr/>
+          <a:lstStyle/>
+          <a:p>
+            <a:pPr lvl="0" indent="0" marL="0">
+              <a:buNone/>
+            </a:pPr>
+            <a:r>
+              <a:rPr/>
+              <a:t>Interaction terms lead to “Curvature” of the regression (hyper)plane</a:t>
             </a:r>
           </a:p>
         </p:txBody>
@@ -7179,8 +7207,8 @@
         </p:blipFill>
         <p:spPr bwMode="auto">
           <a:xfrm>
-            <a:off x="1358900" y="609600"/>
-            <a:ext cx="6350000" cy="3911600"/>
+            <a:off x="6121400" y="2044700"/>
+            <a:ext cx="2781300" cy="1714500"/>
           </a:xfrm>
           <a:prstGeom prst="rect">
             <a:avLst/>

--- a/docs/ecostats_lectures/lecture_10/10_01_lecture_powerpoint.pptx
+++ b/docs/ecostats_lectures/lecture_10/10_01_lecture_powerpoint.pptx
@@ -7311,7 +7311,15 @@
             <a:pPr lvl="0"/>
             <a:r>
               <a:rPr/>
-              <a:t>2n is required; 6 parameters= 64 terms; 7 parameters= 128</a:t>
+              <a:t>2</a:t>
+            </a:r>
+            <a:r>
+              <a:rPr baseline="30000"/>
+              <a:t>n</a:t>
+            </a:r>
+            <a:r>
+              <a:rPr/>
+              <a:t> is required; 6 parameters = 64 terms; 7 parameters= 128</a:t>
             </a:r>
           </a:p>
           <a:p>
